--- a/presentation/ML710_LLaVA_Parallelism.pptx
+++ b/presentation/ML710_LLaVA_Parallelism.pptx
@@ -3125,8 +3125,8 @@
         </p:nvSpPr>
         <p:spPr>
           <a:xfrm>
-            <a:off x="457200" y="2286000"/>
-            <a:ext cx="11247120" cy="1371600"/>
+            <a:off x="548640" y="2286000"/>
+            <a:ext cx="11064240" cy="1371600"/>
           </a:xfrm>
           <a:prstGeom prst="rect">
             <a:avLst/>
@@ -3141,12 +3141,12 @@
           <a:p>
             <a:pPr algn="ctr"/>
             <a:r>
-              <a:rPr sz="5400" b="1">
-                <a:solidFill>
-                  <a:srgbClr val="101010"/>
-                </a:solidFill>
-              </a:rPr>
-              <a:t>ML710 Project</a:t>
+              <a:rPr sz="5600" b="1">
+                <a:solidFill>
+                  <a:srgbClr val="101010"/>
+                </a:solidFill>
+              </a:rPr>
+              <a:t>Parallelizing LLaVA</a:t>
             </a:r>
           </a:p>
         </p:txBody>
@@ -3159,8 +3159,8 @@
         </p:nvSpPr>
         <p:spPr>
           <a:xfrm>
-            <a:off x="457200" y="4114800"/>
-            <a:ext cx="11247120" cy="1828800"/>
+            <a:off x="457200" y="4023360"/>
+            <a:ext cx="11247120" cy="2011680"/>
           </a:xfrm>
           <a:prstGeom prst="rect">
             <a:avLst/>
@@ -3175,12 +3175,12 @@
           <a:p>
             <a:pPr algn="ctr"/>
             <a:r>
-              <a:rPr sz="2200">
+              <a:rPr sz="2400">
                 <a:solidFill>
                   <a:srgbClr val="555555"/>
                 </a:solidFill>
               </a:rPr>
-              <a:t>Parallelizing LLaVA Training</a:t>
+              <a:t>ML710 course project · MBZUAI</a:t>
             </a:r>
           </a:p>
           <a:p>
@@ -3192,7 +3192,7 @@
                 </a:solidFill>
               </a:rPr>
               <a:t>Rassul Magauin · Omar Ahmed · Youssef Ghallab
-MBZUAI · Spring 2026</a:t>
+Spring 2026</a:t>
             </a:r>
           </a:p>
         </p:txBody>
@@ -3223,8 +3223,8 @@
         </p:nvSpPr>
         <p:spPr>
           <a:xfrm>
-            <a:off x="457200" y="320040"/>
-            <a:ext cx="11247120" cy="822960"/>
+            <a:off x="548640" y="365760"/>
+            <a:ext cx="11064240" cy="822960"/>
           </a:xfrm>
           <a:prstGeom prst="rect">
             <a:avLst/>
@@ -3239,12 +3239,12 @@
           <a:p>
             <a:pPr algn="l"/>
             <a:r>
-              <a:rPr sz="3600" b="0">
-                <a:solidFill>
-                  <a:srgbClr val="101010"/>
-                </a:solidFill>
-              </a:rPr>
-              <a:t>Pipeline Parallelism — implementation (Ghallab)</a:t>
+              <a:rPr sz="3400" b="1">
+                <a:solidFill>
+                  <a:srgbClr val="101010"/>
+                </a:solidFill>
+              </a:rPr>
+              <a:t>How we built it (Ghallab)</a:t>
             </a:r>
           </a:p>
         </p:txBody>
@@ -3257,8 +3257,8 @@
         </p:nvSpPr>
         <p:spPr>
           <a:xfrm>
-            <a:off x="457200" y="1280160"/>
-            <a:ext cx="11247120" cy="5303520"/>
+            <a:off x="548640" y="1371600"/>
+            <a:ext cx="11064240" cy="5120640"/>
           </a:xfrm>
           <a:prstGeom prst="rect">
             <a:avLst/>
@@ -3266,23 +3266,38 @@
           <a:noFill/>
         </p:spPr>
         <p:txBody>
-          <a:bodyPr wrap="square">
+          <a:bodyPr wrap="square" anchor="ctr">
             <a:spAutoFit/>
           </a:bodyPr>
           <a:lstStyle/>
           <a:p>
             <a:pPr>
               <a:spcAft>
+                <a:spcPts val="800"/>
+              </a:spcAft>
+            </a:pPr>
+            <a:r>
+              <a:rPr sz="2200">
+                <a:solidFill>
+                  <a:srgbClr val="101010"/>
+                </a:solidFill>
+              </a:rPr>
+              <a:t>•  Manual two-stage pipeline. We didn't use torchgpipe or DeepSpeed-Pipeline.</a:t>
+            </a:r>
+          </a:p>
+          <a:p>
+            <a:pPr lvl="1">
+              <a:spcAft>
                 <a:spcPts val="400"/>
               </a:spcAft>
             </a:pPr>
             <a:r>
-              <a:rPr sz="1600">
-                <a:solidFill>
-                  <a:srgbClr val="101010"/>
-                </a:solidFill>
-              </a:rPr>
-              <a:t>- Manual 2-stage pipeline, no torchgpipe / DeepSpeed-Pipeline</a:t>
+              <a:rPr sz="1900">
+                <a:solidFill>
+                  <a:srgbClr val="555555"/>
+                </a:solidFill>
+              </a:rPr>
+              <a:t>    –  Custom training loop: LLaVA/llava/train/train_pipe_dist.py (~520 lines).</a:t>
             </a:r>
           </a:p>
           <a:p>
@@ -3292,12 +3307,27 @@
               </a:spcAft>
             </a:pPr>
             <a:r>
-              <a:rPr sz="1400">
+              <a:rPr sz="1900">
                 <a:solidFill>
                   <a:srgbClr val="555555"/>
                 </a:solidFill>
               </a:rPr>
-              <a:t>    - Custom loop in LLaVA/llava/train/train_pipe_dist.py (522 lines)</a:t>
+              <a:t>    –  Gloo backend for cross-node send/recv. NCCL had ordering issues with our mixed-dtype activations.</a:t>
+            </a:r>
+          </a:p>
+          <a:p>
+            <a:pPr>
+              <a:spcAft>
+                <a:spcPts val="800"/>
+              </a:spcAft>
+            </a:pPr>
+            <a:r>
+              <a:rPr sz="2200">
+                <a:solidFill>
+                  <a:srgbClr val="101010"/>
+                </a:solidFill>
+              </a:rPr>
+              <a:t>•  The model is cut at decoder layer k. There are 32 decoder layers in Vicuna-7B.</a:t>
             </a:r>
           </a:p>
           <a:p>
@@ -3307,27 +3337,27 @@
               </a:spcAft>
             </a:pPr>
             <a:r>
-              <a:rPr sz="1400">
+              <a:rPr sz="1900">
                 <a:solidFill>
                   <a:srgbClr val="555555"/>
                 </a:solidFill>
               </a:rPr>
-              <a:t>    - Gloo backend over Ethernet (NCCL had ordering issues with mixed dtypes)</a:t>
-            </a:r>
-          </a:p>
-          <a:p>
-            <a:pPr>
+              <a:t>    –  Rank 0 holds the vision tower (frozen), the MLP projection, and decoder layers 0..k-1.</a:t>
+            </a:r>
+          </a:p>
+          <a:p>
+            <a:pPr lvl="1">
               <a:spcAft>
                 <a:spcPts val="400"/>
               </a:spcAft>
             </a:pPr>
             <a:r>
-              <a:rPr sz="1600">
-                <a:solidFill>
-                  <a:srgbClr val="101010"/>
-                </a:solidFill>
-              </a:rPr>
-              <a:t>- Split point k = layer index in Vicuna-7B (32 decoder layers total)</a:t>
+              <a:rPr sz="1900">
+                <a:solidFill>
+                  <a:srgbClr val="555555"/>
+                </a:solidFill>
+              </a:rPr>
+              <a:t>    –  Rank 1 holds layers k..31, the final norm, the LM head, and computes loss.</a:t>
             </a:r>
           </a:p>
           <a:p>
@@ -3337,87 +3367,27 @@
               </a:spcAft>
             </a:pPr>
             <a:r>
-              <a:rPr sz="1400">
+              <a:rPr sz="1900">
                 <a:solidFill>
                   <a:srgbClr val="555555"/>
                 </a:solidFill>
               </a:rPr>
-              <a:t>    - Rank 0: vision tower (frozen) + projection + decoder layers 0..k-1</a:t>
-            </a:r>
-          </a:p>
-          <a:p>
-            <a:pPr lvl="1">
-              <a:spcAft>
-                <a:spcPts val="400"/>
-              </a:spcAft>
-            </a:pPr>
-            <a:r>
-              <a:rPr sz="1400">
-                <a:solidFill>
-                  <a:srgbClr val="555555"/>
-                </a:solidFill>
-              </a:rPr>
-              <a:t>    - Rank 1: decoder layers k..31 + final norm + LM head + loss</a:t>
-            </a:r>
-          </a:p>
-          <a:p>
-            <a:pPr lvl="1">
-              <a:spcAft>
-                <a:spcPts val="400"/>
-              </a:spcAft>
-            </a:pPr>
-            <a:r>
-              <a:rPr sz="1400">
-                <a:solidFill>
-                  <a:srgbClr val="555555"/>
-                </a:solidFill>
-              </a:rPr>
-              <a:t>    - Activations forward-passed and gradients backward-passed via dist send/recv</a:t>
-            </a:r>
-          </a:p>
-          <a:p>
-            <a:pPr>
-              <a:spcAft>
-                <a:spcPts val="400"/>
-              </a:spcAft>
-            </a:pPr>
-            <a:r>
-              <a:rPr sz="1600">
-                <a:solidFill>
-                  <a:srgbClr val="101010"/>
-                </a:solidFill>
-              </a:rPr>
-              <a:t>- Microbatch + gradient accumulation: per_device=1, accum=16 → effective batch 16</a:t>
-            </a:r>
-          </a:p>
-          <a:p>
-            <a:pPr lvl="1">
-              <a:spcAft>
-                <a:spcPts val="400"/>
-              </a:spcAft>
-            </a:pPr>
-            <a:r>
-              <a:rPr sz="1400">
-                <a:solidFill>
-                  <a:srgbClr val="555555"/>
-                </a:solidFill>
-              </a:rPr>
-              <a:t>    - num_micro_batches=1 (no inter-microbatch overlap, conservative)</a:t>
-            </a:r>
-          </a:p>
-          <a:p>
-            <a:pPr>
-              <a:spcAft>
-                <a:spcPts val="400"/>
-              </a:spcAft>
-            </a:pPr>
-            <a:r>
-              <a:rPr sz="1600">
-                <a:solidFill>
-                  <a:srgbClr val="101010"/>
-                </a:solidFill>
-              </a:rPr>
-              <a:t>- LoRA adapters added on rank-local layers only</a:t>
+              <a:t>    –  Activations flow forward, gradients flow back, by hand.</a:t>
+            </a:r>
+          </a:p>
+          <a:p>
+            <a:pPr>
+              <a:spcAft>
+                <a:spcPts val="800"/>
+              </a:spcAft>
+            </a:pPr>
+            <a:r>
+              <a:rPr sz="2200">
+                <a:solidFill>
+                  <a:srgbClr val="101010"/>
+                </a:solidFill>
+              </a:rPr>
+              <a:t>•  Gradient accumulation 16, microbatch 1 → effective batch 16. LoRA is added on each rank's local layers.</a:t>
             </a:r>
           </a:p>
         </p:txBody>
@@ -3448,8 +3418,8 @@
         </p:nvSpPr>
         <p:spPr>
           <a:xfrm>
-            <a:off x="457200" y="320040"/>
-            <a:ext cx="11247120" cy="822960"/>
+            <a:off x="548640" y="365760"/>
+            <a:ext cx="11064240" cy="822960"/>
           </a:xfrm>
           <a:prstGeom prst="rect">
             <a:avLst/>
@@ -3464,12 +3434,12 @@
           <a:p>
             <a:pPr algn="l"/>
             <a:r>
-              <a:rPr sz="3600" b="0">
-                <a:solidFill>
-                  <a:srgbClr val="101010"/>
-                </a:solidFill>
-              </a:rPr>
-              <a:t>Pipeline — split balancing</a:t>
+              <a:rPr sz="3400" b="1">
+                <a:solidFill>
+                  <a:srgbClr val="101010"/>
+                </a:solidFill>
+              </a:rPr>
+              <a:t>Finding a split that fits</a:t>
             </a:r>
           </a:p>
         </p:txBody>
@@ -3482,8 +3452,8 @@
         </p:nvSpPr>
         <p:spPr>
           <a:xfrm>
-            <a:off x="457200" y="1280160"/>
-            <a:ext cx="11247120" cy="5303520"/>
+            <a:off x="548640" y="1371600"/>
+            <a:ext cx="11064240" cy="5120640"/>
           </a:xfrm>
           <a:prstGeom prst="rect">
             <a:avLst/>
@@ -3491,23 +3461,68 @@
           <a:noFill/>
         </p:spPr>
         <p:txBody>
-          <a:bodyPr wrap="square">
+          <a:bodyPr wrap="square" anchor="ctr">
             <a:spAutoFit/>
           </a:bodyPr>
           <a:lstStyle/>
           <a:p>
             <a:pPr>
               <a:spcAft>
+                <a:spcPts val="800"/>
+              </a:spcAft>
+            </a:pPr>
+            <a:r>
+              <a:rPr sz="2200">
+                <a:solidFill>
+                  <a:srgbClr val="101010"/>
+                </a:solidFill>
+              </a:rPr>
+              <a:t>•  Picking the layer index k matters more than expected.</a:t>
+            </a:r>
+          </a:p>
+          <a:p>
+            <a:pPr>
+              <a:spcAft>
+                <a:spcPts val="800"/>
+              </a:spcAft>
+            </a:pPr>
+            <a:r>
+              <a:rPr sz="2200">
+                <a:solidFill>
+                  <a:srgbClr val="101010"/>
+                </a:solidFill>
+              </a:rPr>
+              <a:t>•  k = 16 (50/50 by layer count): rank 0 OOMs in the first forward.</a:t>
+            </a:r>
+          </a:p>
+          <a:p>
+            <a:pPr lvl="1">
+              <a:spcAft>
                 <a:spcPts val="400"/>
               </a:spcAft>
             </a:pPr>
             <a:r>
-              <a:rPr sz="1600">
-                <a:solidFill>
-                  <a:srgbClr val="101010"/>
-                </a:solidFill>
-              </a:rPr>
-              <a:t>- First attempt: split=16 (50/50 by layer count)</a:t>
+              <a:rPr sz="1900">
+                <a:solidFill>
+                  <a:srgbClr val="555555"/>
+                </a:solidFill>
+              </a:rPr>
+              <a:t>    –  Vision tower + image features sit on rank 0. With layers 0..15 it hits 31.4 GiB — over the 32 GiB card.</a:t>
+            </a:r>
+          </a:p>
+          <a:p>
+            <a:pPr>
+              <a:spcAft>
+                <a:spcPts val="800"/>
+              </a:spcAft>
+            </a:pPr>
+            <a:r>
+              <a:rPr sz="2200">
+                <a:solidFill>
+                  <a:srgbClr val="101010"/>
+                </a:solidFill>
+              </a:rPr>
+              <a:t>•  k = 8 (push work to rank 1): rank 1 OOMs.</a:t>
             </a:r>
           </a:p>
           <a:p>
@@ -3517,12 +3532,27 @@
               </a:spcAft>
             </a:pPr>
             <a:r>
-              <a:rPr sz="1400">
+              <a:rPr sz="1900">
                 <a:solidFill>
                   <a:srgbClr val="555555"/>
                 </a:solidFill>
               </a:rPr>
-              <a:t>    - Rank 0 OOMed in first forward — vision+embeddings+layers 0..15 = 31.4 GiB</a:t>
+              <a:t>    –  LM head + final norm + layers 8..31 hit 31.0 GiB.</a:t>
+            </a:r>
+          </a:p>
+          <a:p>
+            <a:pPr>
+              <a:spcAft>
+                <a:spcPts val="800"/>
+              </a:spcAft>
+            </a:pPr>
+            <a:r>
+              <a:rPr sz="2200">
+                <a:solidFill>
+                  <a:srgbClr val="101010"/>
+                </a:solidFill>
+              </a:rPr>
+              <a:t>•  k = 12 with microbatch 1 + grad accum 16: both ranks fit.</a:t>
             </a:r>
           </a:p>
           <a:p>
@@ -3532,132 +3562,27 @@
               </a:spcAft>
             </a:pPr>
             <a:r>
-              <a:rPr sz="1400">
+              <a:rPr sz="1900">
                 <a:solidFill>
                   <a:srgbClr val="555555"/>
                 </a:solidFill>
               </a:rPr>
-              <a:t>    - Vision tower + image features add a lot to rank 0's footprint</a:t>
-            </a:r>
-          </a:p>
-          <a:p>
-            <a:pPr>
-              <a:spcAft>
-                <a:spcPts val="400"/>
-              </a:spcAft>
-            </a:pPr>
-            <a:r>
-              <a:rPr sz="1600">
-                <a:solidFill>
-                  <a:srgbClr val="101010"/>
-                </a:solidFill>
-              </a:rPr>
-              <a:t>- Second attempt: split=8 (shift work to rank 1)</a:t>
-            </a:r>
-          </a:p>
-          <a:p>
-            <a:pPr lvl="1">
-              <a:spcAft>
-                <a:spcPts val="400"/>
-              </a:spcAft>
-            </a:pPr>
-            <a:r>
-              <a:rPr sz="1400">
-                <a:solidFill>
-                  <a:srgbClr val="555555"/>
-                </a:solidFill>
-              </a:rPr>
-              <a:t>    - Rank 1 OOMed — layers 8..31 + LM head = 31.0 GiB</a:t>
-            </a:r>
-          </a:p>
-          <a:p>
-            <a:pPr lvl="1">
-              <a:spcAft>
-                <a:spcPts val="400"/>
-              </a:spcAft>
-            </a:pPr>
-            <a:r>
-              <a:rPr sz="1400">
-                <a:solidFill>
-                  <a:srgbClr val="555555"/>
-                </a:solidFill>
-              </a:rPr>
-              <a:t>    - LM head + final layers heavier than expected</a:t>
-            </a:r>
-          </a:p>
-          <a:p>
-            <a:pPr>
-              <a:spcAft>
-                <a:spcPts val="400"/>
-              </a:spcAft>
-            </a:pPr>
-            <a:r>
-              <a:rPr sz="1600">
-                <a:solidFill>
-                  <a:srgbClr val="101010"/>
-                </a:solidFill>
-              </a:rPr>
-              <a:t>- Third attempt: split=12 + microbatch=1 + accum=16</a:t>
-            </a:r>
-          </a:p>
-          <a:p>
-            <a:pPr lvl="1">
-              <a:spcAft>
-                <a:spcPts val="400"/>
-              </a:spcAft>
-            </a:pPr>
-            <a:r>
-              <a:rPr sz="1400">
-                <a:solidFill>
-                  <a:srgbClr val="555555"/>
-                </a:solidFill>
-              </a:rPr>
-              <a:t>    - Both ranks fit; rank 1 ≈ 31.4 GiB, rank 0 ≈ 28 GiB</a:t>
-            </a:r>
-          </a:p>
-          <a:p>
-            <a:pPr lvl="1">
-              <a:spcAft>
-                <a:spcPts val="400"/>
-              </a:spcAft>
-            </a:pPr>
-            <a:r>
-              <a:rPr sz="1400">
-                <a:solidFill>
-                  <a:srgbClr val="555555"/>
-                </a:solidFill>
-              </a:rPr>
-              <a:t>    - Effective batch dropped from 16→16 (same), but per-step memory halved</a:t>
-            </a:r>
-          </a:p>
-          <a:p>
-            <a:pPr lvl="1">
-              <a:spcAft>
-                <a:spcPts val="400"/>
-              </a:spcAft>
-            </a:pPr>
-            <a:r>
-              <a:rPr sz="1400">
-                <a:solidFill>
-                  <a:srgbClr val="555555"/>
-                </a:solidFill>
-              </a:rPr>
-              <a:t>    - Completed 625/625 steps</a:t>
-            </a:r>
-          </a:p>
-          <a:p>
-            <a:pPr>
-              <a:spcAft>
-                <a:spcPts val="400"/>
-              </a:spcAft>
-            </a:pPr>
-            <a:r>
-              <a:rPr sz="1600">
-                <a:solidFill>
-                  <a:srgbClr val="101010"/>
-                </a:solidFill>
-              </a:rPr>
-              <a:t>- Lesson: layer count is not a good proxy for memory cost.</a:t>
+              <a:t>    –  Rank 1 ≈ 31.4 GiB, rank 0 ≈ 28 GiB. Run completes 625/625 steps.</a:t>
+            </a:r>
+          </a:p>
+          <a:p>
+            <a:pPr>
+              <a:spcAft>
+                <a:spcPts val="800"/>
+              </a:spcAft>
+            </a:pPr>
+            <a:r>
+              <a:rPr sz="2200">
+                <a:solidFill>
+                  <a:srgbClr val="101010"/>
+                </a:solidFill>
+              </a:rPr>
+              <a:t>•  Lesson: layer count is a poor proxy for memory cost. The vision tower and LM head are heavier than they look.</a:t>
             </a:r>
           </a:p>
         </p:txBody>
@@ -3688,8 +3613,8 @@
         </p:nvSpPr>
         <p:spPr>
           <a:xfrm>
-            <a:off x="457200" y="320040"/>
-            <a:ext cx="11247120" cy="822960"/>
+            <a:off x="548640" y="365760"/>
+            <a:ext cx="11064240" cy="822960"/>
           </a:xfrm>
           <a:prstGeom prst="rect">
             <a:avLst/>
@@ -3704,7 +3629,7 @@
           <a:p>
             <a:pPr algn="l"/>
             <a:r>
-              <a:rPr sz="3600" b="0">
+              <a:rPr sz="3400" b="1">
                 <a:solidFill>
                   <a:srgbClr val="101010"/>
                 </a:solidFill>
@@ -3722,8 +3647,8 @@
         </p:nvSpPr>
         <p:spPr>
           <a:xfrm>
-            <a:off x="457200" y="1280160"/>
-            <a:ext cx="5760720" cy="5303520"/>
+            <a:off x="548640" y="1371600"/>
+            <a:ext cx="5852160" cy="5120640"/>
           </a:xfrm>
           <a:prstGeom prst="rect">
             <a:avLst/>
@@ -3731,23 +3656,98 @@
           <a:noFill/>
         </p:spPr>
         <p:txBody>
-          <a:bodyPr wrap="square">
+          <a:bodyPr wrap="square" anchor="ctr">
             <a:spAutoFit/>
           </a:bodyPr>
           <a:lstStyle/>
           <a:p>
             <a:pPr>
               <a:spcAft>
+                <a:spcPts val="800"/>
+              </a:spcAft>
+            </a:pPr>
+            <a:r>
+              <a:rPr sz="1800">
+                <a:solidFill>
+                  <a:srgbClr val="101010"/>
+                </a:solidFill>
+              </a:rPr>
+              <a:t>•  Wall time: 72.1 min. Almost identical to DDP.</a:t>
+            </a:r>
+          </a:p>
+          <a:p>
+            <a:pPr>
+              <a:spcAft>
+                <a:spcPts val="800"/>
+              </a:spcAft>
+            </a:pPr>
+            <a:r>
+              <a:rPr sz="1800">
+                <a:solidFill>
+                  <a:srgbClr val="101010"/>
+                </a:solidFill>
+              </a:rPr>
+              <a:t>•  Throughput: 2.31 samples/sec — 1.04× DDP. Barely faster.</a:t>
+            </a:r>
+          </a:p>
+          <a:p>
+            <a:pPr>
+              <a:spcAft>
+                <a:spcPts val="800"/>
+              </a:spcAft>
+            </a:pPr>
+            <a:r>
+              <a:rPr sz="1800">
+                <a:solidFill>
+                  <a:srgbClr val="101010"/>
+                </a:solidFill>
+              </a:rPr>
+              <a:t>•  Effective batch 16, half of DDP, so fewer steps per epoch.</a:t>
+            </a:r>
+          </a:p>
+          <a:p>
+            <a:pPr>
+              <a:spcAft>
+                <a:spcPts val="800"/>
+              </a:spcAft>
+            </a:pPr>
+            <a:r>
+              <a:rPr sz="1800">
+                <a:solidFill>
+                  <a:srgbClr val="101010"/>
+                </a:solidFill>
+              </a:rPr>
+              <a:t>•  Peak GPU memory: 31.4 GiB on the heavier rank.</a:t>
+            </a:r>
+          </a:p>
+          <a:p>
+            <a:pPr>
+              <a:spcAft>
+                <a:spcPts val="800"/>
+              </a:spcAft>
+            </a:pPr>
+            <a:r>
+              <a:rPr sz="1800">
+                <a:solidFill>
+                  <a:srgbClr val="101010"/>
+                </a:solidFill>
+              </a:rPr>
+              <a:t>•  GPU utilization is uneven: rank 0 at 34%, rank 1 at 56%.</a:t>
+            </a:r>
+          </a:p>
+          <a:p>
+            <a:pPr lvl="1">
+              <a:spcAft>
                 <a:spcPts val="400"/>
               </a:spcAft>
             </a:pPr>
             <a:r>
-              <a:rPr sz="1600">
-                <a:solidFill>
-                  <a:srgbClr val="101010"/>
-                </a:solidFill>
-              </a:rPr>
-              <a:t>- Wall time: 72.1 min (4325 s)</a:t>
+              <a:rPr sz="1500">
+                <a:solidFill>
+                  <a:srgbClr val="555555"/>
+                </a:solidFill>
+              </a:rPr>
+              <a:t>    –  Whichever rank finishes its layers first sits idle until the other catches up.</a:t>
             </a:r>
           </a:p>
           <a:p>
@@ -3757,162 +3757,42 @@
               </a:spcAft>
             </a:pPr>
             <a:r>
-              <a:rPr sz="1400">
+              <a:rPr sz="1500">
                 <a:solidFill>
                   <a:srgbClr val="555555"/>
                 </a:solidFill>
               </a:rPr>
-              <a:t>    - Training loop alone: 67.6 min (4058 s)</a:t>
-            </a:r>
-          </a:p>
-          <a:p>
-            <a:pPr>
-              <a:spcAft>
-                <a:spcPts val="400"/>
-              </a:spcAft>
-            </a:pPr>
-            <a:r>
-              <a:rPr sz="1600">
-                <a:solidFill>
-                  <a:srgbClr val="101010"/>
-                </a:solidFill>
-              </a:rPr>
-              <a:t>- Throughput: 2.31 samples/sec (1.04× DDP — barely faster)</a:t>
-            </a:r>
-          </a:p>
-          <a:p>
-            <a:pPr>
-              <a:spcAft>
-                <a:spcPts val="400"/>
-              </a:spcAft>
-            </a:pPr>
-            <a:r>
-              <a:rPr sz="1600">
-                <a:solidFill>
-                  <a:srgbClr val="101010"/>
-                </a:solidFill>
-              </a:rPr>
-              <a:t>- Effective batch 16 (vs DDP's 32) → fewer steps per epoch</a:t>
-            </a:r>
-          </a:p>
-          <a:p>
-            <a:pPr>
-              <a:spcAft>
-                <a:spcPts val="400"/>
-              </a:spcAft>
-            </a:pPr>
-            <a:r>
-              <a:rPr sz="1600">
-                <a:solidFill>
-                  <a:srgbClr val="101010"/>
-                </a:solidFill>
-              </a:rPr>
-              <a:t>- Peak GPU memory: 31.4 GiB (rank 1)</a:t>
-            </a:r>
-          </a:p>
-          <a:p>
-            <a:pPr>
-              <a:spcAft>
-                <a:spcPts val="400"/>
-              </a:spcAft>
-            </a:pPr>
-            <a:r>
-              <a:rPr sz="1600">
-                <a:solidFill>
-                  <a:srgbClr val="101010"/>
-                </a:solidFill>
-              </a:rPr>
-              <a:t>- Average GPU utilization:</a:t>
-            </a:r>
-          </a:p>
-          <a:p>
-            <a:pPr lvl="1">
-              <a:spcAft>
-                <a:spcPts val="400"/>
-              </a:spcAft>
-            </a:pPr>
-            <a:r>
-              <a:rPr sz="1400">
-                <a:solidFill>
-                  <a:srgbClr val="555555"/>
-                </a:solidFill>
-              </a:rPr>
-              <a:t>    - Rank 0: 33.9%  ·  Rank 1: 56.1%</a:t>
-            </a:r>
-          </a:p>
-          <a:p>
-            <a:pPr lvl="1">
-              <a:spcAft>
-                <a:spcPts val="400"/>
-              </a:spcAft>
-            </a:pPr>
-            <a:r>
-              <a:rPr sz="1400">
-                <a:solidFill>
-                  <a:srgbClr val="555555"/>
-                </a:solidFill>
-              </a:rPr>
-              <a:t>    - Big imbalance — rank 0 idle while rank 1 finishes its layers</a:t>
-            </a:r>
-          </a:p>
-          <a:p>
-            <a:pPr lvl="1">
-              <a:spcAft>
-                <a:spcPts val="400"/>
-              </a:spcAft>
-            </a:pPr>
-            <a:r>
-              <a:rPr sz="1400">
-                <a:solidFill>
-                  <a:srgbClr val="555555"/>
-                </a:solidFill>
-              </a:rPr>
-              <a:t>    - Gloo is much slower than NCCL → comm overhead amplified</a:t>
-            </a:r>
-          </a:p>
-          <a:p>
-            <a:pPr>
-              <a:spcAft>
-                <a:spcPts val="400"/>
-              </a:spcAft>
-            </a:pPr>
-            <a:r>
-              <a:rPr sz="1600">
-                <a:solidFill>
-                  <a:srgbClr val="101010"/>
-                </a:solidFill>
-              </a:rPr>
-              <a:t>- Final loss: 1.57 (higher than DDP because of smaller effective batch)</a:t>
-            </a:r>
-          </a:p>
-          <a:p>
-            <a:pPr>
-              <a:spcAft>
-                <a:spcPts val="400"/>
-              </a:spcAft>
-            </a:pPr>
-            <a:r>
-              <a:rPr sz="1600">
-                <a:solidFill>
-                  <a:srgbClr val="101010"/>
-                </a:solidFill>
-              </a:rPr>
-              <a:t>- Key insight: pipeline can make a model fit, but on 1 Gbps Ethernet</a:t>
-            </a:r>
-          </a:p>
-          <a:p>
-            <a:pPr lvl="1">
-              <a:spcAft>
-                <a:spcPts val="400"/>
-              </a:spcAft>
-            </a:pPr>
-            <a:r>
-              <a:rPr sz="1400">
-                <a:solidFill>
-                  <a:srgbClr val="555555"/>
-                </a:solidFill>
-              </a:rPr>
-              <a:t>    - activation/gradient transfers between stages dominate, killing speedup</a:t>
+              <a:t>    –  Gloo is much slower than NCCL, so the comm gap is wider.</a:t>
+            </a:r>
+          </a:p>
+          <a:p>
+            <a:pPr>
+              <a:spcAft>
+                <a:spcPts val="800"/>
+              </a:spcAft>
+            </a:pPr>
+            <a:r>
+              <a:rPr sz="1800">
+                <a:solidFill>
+                  <a:srgbClr val="101010"/>
+                </a:solidFill>
+              </a:rPr>
+              <a:t>•  Final loss: 1.57 — higher than DDP because of the smaller effective batch.</a:t>
+            </a:r>
+          </a:p>
+          <a:p>
+            <a:pPr>
+              <a:spcAft>
+                <a:spcPts val="800"/>
+              </a:spcAft>
+            </a:pPr>
+            <a:r>
+              <a:rPr sz="1800">
+                <a:solidFill>
+                  <a:srgbClr val="101010"/>
+                </a:solidFill>
+              </a:rPr>
+              <a:t>•  Pipeline made the model fit. It did not make it faster.</a:t>
             </a:r>
           </a:p>
         </p:txBody>
@@ -3933,8 +3813,8 @@
         </p:blipFill>
         <p:spPr>
           <a:xfrm>
-            <a:off x="6400800" y="2286000"/>
-            <a:ext cx="5120640" cy="3200400"/>
+            <a:off x="6766560" y="1828800"/>
+            <a:ext cx="4937760" cy="3086100"/>
           </a:xfrm>
           <a:prstGeom prst="rect">
             <a:avLst/>
@@ -3967,8 +3847,8 @@
         </p:nvSpPr>
         <p:spPr>
           <a:xfrm>
-            <a:off x="457200" y="2926080"/>
-            <a:ext cx="11247120" cy="1097280"/>
+            <a:off x="548640" y="2834640"/>
+            <a:ext cx="11064240" cy="1280160"/>
           </a:xfrm>
           <a:prstGeom prst="rect">
             <a:avLst/>
@@ -3983,7 +3863,7 @@
           <a:p>
             <a:pPr algn="ctr"/>
             <a:r>
-              <a:rPr sz="4800" b="0">
+              <a:rPr sz="5400" b="0">
                 <a:solidFill>
                   <a:srgbClr val="101010"/>
                 </a:solidFill>
@@ -4019,8 +3899,8 @@
         </p:nvSpPr>
         <p:spPr>
           <a:xfrm>
-            <a:off x="457200" y="320040"/>
-            <a:ext cx="11247120" cy="822960"/>
+            <a:off x="548640" y="365760"/>
+            <a:ext cx="11064240" cy="822960"/>
           </a:xfrm>
           <a:prstGeom prst="rect">
             <a:avLst/>
@@ -4035,12 +3915,12 @@
           <a:p>
             <a:pPr algn="l"/>
             <a:r>
-              <a:rPr sz="3600" b="0">
-                <a:solidFill>
-                  <a:srgbClr val="101010"/>
-                </a:solidFill>
-              </a:rPr>
-              <a:t>ZeRO-2 — explanation (Omar)</a:t>
+              <a:rPr sz="3400" b="1">
+                <a:solidFill>
+                  <a:srgbClr val="101010"/>
+                </a:solidFill>
+              </a:rPr>
+              <a:t>What ZeRO-2 actually does (Omar)</a:t>
             </a:r>
           </a:p>
         </p:txBody>
@@ -4053,8 +3933,8 @@
         </p:nvSpPr>
         <p:spPr>
           <a:xfrm>
-            <a:off x="457200" y="1280160"/>
-            <a:ext cx="11247120" cy="5303520"/>
+            <a:off x="548640" y="1371600"/>
+            <a:ext cx="11064240" cy="5120640"/>
           </a:xfrm>
           <a:prstGeom prst="rect">
             <a:avLst/>
@@ -4062,53 +3942,98 @@
           <a:noFill/>
         </p:spPr>
         <p:txBody>
-          <a:bodyPr wrap="square">
+          <a:bodyPr wrap="square" anchor="ctr">
             <a:spAutoFit/>
           </a:bodyPr>
           <a:lstStyle/>
           <a:p>
             <a:pPr>
               <a:spcAft>
+                <a:spcPts val="800"/>
+              </a:spcAft>
+            </a:pPr>
+            <a:r>
+              <a:rPr sz="2000">
+                <a:solidFill>
+                  <a:srgbClr val="101010"/>
+                </a:solidFill>
+              </a:rPr>
+              <a:t>•  Still data parallelism: each rank trains on a different microbatch.</a:t>
+            </a:r>
+          </a:p>
+          <a:p>
+            <a:pPr>
+              <a:spcAft>
+                <a:spcPts val="800"/>
+              </a:spcAft>
+            </a:pPr>
+            <a:r>
+              <a:rPr sz="2000">
+                <a:solidFill>
+                  <a:srgbClr val="101010"/>
+                </a:solidFill>
+              </a:rPr>
+              <a:t>•  What's sharded across the two ranks vs DDP:</a:t>
+            </a:r>
+          </a:p>
+          <a:p>
+            <a:pPr lvl="1">
+              <a:spcAft>
                 <a:spcPts val="400"/>
               </a:spcAft>
             </a:pPr>
             <a:r>
-              <a:rPr sz="1600">
-                <a:solidFill>
-                  <a:srgbClr val="101010"/>
-                </a:solidFill>
-              </a:rPr>
-              <a:t>- Family: ZeRO-DP (Zero Redundancy Optimizer Data Parallel)</a:t>
-            </a:r>
-          </a:p>
-          <a:p>
-            <a:pPr>
+              <a:rPr sz="1700">
+                <a:solidFill>
+                  <a:srgbClr val="555555"/>
+                </a:solidFill>
+              </a:rPr>
+              <a:t>    –  Optimizer states (AdamW m, v) — sharded.</a:t>
+            </a:r>
+          </a:p>
+          <a:p>
+            <a:pPr lvl="1">
               <a:spcAft>
                 <a:spcPts val="400"/>
               </a:spcAft>
             </a:pPr>
             <a:r>
-              <a:rPr sz="1600">
-                <a:solidFill>
-                  <a:srgbClr val="101010"/>
-                </a:solidFill>
-              </a:rPr>
-              <a:t>- Each rank still processes a different microbatch (data parallelism)</a:t>
-            </a:r>
-          </a:p>
-          <a:p>
-            <a:pPr>
+              <a:rPr sz="1700">
+                <a:solidFill>
+                  <a:srgbClr val="555555"/>
+                </a:solidFill>
+              </a:rPr>
+              <a:t>    –  Gradients — sharded after backward via ReduceScatter.</a:t>
+            </a:r>
+          </a:p>
+          <a:p>
+            <a:pPr lvl="1">
               <a:spcAft>
                 <a:spcPts val="400"/>
               </a:spcAft>
             </a:pPr>
             <a:r>
-              <a:rPr sz="1600">
-                <a:solidFill>
-                  <a:srgbClr val="101010"/>
-                </a:solidFill>
-              </a:rPr>
-              <a:t>- What's sharded across the 2 ranks:</a:t>
+              <a:rPr sz="1700">
+                <a:solidFill>
+                  <a:srgbClr val="555555"/>
+                </a:solidFill>
+              </a:rPr>
+              <a:t>    –  Parameters — still replicated on every rank.</a:t>
+            </a:r>
+          </a:p>
+          <a:p>
+            <a:pPr>
+              <a:spcAft>
+                <a:spcPts val="800"/>
+              </a:spcAft>
+            </a:pPr>
+            <a:r>
+              <a:rPr sz="2000">
+                <a:solidFill>
+                  <a:srgbClr val="101010"/>
+                </a:solidFill>
+              </a:rPr>
+              <a:t>•  Per-step communication:</a:t>
             </a:r>
           </a:p>
           <a:p>
@@ -4118,12 +4043,12 @@
               </a:spcAft>
             </a:pPr>
             <a:r>
-              <a:rPr sz="1400">
+              <a:rPr sz="1700">
                 <a:solidFill>
                   <a:srgbClr val="555555"/>
                 </a:solidFill>
               </a:rPr>
-              <a:t>    - Optimizer states (AdamW m, v) — sharded ✓</a:t>
+              <a:t>    –  Backward pass ReduceScatters the gradients to their owner-rank shards.</a:t>
             </a:r>
           </a:p>
           <a:p>
@@ -4133,12 +4058,12 @@
               </a:spcAft>
             </a:pPr>
             <a:r>
-              <a:rPr sz="1400">
+              <a:rPr sz="1700">
                 <a:solidFill>
                   <a:srgbClr val="555555"/>
                 </a:solidFill>
               </a:rPr>
-              <a:t>    - Gradients (after backward) — sharded ✓</a:t>
+              <a:t>    –  Each rank takes one optimizer step on its shard.</a:t>
             </a:r>
           </a:p>
           <a:p>
@@ -4148,132 +4073,42 @@
               </a:spcAft>
             </a:pPr>
             <a:r>
-              <a:rPr sz="1400">
+              <a:rPr sz="1700">
                 <a:solidFill>
                   <a:srgbClr val="555555"/>
                 </a:solidFill>
               </a:rPr>
-              <a:t>    - Parameters (forward + backward weights) — replicated ✗</a:t>
-            </a:r>
-          </a:p>
-          <a:p>
-            <a:pPr>
+              <a:t>    –  AllGather puts the updated parameters back on every rank.</a:t>
+            </a:r>
+          </a:p>
+          <a:p>
+            <a:pPr>
+              <a:spcAft>
+                <a:spcPts val="800"/>
+              </a:spcAft>
+            </a:pPr>
+            <a:r>
+              <a:rPr sz="2000">
+                <a:solidFill>
+                  <a:srgbClr val="101010"/>
+                </a:solidFill>
+              </a:rPr>
+              <a:t>•  On paper this saves a lot of memory. On a LoRA workload it doesn't, because the trainable optimizer state is already small.</a:t>
+            </a:r>
+          </a:p>
+          <a:p>
+            <a:pPr lvl="1">
               <a:spcAft>
                 <a:spcPts val="400"/>
               </a:spcAft>
             </a:pPr>
             <a:r>
-              <a:rPr sz="1600">
-                <a:solidFill>
-                  <a:srgbClr val="101010"/>
-                </a:solidFill>
-              </a:rPr>
-              <a:t>- Communication pattern per step:</a:t>
-            </a:r>
-          </a:p>
-          <a:p>
-            <a:pPr lvl="1">
-              <a:spcAft>
-                <a:spcPts val="400"/>
-              </a:spcAft>
-            </a:pPr>
-            <a:r>
-              <a:rPr sz="1400">
+              <a:rPr sz="1700">
                 <a:solidFill>
                   <a:srgbClr val="555555"/>
                 </a:solidFill>
               </a:rPr>
-              <a:t>    - Backward: ReduceScatter gradients to owner-rank shards</a:t>
-            </a:r>
-          </a:p>
-          <a:p>
-            <a:pPr lvl="1">
-              <a:spcAft>
-                <a:spcPts val="400"/>
-              </a:spcAft>
-            </a:pPr>
-            <a:r>
-              <a:rPr sz="1400">
-                <a:solidFill>
-                  <a:srgbClr val="555555"/>
-                </a:solidFill>
-              </a:rPr>
-              <a:t>    - Optimizer step: each rank updates its shard of params</a:t>
-            </a:r>
-          </a:p>
-          <a:p>
-            <a:pPr lvl="1">
-              <a:spcAft>
-                <a:spcPts val="400"/>
-              </a:spcAft>
-            </a:pPr>
-            <a:r>
-              <a:rPr sz="1400">
-                <a:solidFill>
-                  <a:srgbClr val="555555"/>
-                </a:solidFill>
-              </a:rPr>
-              <a:t>    - AllGather updated params back to full set on each rank</a:t>
-            </a:r>
-          </a:p>
-          <a:p>
-            <a:pPr>
-              <a:spcAft>
-                <a:spcPts val="400"/>
-              </a:spcAft>
-            </a:pPr>
-            <a:r>
-              <a:rPr sz="1600">
-                <a:solidFill>
-                  <a:srgbClr val="101010"/>
-                </a:solidFill>
-              </a:rPr>
-              <a:t>- Memory savings vs DDP:</a:t>
-            </a:r>
-          </a:p>
-          <a:p>
-            <a:pPr lvl="1">
-              <a:spcAft>
-                <a:spcPts val="400"/>
-              </a:spcAft>
-            </a:pPr>
-            <a:r>
-              <a:rPr sz="1400">
-                <a:solidFill>
-                  <a:srgbClr val="555555"/>
-                </a:solidFill>
-              </a:rPr>
-              <a:t>    - Optimizer state for LoRA only ≈ a few hundred MB → little to shard</a:t>
-            </a:r>
-          </a:p>
-          <a:p>
-            <a:pPr lvl="1">
-              <a:spcAft>
-                <a:spcPts val="400"/>
-              </a:spcAft>
-            </a:pPr>
-            <a:r>
-              <a:rPr sz="1400">
-                <a:solidFill>
-                  <a:srgbClr val="555555"/>
-                </a:solidFill>
-              </a:rPr>
-              <a:t>    - Real memory savings come from offloaded full-precision adam states</a:t>
-            </a:r>
-          </a:p>
-          <a:p>
-            <a:pPr>
-              <a:spcAft>
-                <a:spcPts val="400"/>
-              </a:spcAft>
-            </a:pPr>
-            <a:r>
-              <a:rPr sz="1600">
-                <a:solidFill>
-                  <a:srgbClr val="101010"/>
-                </a:solidFill>
-              </a:rPr>
-              <a:t>- Config: configs/zero2.json, launcher: scripts/run_stage2_zero2_lora.sh</a:t>
+              <a:t>    –  The real win comes from DeepSpeed's bucketed async overlap, not from sharding.</a:t>
             </a:r>
           </a:p>
         </p:txBody>
@@ -4304,8 +4139,8 @@
         </p:nvSpPr>
         <p:spPr>
           <a:xfrm>
-            <a:off x="457200" y="320040"/>
-            <a:ext cx="11247120" cy="822960"/>
+            <a:off x="548640" y="365760"/>
+            <a:ext cx="11064240" cy="822960"/>
           </a:xfrm>
           <a:prstGeom prst="rect">
             <a:avLst/>
@@ -4320,7 +4155,7 @@
           <a:p>
             <a:pPr algn="l"/>
             <a:r>
-              <a:rPr sz="3600" b="0">
+              <a:rPr sz="3400" b="1">
                 <a:solidFill>
                   <a:srgbClr val="101010"/>
                 </a:solidFill>
@@ -4338,8 +4173,8 @@
         </p:nvSpPr>
         <p:spPr>
           <a:xfrm>
-            <a:off x="457200" y="1280160"/>
-            <a:ext cx="5760720" cy="5303520"/>
+            <a:off x="548640" y="1371600"/>
+            <a:ext cx="5852160" cy="5120640"/>
           </a:xfrm>
           <a:prstGeom prst="rect">
             <a:avLst/>
@@ -4347,38 +4182,128 @@
           <a:noFill/>
         </p:spPr>
         <p:txBody>
-          <a:bodyPr wrap="square">
+          <a:bodyPr wrap="square" anchor="ctr">
             <a:spAutoFit/>
           </a:bodyPr>
           <a:lstStyle/>
           <a:p>
             <a:pPr>
               <a:spcAft>
+                <a:spcPts val="800"/>
+              </a:spcAft>
+            </a:pPr>
+            <a:r>
+              <a:rPr sz="1800">
+                <a:solidFill>
+                  <a:srgbClr val="101010"/>
+                </a:solidFill>
+              </a:rPr>
+              <a:t>•  Wall time: 58.4 min — 16 minutes faster than DDP, 22% less wall-clock.</a:t>
+            </a:r>
+          </a:p>
+          <a:p>
+            <a:pPr>
+              <a:spcAft>
+                <a:spcPts val="800"/>
+              </a:spcAft>
+            </a:pPr>
+            <a:r>
+              <a:rPr sz="1800">
+                <a:solidFill>
+                  <a:srgbClr val="101010"/>
+                </a:solidFill>
+              </a:rPr>
+              <a:t>•  Throughput: 2.85 samples/sec — 1.28× DDP.</a:t>
+            </a:r>
+          </a:p>
+          <a:p>
+            <a:pPr>
+              <a:spcAft>
+                <a:spcPts val="800"/>
+              </a:spcAft>
+            </a:pPr>
+            <a:r>
+              <a:rPr sz="1800">
+                <a:solidFill>
+                  <a:srgbClr val="101010"/>
+                </a:solidFill>
+              </a:rPr>
+              <a:t>•  Peak GPU memory: 27.6 GiB. About 3 GiB lower than DDP.</a:t>
+            </a:r>
+          </a:p>
+          <a:p>
+            <a:pPr>
+              <a:spcAft>
+                <a:spcPts val="800"/>
+              </a:spcAft>
+            </a:pPr>
+            <a:r>
+              <a:rPr sz="1800">
+                <a:solidFill>
+                  <a:srgbClr val="101010"/>
+                </a:solidFill>
+              </a:rPr>
+              <a:t>•  GPU utilization: 88.5% (DDP was 70.7%).</a:t>
+            </a:r>
+          </a:p>
+          <a:p>
+            <a:pPr lvl="1">
+              <a:spcAft>
                 <a:spcPts val="400"/>
               </a:spcAft>
             </a:pPr>
             <a:r>
-              <a:rPr sz="1600">
-                <a:solidFill>
-                  <a:srgbClr val="101010"/>
-                </a:solidFill>
-              </a:rPr>
-              <a:t>- Run: stage2_zero2_lora_20260424_134311 (effective batch 32)</a:t>
-            </a:r>
-          </a:p>
-          <a:p>
-            <a:pPr>
+              <a:rPr sz="1500">
+                <a:solidFill>
+                  <a:srgbClr val="555555"/>
+                </a:solidFill>
+              </a:rPr>
+              <a:t>    –  DeepSpeed's overlap fills the AllReduce-stall gap that DDP couldn't hide.</a:t>
+            </a:r>
+          </a:p>
+          <a:p>
+            <a:pPr>
+              <a:spcAft>
+                <a:spcPts val="800"/>
+              </a:spcAft>
+            </a:pPr>
+            <a:r>
+              <a:rPr sz="1800">
+                <a:solidFill>
+                  <a:srgbClr val="101010"/>
+                </a:solidFill>
+              </a:rPr>
+              <a:t>•  Final loss: 1.11 — same as DDP within noise.</a:t>
+            </a:r>
+          </a:p>
+          <a:p>
+            <a:pPr>
+              <a:spcAft>
+                <a:spcPts val="800"/>
+              </a:spcAft>
+            </a:pPr>
+            <a:r>
+              <a:rPr sz="1800">
+                <a:solidFill>
+                  <a:srgbClr val="101010"/>
+                </a:solidFill>
+              </a:rPr>
+              <a:t>•  Why isn't the speedup closer to 2×?</a:t>
+            </a:r>
+          </a:p>
+          <a:p>
+            <a:pPr lvl="1">
               <a:spcAft>
                 <a:spcPts val="400"/>
               </a:spcAft>
             </a:pPr>
             <a:r>
-              <a:rPr sz="1600">
-                <a:solidFill>
-                  <a:srgbClr val="101010"/>
-                </a:solidFill>
-              </a:rPr>
-              <a:t>- Wall time: 58.4 min (3503 s)</a:t>
+              <a:rPr sz="1500">
+                <a:solidFill>
+                  <a:srgbClr val="555555"/>
+                </a:solidFill>
+              </a:rPr>
+              <a:t>    –  LoRA's optimizer state is tiny, so there isn't much to shard.</a:t>
             </a:r>
           </a:p>
           <a:p>
@@ -4388,162 +4313,27 @@
               </a:spcAft>
             </a:pPr>
             <a:r>
-              <a:rPr sz="1400">
+              <a:rPr sz="1500">
                 <a:solidFill>
                   <a:srgbClr val="555555"/>
                 </a:solidFill>
               </a:rPr>
-              <a:t>    - vs DDP 74.8 min — saved 16.4 min, −22% wall-clock</a:t>
-            </a:r>
-          </a:p>
-          <a:p>
-            <a:pPr>
-              <a:spcAft>
-                <a:spcPts val="400"/>
-              </a:spcAft>
-            </a:pPr>
-            <a:r>
-              <a:rPr sz="1600">
-                <a:solidFill>
-                  <a:srgbClr val="101010"/>
-                </a:solidFill>
-              </a:rPr>
-              <a:t>- Throughput: 2.85 samples/sec — 1.28× DDP</a:t>
-            </a:r>
-          </a:p>
-          <a:p>
-            <a:pPr>
-              <a:spcAft>
-                <a:spcPts val="400"/>
-              </a:spcAft>
-            </a:pPr>
-            <a:r>
-              <a:rPr sz="1600">
-                <a:solidFill>
-                  <a:srgbClr val="101010"/>
-                </a:solidFill>
-              </a:rPr>
-              <a:t>- Peak GPU memory: 27.6 GiB (vs DDP 30.7 GiB) — saved 3.1 GiB</a:t>
-            </a:r>
-          </a:p>
-          <a:p>
-            <a:pPr>
-              <a:spcAft>
-                <a:spcPts val="400"/>
-              </a:spcAft>
-            </a:pPr>
-            <a:r>
-              <a:rPr sz="1600">
-                <a:solidFill>
-                  <a:srgbClr val="101010"/>
-                </a:solidFill>
-              </a:rPr>
-              <a:t>- Average GPU utilization: 88.5% (vs DDP 70.7%)</a:t>
-            </a:r>
-          </a:p>
-          <a:p>
-            <a:pPr lvl="1">
-              <a:spcAft>
-                <a:spcPts val="400"/>
-              </a:spcAft>
-            </a:pPr>
-            <a:r>
-              <a:rPr sz="1400">
-                <a:solidFill>
-                  <a:srgbClr val="555555"/>
-                </a:solidFill>
-              </a:rPr>
-              <a:t>    - DeepSpeed's bucketed async comm overlaps better than DDP</a:t>
-            </a:r>
-          </a:p>
-          <a:p>
-            <a:pPr lvl="1">
-              <a:spcAft>
-                <a:spcPts val="400"/>
-              </a:spcAft>
-            </a:pPr>
-            <a:r>
-              <a:rPr sz="1400">
-                <a:solidFill>
-                  <a:srgbClr val="555555"/>
-                </a:solidFill>
-              </a:rPr>
-              <a:t>    - Better overlap fills the AllReduce-stall gap DDP suffered</a:t>
-            </a:r>
-          </a:p>
-          <a:p>
-            <a:pPr>
-              <a:spcAft>
-                <a:spcPts val="400"/>
-              </a:spcAft>
-            </a:pPr>
-            <a:r>
-              <a:rPr sz="1600">
-                <a:solidFill>
-                  <a:srgbClr val="101010"/>
-                </a:solidFill>
-              </a:rPr>
-              <a:t>- Final loss: 1.11 (avg 1.22) — comparable to DDP</a:t>
-            </a:r>
-          </a:p>
-          <a:p>
-            <a:pPr>
-              <a:spcAft>
-                <a:spcPts val="400"/>
-              </a:spcAft>
-            </a:pPr>
-            <a:r>
-              <a:rPr sz="1600">
-                <a:solidFill>
-                  <a:srgbClr val="101010"/>
-                </a:solidFill>
-              </a:rPr>
-              <a:t>- Why only 1.28× and not 2×?</a:t>
-            </a:r>
-          </a:p>
-          <a:p>
-            <a:pPr lvl="1">
-              <a:spcAft>
-                <a:spcPts val="400"/>
-              </a:spcAft>
-            </a:pPr>
-            <a:r>
-              <a:rPr sz="1400">
-                <a:solidFill>
-                  <a:srgbClr val="555555"/>
-                </a:solidFill>
-              </a:rPr>
-              <a:t>    - LoRA's optimizer state is already tiny — sharding gains are small</a:t>
-            </a:r>
-          </a:p>
-          <a:p>
-            <a:pPr lvl="1">
-              <a:spcAft>
-                <a:spcPts val="400"/>
-              </a:spcAft>
-            </a:pPr>
-            <a:r>
-              <a:rPr sz="1400">
-                <a:solidFill>
-                  <a:srgbClr val="555555"/>
-                </a:solidFill>
-              </a:rPr>
-              <a:t>    - Most of the win comes from DeepSpeed's overlap, not from sharding</a:t>
-            </a:r>
-          </a:p>
-          <a:p>
-            <a:pPr>
-              <a:spcAft>
-                <a:spcPts val="400"/>
-              </a:spcAft>
-            </a:pPr>
-            <a:r>
-              <a:rPr sz="1600">
-                <a:solidFill>
-                  <a:srgbClr val="101010"/>
-                </a:solidFill>
-              </a:rPr>
-              <a:t>- ZeRO-2 = the only method that beats DDP on this workload.</a:t>
+              <a:t>    –  Most of the win is the better overlap, not the sharding itself.</a:t>
+            </a:r>
+          </a:p>
+          <a:p>
+            <a:pPr>
+              <a:spcAft>
+                <a:spcPts val="800"/>
+              </a:spcAft>
+            </a:pPr>
+            <a:r>
+              <a:rPr sz="1800">
+                <a:solidFill>
+                  <a:srgbClr val="101010"/>
+                </a:solidFill>
+              </a:rPr>
+              <a:t>•  Even so: this is the only method in the comparison that beats plain DDP.</a:t>
             </a:r>
           </a:p>
         </p:txBody>
@@ -4564,8 +4354,8 @@
         </p:blipFill>
         <p:spPr>
           <a:xfrm>
-            <a:off x="6400800" y="1828800"/>
-            <a:ext cx="5120640" cy="3200400"/>
+            <a:off x="6766560" y="1828800"/>
+            <a:ext cx="4937760" cy="3086100"/>
           </a:xfrm>
           <a:prstGeom prst="rect">
             <a:avLst/>
@@ -4598,8 +4388,8 @@
         </p:nvSpPr>
         <p:spPr>
           <a:xfrm>
-            <a:off x="457200" y="2926080"/>
-            <a:ext cx="11247120" cy="1097280"/>
+            <a:off x="548640" y="2834640"/>
+            <a:ext cx="11064240" cy="1280160"/>
           </a:xfrm>
           <a:prstGeom prst="rect">
             <a:avLst/>
@@ -4614,7 +4404,7 @@
           <a:p>
             <a:pPr algn="ctr"/>
             <a:r>
-              <a:rPr sz="4800" b="0">
+              <a:rPr sz="5400" b="0">
                 <a:solidFill>
                   <a:srgbClr val="101010"/>
                 </a:solidFill>
@@ -4650,8 +4440,8 @@
         </p:nvSpPr>
         <p:spPr>
           <a:xfrm>
-            <a:off x="457200" y="320040"/>
-            <a:ext cx="11247120" cy="822960"/>
+            <a:off x="548640" y="365760"/>
+            <a:ext cx="11064240" cy="822960"/>
           </a:xfrm>
           <a:prstGeom prst="rect">
             <a:avLst/>
@@ -4666,12 +4456,12 @@
           <a:p>
             <a:pPr algn="l"/>
             <a:r>
-              <a:rPr sz="3600" b="0">
-                <a:solidFill>
-                  <a:srgbClr val="101010"/>
-                </a:solidFill>
-              </a:rPr>
-              <a:t>ZeRO-3 — explanation (Rassul)</a:t>
+              <a:rPr sz="3400" b="1">
+                <a:solidFill>
+                  <a:srgbClr val="101010"/>
+                </a:solidFill>
+              </a:rPr>
+              <a:t>ZeRO-3: shard everything (Rassul)</a:t>
             </a:r>
           </a:p>
         </p:txBody>
@@ -4684,8 +4474,8 @@
         </p:nvSpPr>
         <p:spPr>
           <a:xfrm>
-            <a:off x="457200" y="1280160"/>
-            <a:ext cx="11247120" cy="5303520"/>
+            <a:off x="548640" y="1371600"/>
+            <a:ext cx="11064240" cy="5120640"/>
           </a:xfrm>
           <a:prstGeom prst="rect">
             <a:avLst/>
@@ -4693,38 +4483,83 @@
           <a:noFill/>
         </p:spPr>
         <p:txBody>
-          <a:bodyPr wrap="square">
+          <a:bodyPr wrap="square" anchor="ctr">
             <a:spAutoFit/>
           </a:bodyPr>
           <a:lstStyle/>
           <a:p>
             <a:pPr>
               <a:spcAft>
+                <a:spcPts val="800"/>
+              </a:spcAft>
+            </a:pPr>
+            <a:r>
+              <a:rPr sz="1800">
+                <a:solidFill>
+                  <a:srgbClr val="101010"/>
+                </a:solidFill>
+              </a:rPr>
+              <a:t>•  Same data-parallel semantics as ZeRO-2. Each rank still sees a different microbatch.</a:t>
+            </a:r>
+          </a:p>
+          <a:p>
+            <a:pPr>
+              <a:spcAft>
+                <a:spcPts val="800"/>
+              </a:spcAft>
+            </a:pPr>
+            <a:r>
+              <a:rPr sz="1800">
+                <a:solidFill>
+                  <a:srgbClr val="101010"/>
+                </a:solidFill>
+              </a:rPr>
+              <a:t>•  The difference: parameters are also sharded across the two ranks.</a:t>
+            </a:r>
+          </a:p>
+          <a:p>
+            <a:pPr>
+              <a:spcAft>
+                <a:spcPts val="800"/>
+              </a:spcAft>
+            </a:pPr>
+            <a:r>
+              <a:rPr sz="1800">
+                <a:solidFill>
+                  <a:srgbClr val="101010"/>
+                </a:solidFill>
+              </a:rPr>
+              <a:t>•  Per-step comm now happens at every layer, twice:</a:t>
+            </a:r>
+          </a:p>
+          <a:p>
+            <a:pPr lvl="1">
+              <a:spcAft>
                 <a:spcPts val="400"/>
               </a:spcAft>
             </a:pPr>
             <a:r>
-              <a:rPr sz="1600">
-                <a:solidFill>
-                  <a:srgbClr val="101010"/>
-                </a:solidFill>
-              </a:rPr>
-              <a:t>- Family: ZeRO-DP — same data-parallel semantics as ZeRO-2</a:t>
-            </a:r>
-          </a:p>
-          <a:p>
-            <a:pPr>
+              <a:rPr sz="1500">
+                <a:solidFill>
+                  <a:srgbClr val="555555"/>
+                </a:solidFill>
+              </a:rPr>
+              <a:t>    –  Forward pass: AllGather parameters for layer N → compute → drop them.</a:t>
+            </a:r>
+          </a:p>
+          <a:p>
+            <a:pPr lvl="1">
               <a:spcAft>
                 <a:spcPts val="400"/>
               </a:spcAft>
             </a:pPr>
             <a:r>
-              <a:rPr sz="1600">
-                <a:solidFill>
-                  <a:srgbClr val="101010"/>
-                </a:solidFill>
-              </a:rPr>
-              <a:t>- What's sharded:</a:t>
+              <a:rPr sz="1500">
+                <a:solidFill>
+                  <a:srgbClr val="555555"/>
+                </a:solidFill>
+              </a:rPr>
+              <a:t>    –  Backward pass: AllGather them again → compute gradients → drop again.</a:t>
             </a:r>
           </a:p>
           <a:p>
@@ -4734,12 +4569,42 @@
               </a:spcAft>
             </a:pPr>
             <a:r>
-              <a:rPr sz="1400">
+              <a:rPr sz="1500">
                 <a:solidFill>
                   <a:srgbClr val="555555"/>
                 </a:solidFill>
               </a:rPr>
-              <a:t>    - Optimizer states ✓</a:t>
+              <a:t>    –  ReduceScatter the gradients at the end of backward, then run the optimizer on each shard.</a:t>
+            </a:r>
+          </a:p>
+          <a:p>
+            <a:pPr>
+              <a:spcAft>
+                <a:spcPts val="800"/>
+              </a:spcAft>
+            </a:pPr>
+            <a:r>
+              <a:rPr sz="1800">
+                <a:solidFill>
+                  <a:srgbClr val="101010"/>
+                </a:solidFill>
+              </a:rPr>
+              <a:t>•  On 2 ranks, ~7 GB of parameters live on each. But every layer briefly re-materializes its full ~430 MB on every rank.</a:t>
+            </a:r>
+          </a:p>
+          <a:p>
+            <a:pPr>
+              <a:spcAft>
+                <a:spcPts val="800"/>
+              </a:spcAft>
+            </a:pPr>
+            <a:r>
+              <a:rPr sz="1800">
+                <a:solidFill>
+                  <a:srgbClr val="101010"/>
+                </a:solidFill>
+              </a:rPr>
+              <a:t>•  Back-of-envelope for our model:</a:t>
             </a:r>
           </a:p>
           <a:p>
@@ -4749,12 +4614,12 @@
               </a:spcAft>
             </a:pPr>
             <a:r>
-              <a:rPr sz="1400">
+              <a:rPr sz="1500">
                 <a:solidFill>
                   <a:srgbClr val="555555"/>
                 </a:solidFill>
               </a:rPr>
-              <a:t>    - Gradients ✓</a:t>
+              <a:t>    –  32 transformer layers × 430 MB × 2 (fwd + bwd) ≈ 27.5 GB transferred per step.</a:t>
             </a:r>
           </a:p>
           <a:p>
@@ -4764,162 +4629,27 @@
               </a:spcAft>
             </a:pPr>
             <a:r>
-              <a:rPr sz="1400">
+              <a:rPr sz="1500">
                 <a:solidFill>
                   <a:srgbClr val="555555"/>
                 </a:solidFill>
               </a:rPr>
-              <a:t>    - Parameters ✓ ← new vs ZeRO-2</a:t>
-            </a:r>
-          </a:p>
-          <a:p>
-            <a:pPr>
-              <a:spcAft>
-                <a:spcPts val="400"/>
-              </a:spcAft>
-            </a:pPr>
-            <a:r>
-              <a:rPr sz="1600">
-                <a:solidFill>
-                  <a:srgbClr val="101010"/>
-                </a:solidFill>
-              </a:rPr>
-              <a:t>- Communication pattern per step (and per layer!):</a:t>
-            </a:r>
-          </a:p>
-          <a:p>
-            <a:pPr lvl="1">
-              <a:spcAft>
-                <a:spcPts val="400"/>
-              </a:spcAft>
-            </a:pPr>
-            <a:r>
-              <a:rPr sz="1400">
-                <a:solidFill>
-                  <a:srgbClr val="555555"/>
-                </a:solidFill>
-              </a:rPr>
-              <a:t>    - Forward layer N: AllGather params for layer N → compute → drop</a:t>
-            </a:r>
-          </a:p>
-          <a:p>
-            <a:pPr lvl="1">
-              <a:spcAft>
-                <a:spcPts val="400"/>
-              </a:spcAft>
-            </a:pPr>
-            <a:r>
-              <a:rPr sz="1400">
-                <a:solidFill>
-                  <a:srgbClr val="555555"/>
-                </a:solidFill>
-              </a:rPr>
-              <a:t>    - Backward layer N: AllGather params again → compute grads → drop</a:t>
-            </a:r>
-          </a:p>
-          <a:p>
-            <a:pPr lvl="1">
-              <a:spcAft>
-                <a:spcPts val="400"/>
-              </a:spcAft>
-            </a:pPr>
-            <a:r>
-              <a:rPr sz="1400">
-                <a:solidFill>
-                  <a:srgbClr val="555555"/>
-                </a:solidFill>
-              </a:rPr>
-              <a:t>    - ReduceScatter gradients at end of backward</a:t>
-            </a:r>
-          </a:p>
-          <a:p>
-            <a:pPr>
-              <a:spcAft>
-                <a:spcPts val="400"/>
-              </a:spcAft>
-            </a:pPr>
-            <a:r>
-              <a:rPr sz="1600">
-                <a:solidFill>
-                  <a:srgbClr val="101010"/>
-                </a:solidFill>
-              </a:rPr>
-              <a:t>- On 2 ranks the model is split in half (~7 GB sharded each)</a:t>
-            </a:r>
-          </a:p>
-          <a:p>
-            <a:pPr lvl="1">
-              <a:spcAft>
-                <a:spcPts val="400"/>
-              </a:spcAft>
-            </a:pPr>
-            <a:r>
-              <a:rPr sz="1400">
-                <a:solidFill>
-                  <a:srgbClr val="555555"/>
-                </a:solidFill>
-              </a:rPr>
-              <a:t>    - But every layer requires re-materializing the full ≈430 MB to each rank</a:t>
-            </a:r>
-          </a:p>
-          <a:p>
-            <a:pPr>
-              <a:spcAft>
-                <a:spcPts val="400"/>
-              </a:spcAft>
-            </a:pPr>
-            <a:r>
-              <a:rPr sz="1600">
-                <a:solidFill>
-                  <a:srgbClr val="101010"/>
-                </a:solidFill>
-              </a:rPr>
-              <a:t>- Math for our workload:</a:t>
-            </a:r>
-          </a:p>
-          <a:p>
-            <a:pPr lvl="1">
-              <a:spcAft>
-                <a:spcPts val="400"/>
-              </a:spcAft>
-            </a:pPr>
-            <a:r>
-              <a:rPr sz="1400">
-                <a:solidFill>
-                  <a:srgbClr val="555555"/>
-                </a:solidFill>
-              </a:rPr>
-              <a:t>    - 32 transformer layers × 430 MB × 2 (fwd+bwd) ≈ 27.5 GB transferred per step</a:t>
-            </a:r>
-          </a:p>
-          <a:p>
-            <a:pPr lvl="1">
-              <a:spcAft>
-                <a:spcPts val="400"/>
-              </a:spcAft>
-            </a:pPr>
-            <a:r>
-              <a:rPr sz="1400">
-                <a:solidFill>
-                  <a:srgbClr val="555555"/>
-                </a:solidFill>
-              </a:rPr>
-              <a:t>    - Over 1 Gbps Ethernet ≈ 4 minutes of comm per step alone</a:t>
-            </a:r>
-          </a:p>
-          <a:p>
-            <a:pPr>
-              <a:spcAft>
-                <a:spcPts val="400"/>
-              </a:spcAft>
-            </a:pPr>
-            <a:r>
-              <a:rPr sz="1600">
-                <a:solidFill>
-                  <a:srgbClr val="101010"/>
-                </a:solidFill>
-              </a:rPr>
-              <a:t>- Config: configs/zero3.json + zero3_bounded_async.json (50 MB buckets)</a:t>
+              <a:t>    –  Over 1 Gbps Ethernet: roughly 4 minutes of comm per step before any compute.</a:t>
+            </a:r>
+          </a:p>
+          <a:p>
+            <a:pPr>
+              <a:spcAft>
+                <a:spcPts val="800"/>
+              </a:spcAft>
+            </a:pPr>
+            <a:r>
+              <a:rPr sz="1800">
+                <a:solidFill>
+                  <a:srgbClr val="101010"/>
+                </a:solidFill>
+              </a:rPr>
+              <a:t>•  We used configs/zero3_bounded_async.json: bucketed allgather/reduce at 50 MB.</a:t>
             </a:r>
           </a:p>
         </p:txBody>
@@ -4950,8 +4680,8 @@
         </p:nvSpPr>
         <p:spPr>
           <a:xfrm>
-            <a:off x="457200" y="320040"/>
-            <a:ext cx="11247120" cy="822960"/>
+            <a:off x="548640" y="365760"/>
+            <a:ext cx="11064240" cy="822960"/>
           </a:xfrm>
           <a:prstGeom prst="rect">
             <a:avLst/>
@@ -4966,7 +4696,7 @@
           <a:p>
             <a:pPr algn="l"/>
             <a:r>
-              <a:rPr sz="3600" b="0">
+              <a:rPr sz="3400" b="1">
                 <a:solidFill>
                   <a:srgbClr val="101010"/>
                 </a:solidFill>
@@ -4984,8 +4714,8 @@
         </p:nvSpPr>
         <p:spPr>
           <a:xfrm>
-            <a:off x="457200" y="1280160"/>
-            <a:ext cx="11247120" cy="5303520"/>
+            <a:off x="548640" y="1371600"/>
+            <a:ext cx="11064240" cy="5120640"/>
           </a:xfrm>
           <a:prstGeom prst="rect">
             <a:avLst/>
@@ -4993,38 +4723,98 @@
           <a:noFill/>
         </p:spPr>
         <p:txBody>
-          <a:bodyPr wrap="square">
+          <a:bodyPr wrap="square" anchor="ctr">
             <a:spAutoFit/>
           </a:bodyPr>
           <a:lstStyle/>
           <a:p>
             <a:pPr>
               <a:spcAft>
+                <a:spcPts val="800"/>
+              </a:spcAft>
+            </a:pPr>
+            <a:r>
+              <a:rPr sz="2000">
+                <a:solidFill>
+                  <a:srgbClr val="101010"/>
+                </a:solidFill>
+              </a:rPr>
+              <a:t>•  Hit the SLURM time limit before finishing. Reached 292 of 1250 steps in 3 h 52 min.</a:t>
+            </a:r>
+          </a:p>
+          <a:p>
+            <a:pPr lvl="1">
+              <a:spcAft>
                 <a:spcPts val="400"/>
               </a:spcAft>
             </a:pPr>
             <a:r>
-              <a:rPr sz="1600">
-                <a:solidFill>
-                  <a:srgbClr val="101010"/>
-                </a:solidFill>
-              </a:rPr>
-              <a:t>- Run: stage2_zero3_lora_20260420_041514/041515 (2 ranks)</a:t>
-            </a:r>
-          </a:p>
-          <a:p>
-            <a:pPr>
+              <a:rPr sz="1700">
+                <a:solidFill>
+                  <a:srgbClr val="555555"/>
+                </a:solidFill>
+              </a:rPr>
+              <a:t>    –  Each step took about 48 seconds. Projected full run: 16.5 hours.</a:t>
+            </a:r>
+          </a:p>
+          <a:p>
+            <a:pPr>
+              <a:spcAft>
+                <a:spcPts val="800"/>
+              </a:spcAft>
+            </a:pPr>
+            <a:r>
+              <a:rPr sz="2000">
+                <a:solidFill>
+                  <a:srgbClr val="101010"/>
+                </a:solidFill>
+              </a:rPr>
+              <a:t>•  Throughput: 0.17 samples/sec — about 13× slower than DDP.</a:t>
+            </a:r>
+          </a:p>
+          <a:p>
+            <a:pPr>
+              <a:spcAft>
+                <a:spcPts val="800"/>
+              </a:spcAft>
+            </a:pPr>
+            <a:r>
+              <a:rPr sz="2000">
+                <a:solidFill>
+                  <a:srgbClr val="101010"/>
+                </a:solidFill>
+              </a:rPr>
+              <a:t>•  Peak GPU memory: 22 GiB — actual sharding showing up.</a:t>
+            </a:r>
+          </a:p>
+          <a:p>
+            <a:pPr lvl="1">
               <a:spcAft>
                 <a:spcPts val="400"/>
               </a:spcAft>
             </a:pPr>
             <a:r>
-              <a:rPr sz="1600">
-                <a:solidFill>
-                  <a:srgbClr val="101010"/>
-                </a:solidFill>
-              </a:rPr>
-              <a:t>- Hit SLURM time limit before completion</a:t>
+              <a:rPr sz="1700">
+                <a:solidFill>
+                  <a:srgbClr val="555555"/>
+                </a:solidFill>
+              </a:rPr>
+              <a:t>    –  But memory was never the bottleneck on this card. Communication was.</a:t>
+            </a:r>
+          </a:p>
+          <a:p>
+            <a:pPr>
+              <a:spcAft>
+                <a:spcPts val="800"/>
+              </a:spcAft>
+            </a:pPr>
+            <a:r>
+              <a:rPr sz="2000">
+                <a:solidFill>
+                  <a:srgbClr val="101010"/>
+                </a:solidFill>
+              </a:rPr>
+              <a:t>•  GPU utilization: 99%. This is misleading.</a:t>
             </a:r>
           </a:p>
           <a:p>
@@ -5034,12 +4824,12 @@
               </a:spcAft>
             </a:pPr>
             <a:r>
-              <a:rPr sz="1400">
+              <a:rPr sz="1700">
                 <a:solidFill>
                   <a:srgbClr val="555555"/>
                 </a:solidFill>
               </a:rPr>
-              <a:t>    - Reached 292/1250 steps after 3 h 52 min</a:t>
+              <a:t>    –  DeepSpeed pipelines comm with compute, so 'utilization' includes time spent waiting on AllGather.</a:t>
             </a:r>
           </a:p>
           <a:p>
@@ -5049,177 +4839,42 @@
               </a:spcAft>
             </a:pPr>
             <a:r>
-              <a:rPr sz="1400">
+              <a:rPr sz="1700">
                 <a:solidFill>
                   <a:srgbClr val="555555"/>
                 </a:solidFill>
               </a:rPr>
-              <a:t>    - Each step ≈ 48 s; projected full wall time ≈ 16.5 h</a:t>
-            </a:r>
-          </a:p>
-          <a:p>
-            <a:pPr>
-              <a:spcAft>
-                <a:spcPts val="400"/>
-              </a:spcAft>
-            </a:pPr>
-            <a:r>
-              <a:rPr sz="1600">
-                <a:solidFill>
-                  <a:srgbClr val="101010"/>
-                </a:solidFill>
-              </a:rPr>
-              <a:t>- Throughput: 0.17 samples/sec — 0.08× DDP (≈13× slower)</a:t>
-            </a:r>
-          </a:p>
-          <a:p>
-            <a:pPr>
-              <a:spcAft>
-                <a:spcPts val="400"/>
-              </a:spcAft>
-            </a:pPr>
-            <a:r>
-              <a:rPr sz="1600">
-                <a:solidFill>
-                  <a:srgbClr val="101010"/>
-                </a:solidFill>
-              </a:rPr>
-              <a:t>- Effective batch 8 (per_device=1, accum=4)</a:t>
-            </a:r>
-          </a:p>
-          <a:p>
-            <a:pPr lvl="1">
-              <a:spcAft>
-                <a:spcPts val="400"/>
-              </a:spcAft>
-            </a:pPr>
-            <a:r>
-              <a:rPr sz="1400">
-                <a:solidFill>
-                  <a:srgbClr val="555555"/>
-                </a:solidFill>
-              </a:rPr>
-              <a:t>    - Smaller batch chosen because GPU mem accounting is more conservative under ZeRO-3</a:t>
-            </a:r>
-          </a:p>
-          <a:p>
-            <a:pPr>
-              <a:spcAft>
-                <a:spcPts val="400"/>
-              </a:spcAft>
-            </a:pPr>
-            <a:r>
-              <a:rPr sz="1600">
-                <a:solidFill>
-                  <a:srgbClr val="101010"/>
-                </a:solidFill>
-              </a:rPr>
-              <a:t>- Peak GPU memory: 22.0 GiB</a:t>
-            </a:r>
-          </a:p>
-          <a:p>
-            <a:pPr lvl="1">
-              <a:spcAft>
-                <a:spcPts val="400"/>
-              </a:spcAft>
-            </a:pPr>
-            <a:r>
-              <a:rPr sz="1400">
-                <a:solidFill>
-                  <a:srgbClr val="555555"/>
-                </a:solidFill>
-              </a:rPr>
-              <a:t>    - Lower than DDP (30.7) — sharding does save memory</a:t>
-            </a:r>
-          </a:p>
-          <a:p>
-            <a:pPr lvl="1">
-              <a:spcAft>
-                <a:spcPts val="400"/>
-              </a:spcAft>
-            </a:pPr>
-            <a:r>
-              <a:rPr sz="1400">
-                <a:solidFill>
-                  <a:srgbClr val="555555"/>
-                </a:solidFill>
-              </a:rPr>
-              <a:t>    - But the memory wasn't the bottleneck; comm was</a:t>
-            </a:r>
-          </a:p>
-          <a:p>
-            <a:pPr>
-              <a:spcAft>
-                <a:spcPts val="400"/>
-              </a:spcAft>
-            </a:pPr>
-            <a:r>
-              <a:rPr sz="1600">
-                <a:solidFill>
-                  <a:srgbClr val="101010"/>
-                </a:solidFill>
-              </a:rPr>
-              <a:t>- Average GPU utilization: 99.2%</a:t>
-            </a:r>
-          </a:p>
-          <a:p>
-            <a:pPr lvl="1">
-              <a:spcAft>
-                <a:spcPts val="400"/>
-              </a:spcAft>
-            </a:pPr>
-            <a:r>
-              <a:rPr sz="1400">
-                <a:solidFill>
-                  <a:srgbClr val="555555"/>
-                </a:solidFill>
-              </a:rPr>
-              <a:t>    - Counter-intuitive: 99% util but slowest — DeepSpeed pipelines overlap</a:t>
-            </a:r>
-          </a:p>
-          <a:p>
-            <a:pPr lvl="1">
-              <a:spcAft>
-                <a:spcPts val="400"/>
-              </a:spcAft>
-            </a:pPr>
-            <a:r>
-              <a:rPr sz="1400">
-                <a:solidFill>
-                  <a:srgbClr val="555555"/>
-                </a:solidFill>
-              </a:rPr>
-              <a:t>    - comm with compute, so 'utilized' time includes waiting on AllGather</a:t>
-            </a:r>
-          </a:p>
-          <a:p>
-            <a:pPr>
-              <a:spcAft>
-                <a:spcPts val="400"/>
-              </a:spcAft>
-            </a:pPr>
-            <a:r>
-              <a:rPr sz="1600">
-                <a:solidFill>
-                  <a:srgbClr val="101010"/>
-                </a:solidFill>
-              </a:rPr>
-              <a:t>- Last logged loss: 1.31 — convergence direction OK, just too slow</a:t>
-            </a:r>
-          </a:p>
-          <a:p>
-            <a:pPr>
-              <a:spcAft>
-                <a:spcPts val="400"/>
-              </a:spcAft>
-            </a:pPr>
-            <a:r>
-              <a:rPr sz="1600">
-                <a:solidFill>
-                  <a:srgbClr val="101010"/>
-                </a:solidFill>
-              </a:rPr>
-              <a:t>- Diagnosis: per-layer cross-node AllGather is the bottleneck.</a:t>
+              <a:t>    –  High util doesn't mean fast — it means the engine kept the GPU busy on something.</a:t>
+            </a:r>
+          </a:p>
+          <a:p>
+            <a:pPr>
+              <a:spcAft>
+                <a:spcPts val="800"/>
+              </a:spcAft>
+            </a:pPr>
+            <a:r>
+              <a:rPr sz="2000">
+                <a:solidFill>
+                  <a:srgbClr val="101010"/>
+                </a:solidFill>
+              </a:rPr>
+              <a:t>•  Last logged loss: 1.31. Convergence was fine — the run was just too slow to finish.</a:t>
+            </a:r>
+          </a:p>
+          <a:p>
+            <a:pPr>
+              <a:spcAft>
+                <a:spcPts val="800"/>
+              </a:spcAft>
+            </a:pPr>
+            <a:r>
+              <a:rPr sz="2000">
+                <a:solidFill>
+                  <a:srgbClr val="101010"/>
+                </a:solidFill>
+              </a:rPr>
+              <a:t>•  Diagnosis: per-layer AllGather over 1 Gbps Ethernet is the wall.</a:t>
             </a:r>
           </a:p>
         </p:txBody>
@@ -5250,8 +4905,8 @@
         </p:nvSpPr>
         <p:spPr>
           <a:xfrm>
-            <a:off x="457200" y="2926080"/>
-            <a:ext cx="11247120" cy="1097280"/>
+            <a:off x="548640" y="2834640"/>
+            <a:ext cx="11064240" cy="1280160"/>
           </a:xfrm>
           <a:prstGeom prst="rect">
             <a:avLst/>
@@ -5266,7 +4921,7 @@
           <a:p>
             <a:pPr algn="ctr"/>
             <a:r>
-              <a:rPr sz="4800" b="0">
+              <a:rPr sz="5400" b="0">
                 <a:solidFill>
                   <a:srgbClr val="101010"/>
                 </a:solidFill>
@@ -5302,8 +4957,8 @@
         </p:nvSpPr>
         <p:spPr>
           <a:xfrm>
-            <a:off x="457200" y="320040"/>
-            <a:ext cx="11247120" cy="822960"/>
+            <a:off x="548640" y="365760"/>
+            <a:ext cx="11064240" cy="822960"/>
           </a:xfrm>
           <a:prstGeom prst="rect">
             <a:avLst/>
@@ -5318,12 +4973,12 @@
           <a:p>
             <a:pPr algn="l"/>
             <a:r>
-              <a:rPr sz="3600" b="0">
-                <a:solidFill>
-                  <a:srgbClr val="101010"/>
-                </a:solidFill>
-              </a:rPr>
-              <a:t>Hardware &amp; Setup</a:t>
+              <a:rPr sz="3400" b="1">
+                <a:solidFill>
+                  <a:srgbClr val="101010"/>
+                </a:solidFill>
+              </a:rPr>
+              <a:t>Setup</a:t>
             </a:r>
           </a:p>
         </p:txBody>
@@ -5336,8 +4991,8 @@
         </p:nvSpPr>
         <p:spPr>
           <a:xfrm>
-            <a:off x="457200" y="1280160"/>
-            <a:ext cx="5760720" cy="5303520"/>
+            <a:off x="548640" y="1371600"/>
+            <a:ext cx="11064240" cy="5120640"/>
           </a:xfrm>
           <a:prstGeom prst="rect">
             <a:avLst/>
@@ -5345,23 +5000,38 @@
           <a:noFill/>
         </p:spPr>
         <p:txBody>
-          <a:bodyPr wrap="square">
+          <a:bodyPr wrap="square" anchor="ctr">
             <a:spAutoFit/>
           </a:bodyPr>
           <a:lstStyle/>
           <a:p>
             <a:pPr>
               <a:spcAft>
+                <a:spcPts val="800"/>
+              </a:spcAft>
+            </a:pPr>
+            <a:r>
+              <a:rPr sz="2200">
+                <a:solidFill>
+                  <a:srgbClr val="101010"/>
+                </a:solidFill>
+              </a:rPr>
+              <a:t>•  MBZUAI HPC, ws-ia partition: 2 nodes × 1 RTX 5000 Ada (32 GB), Ethernet ~1 Gbps.</a:t>
+            </a:r>
+          </a:p>
+          <a:p>
+            <a:pPr lvl="1">
+              <a:spcAft>
                 <a:spcPts val="400"/>
               </a:spcAft>
             </a:pPr>
             <a:r>
-              <a:rPr sz="1600">
-                <a:solidFill>
-                  <a:srgbClr val="101010"/>
-                </a:solidFill>
-              </a:rPr>
-              <a:t>- Cluster: MBZUAI HPC (login-student-lab.mbzu.ae)</a:t>
+              <a:rPr sz="1900">
+                <a:solidFill>
+                  <a:srgbClr val="555555"/>
+                </a:solidFill>
+              </a:rPr>
+              <a:t>    –  No NVLink, no InfiniBand. Cross-node comm goes over a slow link.</a:t>
             </a:r>
           </a:p>
           <a:p>
@@ -5371,12 +5041,42 @@
               </a:spcAft>
             </a:pPr>
             <a:r>
-              <a:rPr sz="1400">
+              <a:rPr sz="1900">
                 <a:solidFill>
                   <a:srgbClr val="555555"/>
                 </a:solidFill>
               </a:rPr>
-              <a:t>    - ws-ia partition: 1× NVIDIA RTX 5000 Ada (32 GB) per node</a:t>
+              <a:t>    –  The gpu partition has a 1-GPU-per-user QOS, so multi-GPU = two salloc sessions + torchrun.</a:t>
+            </a:r>
+          </a:p>
+          <a:p>
+            <a:pPr>
+              <a:spcAft>
+                <a:spcPts val="800"/>
+              </a:spcAft>
+            </a:pPr>
+            <a:r>
+              <a:rPr sz="2200">
+                <a:solidFill>
+                  <a:srgbClr val="101010"/>
+                </a:solidFill>
+              </a:rPr>
+              <a:t>•  Software: PyTorch 2.1.2, DeepSpeed 0.12.6, Transformers 4.37.2, peft 0.6.0.</a:t>
+            </a:r>
+          </a:p>
+          <a:p>
+            <a:pPr>
+              <a:spcAft>
+                <a:spcPts val="800"/>
+              </a:spcAft>
+            </a:pPr>
+            <a:r>
+              <a:rPr sz="2200">
+                <a:solidFill>
+                  <a:srgbClr val="101010"/>
+                </a:solidFill>
+              </a:rPr>
+              <a:t>•  Team of three, each owning at least one non-trivial parallelism strategy:</a:t>
             </a:r>
           </a:p>
           <a:p>
@@ -5386,12 +5086,12 @@
               </a:spcAft>
             </a:pPr>
             <a:r>
-              <a:rPr sz="1400">
+              <a:rPr sz="1900">
                 <a:solidFill>
                   <a:srgbClr val="555555"/>
                 </a:solidFill>
               </a:rPr>
-              <a:t>    - 116 nodes total, 48 CPUs / 230 GB RAM each</a:t>
+              <a:t>    –  Pipeline parallelism — Youssef Ghallab</a:t>
             </a:r>
           </a:p>
           <a:p>
@@ -5401,12 +5101,12 @@
               </a:spcAft>
             </a:pPr>
             <a:r>
-              <a:rPr sz="1400">
+              <a:rPr sz="1900">
                 <a:solidFill>
                   <a:srgbClr val="555555"/>
                 </a:solidFill>
               </a:rPr>
-              <a:t>    - Inter-node link: ~1 Gbps Ethernet (no NVLink, no InfiniBand)</a:t>
+              <a:t>    –  DeepSpeed ZeRO-2 — Omar Ahmed</a:t>
             </a:r>
           </a:p>
           <a:p>
@@ -5416,102 +5116,12 @@
               </a:spcAft>
             </a:pPr>
             <a:r>
-              <a:rPr sz="1400">
+              <a:rPr sz="1900">
                 <a:solidFill>
                   <a:srgbClr val="555555"/>
                 </a:solidFill>
               </a:rPr>
-              <a:t>    - gpu partition limited to 1 GPU per user (gpu-1 QOS)</a:t>
-            </a:r>
-          </a:p>
-          <a:p>
-            <a:pPr>
-              <a:spcAft>
-                <a:spcPts val="400"/>
-              </a:spcAft>
-            </a:pPr>
-            <a:r>
-              <a:rPr sz="1600">
-                <a:solidFill>
-                  <a:srgbClr val="101010"/>
-                </a:solidFill>
-              </a:rPr>
-              <a:t>- Multi-GPU = 2 separate salloc sessions on ws-ia + torchrun --nnodes=2</a:t>
-            </a:r>
-          </a:p>
-          <a:p>
-            <a:pPr>
-              <a:spcAft>
-                <a:spcPts val="400"/>
-              </a:spcAft>
-            </a:pPr>
-            <a:r>
-              <a:rPr sz="1600">
-                <a:solidFill>
-                  <a:srgbClr val="101010"/>
-                </a:solidFill>
-              </a:rPr>
-              <a:t>- Software: Python 3.10, PyTorch 2.1.2, DeepSpeed 0.12.6, Transformers 4.37.2, peft 0.6.0</a:t>
-            </a:r>
-          </a:p>
-          <a:p>
-            <a:pPr>
-              <a:spcAft>
-                <a:spcPts val="400"/>
-              </a:spcAft>
-            </a:pPr>
-            <a:r>
-              <a:rPr sz="1600">
-                <a:solidFill>
-                  <a:srgbClr val="101010"/>
-                </a:solidFill>
-              </a:rPr>
-              <a:t>- Team: 3 students, each owning at least one parallelism strategy</a:t>
-            </a:r>
-          </a:p>
-          <a:p>
-            <a:pPr lvl="1">
-              <a:spcAft>
-                <a:spcPts val="400"/>
-              </a:spcAft>
-            </a:pPr>
-            <a:r>
-              <a:rPr sz="1400">
-                <a:solidFill>
-                  <a:srgbClr val="555555"/>
-                </a:solidFill>
-              </a:rPr>
-              <a:t>    - Pipeline parallelism — Youssef Ghallab</a:t>
-            </a:r>
-          </a:p>
-          <a:p>
-            <a:pPr lvl="1">
-              <a:spcAft>
-                <a:spcPts val="400"/>
-              </a:spcAft>
-            </a:pPr>
-            <a:r>
-              <a:rPr sz="1400">
-                <a:solidFill>
-                  <a:srgbClr val="555555"/>
-                </a:solidFill>
-              </a:rPr>
-              <a:t>    - DeepSpeed ZeRO-2 — Omar Ahmed</a:t>
-            </a:r>
-          </a:p>
-          <a:p>
-            <a:pPr lvl="1">
-              <a:spcAft>
-                <a:spcPts val="400"/>
-              </a:spcAft>
-            </a:pPr>
-            <a:r>
-              <a:rPr sz="1400">
-                <a:solidFill>
-                  <a:srgbClr val="555555"/>
-                </a:solidFill>
-              </a:rPr>
-              <a:t>    - DeepSpeed ZeRO-3 + PyTorch FSDP — Rassul Magauin</a:t>
+              <a:t>    –  DeepSpeed ZeRO-3 and PyTorch FSDP — Rassul Magauin</a:t>
             </a:r>
           </a:p>
         </p:txBody>
@@ -5542,8 +5152,8 @@
         </p:nvSpPr>
         <p:spPr>
           <a:xfrm>
-            <a:off x="457200" y="320040"/>
-            <a:ext cx="11247120" cy="822960"/>
+            <a:off x="548640" y="365760"/>
+            <a:ext cx="11064240" cy="822960"/>
           </a:xfrm>
           <a:prstGeom prst="rect">
             <a:avLst/>
@@ -5558,12 +5168,12 @@
           <a:p>
             <a:pPr algn="l"/>
             <a:r>
-              <a:rPr sz="3600" b="0">
-                <a:solidFill>
-                  <a:srgbClr val="101010"/>
-                </a:solidFill>
-              </a:rPr>
-              <a:t>PyTorch FSDP — explanation (Rassul)</a:t>
+              <a:rPr sz="3400" b="1">
+                <a:solidFill>
+                  <a:srgbClr val="101010"/>
+                </a:solidFill>
+              </a:rPr>
+              <a:t>FSDP: PyTorch's take (Rassul)</a:t>
             </a:r>
           </a:p>
         </p:txBody>
@@ -5576,8 +5186,8 @@
         </p:nvSpPr>
         <p:spPr>
           <a:xfrm>
-            <a:off x="457200" y="1280160"/>
-            <a:ext cx="11247120" cy="5303520"/>
+            <a:off x="548640" y="1371600"/>
+            <a:ext cx="11064240" cy="5120640"/>
           </a:xfrm>
           <a:prstGeom prst="rect">
             <a:avLst/>
@@ -5585,23 +5195,53 @@
           <a:noFill/>
         </p:spPr>
         <p:txBody>
-          <a:bodyPr wrap="square">
+          <a:bodyPr wrap="square" anchor="ctr">
             <a:spAutoFit/>
           </a:bodyPr>
           <a:lstStyle/>
           <a:p>
             <a:pPr>
               <a:spcAft>
+                <a:spcPts val="800"/>
+              </a:spcAft>
+            </a:pPr>
+            <a:r>
+              <a:rPr sz="2000">
+                <a:solidFill>
+                  <a:srgbClr val="101010"/>
+                </a:solidFill>
+              </a:rPr>
+              <a:t>•  PyTorch-native equivalent of ZeRO-3. Same algorithm, different implementation.</a:t>
+            </a:r>
+          </a:p>
+          <a:p>
+            <a:pPr>
+              <a:spcAft>
+                <a:spcPts val="800"/>
+              </a:spcAft>
+            </a:pPr>
+            <a:r>
+              <a:rPr sz="2000">
+                <a:solidFill>
+                  <a:srgbClr val="101010"/>
+                </a:solidFill>
+              </a:rPr>
+              <a:t>•  Design choices that differ from DeepSpeed:</a:t>
+            </a:r>
+          </a:p>
+          <a:p>
+            <a:pPr lvl="1">
+              <a:spcAft>
                 <a:spcPts val="400"/>
               </a:spcAft>
             </a:pPr>
             <a:r>
-              <a:rPr sz="1600">
-                <a:solidFill>
-                  <a:srgbClr val="101010"/>
-                </a:solidFill>
-              </a:rPr>
-              <a:t>- PyTorch-native equivalent of DeepSpeed ZeRO-3</a:t>
+              <a:rPr sz="1700">
+                <a:solidFill>
+                  <a:srgbClr val="555555"/>
+                </a:solidFill>
+              </a:rPr>
+              <a:t>    –  Each transformer block is wrapped as one FSDP unit (a contiguous FlatParameter).</a:t>
             </a:r>
           </a:p>
           <a:p>
@@ -5611,12 +5251,12 @@
               </a:spcAft>
             </a:pPr>
             <a:r>
-              <a:rPr sz="1400">
+              <a:rPr sz="1700">
                 <a:solidFill>
                   <a:srgbClr val="555555"/>
                 </a:solidFill>
               </a:rPr>
-              <a:t>    - Same algorithm: shard params + grads + optim across DP ranks</a:t>
+              <a:t>    –  AllGather happens at the unit boundary, not per-tensor.</a:t>
             </a:r>
           </a:p>
           <a:p>
@@ -5626,27 +5266,57 @@
               </a:spcAft>
             </a:pPr>
             <a:r>
-              <a:rPr sz="1400">
+              <a:rPr sz="1700">
                 <a:solidFill>
                   <a:srgbClr val="555555"/>
                 </a:solidFill>
               </a:rPr>
-              <a:t>    - Different implementation: PyTorch core, not DeepSpeed</a:t>
-            </a:r>
-          </a:p>
-          <a:p>
-            <a:pPr>
+              <a:t>    –  Mixed precision is set explicitly via a policy (we used bf16).</a:t>
+            </a:r>
+          </a:p>
+          <a:p>
+            <a:pPr>
+              <a:spcAft>
+                <a:spcPts val="800"/>
+              </a:spcAft>
+            </a:pPr>
+            <a:r>
+              <a:rPr sz="2000">
+                <a:solidFill>
+                  <a:srgbClr val="101010"/>
+                </a:solidFill>
+              </a:rPr>
+              <a:t>•  Our config: full_shard auto_wrap on LlamaDecoderLayer, use_orig_params=True (required for LoRA), cpu_ram_efficient_loading=true.</a:t>
+            </a:r>
+          </a:p>
+          <a:p>
+            <a:pPr>
+              <a:spcAft>
+                <a:spcPts val="800"/>
+              </a:spcAft>
+            </a:pPr>
+            <a:r>
+              <a:rPr sz="2000">
+                <a:solidFill>
+                  <a:srgbClr val="101010"/>
+                </a:solidFill>
+              </a:rPr>
+              <a:t>•  Two LLaVA-specific bugs we had to patch to get this running:</a:t>
+            </a:r>
+          </a:p>
+          <a:p>
+            <a:pPr lvl="1">
               <a:spcAft>
                 <a:spcPts val="400"/>
               </a:spcAft>
             </a:pPr>
             <a:r>
-              <a:rPr sz="1600">
-                <a:solidFill>
-                  <a:srgbClr val="101010"/>
-                </a:solidFill>
-              </a:rPr>
-              <a:t>- Different design choices vs ZeRO-3:</a:t>
+              <a:rPr sz="1700">
+                <a:solidFill>
+                  <a:srgbClr val="555555"/>
+                </a:solidFill>
+              </a:rPr>
+              <a:t>    –  self.vision_tower[0] crashes when loading from a vendored checkpoint where vision_tower isn't a list.</a:t>
             </a:r>
           </a:p>
           <a:p>
@@ -5656,162 +5326,12 @@
               </a:spcAft>
             </a:pPr>
             <a:r>
-              <a:rPr sz="1400">
+              <a:rPr sz="1700">
                 <a:solidFill>
                   <a:srgbClr val="555555"/>
                 </a:solidFill>
               </a:rPr>
-              <a:t>    - FSDP wraps each transformer block as its own FSDP unit (FlatParameter)</a:t>
-            </a:r>
-          </a:p>
-          <a:p>
-            <a:pPr lvl="1">
-              <a:spcAft>
-                <a:spcPts val="400"/>
-              </a:spcAft>
-            </a:pPr>
-            <a:r>
-              <a:rPr sz="1400">
-                <a:solidFill>
-                  <a:srgbClr val="555555"/>
-                </a:solidFill>
-              </a:rPr>
-              <a:t>    - AllGather happens at unit boundary, not per-tensor</a:t>
-            </a:r>
-          </a:p>
-          <a:p>
-            <a:pPr lvl="1">
-              <a:spcAft>
-                <a:spcPts val="400"/>
-              </a:spcAft>
-            </a:pPr>
-            <a:r>
-              <a:rPr sz="1400">
-                <a:solidFill>
-                  <a:srgbClr val="555555"/>
-                </a:solidFill>
-              </a:rPr>
-              <a:t>    - Mixed precision policy is explicit (we used bf16)</a:t>
-            </a:r>
-          </a:p>
-          <a:p>
-            <a:pPr>
-              <a:spcAft>
-                <a:spcPts val="400"/>
-              </a:spcAft>
-            </a:pPr>
-            <a:r>
-              <a:rPr sz="1600">
-                <a:solidFill>
-                  <a:srgbClr val="101010"/>
-                </a:solidFill>
-              </a:rPr>
-              <a:t>- Config: configs/fsdp.json</a:t>
-            </a:r>
-          </a:p>
-          <a:p>
-            <a:pPr lvl="1">
-              <a:spcAft>
-                <a:spcPts val="400"/>
-              </a:spcAft>
-            </a:pPr>
-            <a:r>
-              <a:rPr sz="1400">
-                <a:solidFill>
-                  <a:srgbClr val="555555"/>
-                </a:solidFill>
-              </a:rPr>
-              <a:t>    - auto_wrap_policy=TRANSFORMER_BASED_WRAP, wrap LlamaDecoderLayer</a:t>
-            </a:r>
-          </a:p>
-          <a:p>
-            <a:pPr lvl="1">
-              <a:spcAft>
-                <a:spcPts val="400"/>
-              </a:spcAft>
-            </a:pPr>
-            <a:r>
-              <a:rPr sz="1400">
-                <a:solidFill>
-                  <a:srgbClr val="555555"/>
-                </a:solidFill>
-              </a:rPr>
-              <a:t>    - use_orig_params=True (required for LoRA non-uniform requires_grad)</a:t>
-            </a:r>
-          </a:p>
-          <a:p>
-            <a:pPr lvl="1">
-              <a:spcAft>
-                <a:spcPts val="400"/>
-              </a:spcAft>
-            </a:pPr>
-            <a:r>
-              <a:rPr sz="1400">
-                <a:solidFill>
-                  <a:srgbClr val="555555"/>
-                </a:solidFill>
-              </a:rPr>
-              <a:t>    - cpu_ram_efficient_loading=true (only rank 0 holds full CPU state at load)</a:t>
-            </a:r>
-          </a:p>
-          <a:p>
-            <a:pPr>
-              <a:spcAft>
-                <a:spcPts val="400"/>
-              </a:spcAft>
-            </a:pPr>
-            <a:r>
-              <a:rPr sz="1600">
-                <a:solidFill>
-                  <a:srgbClr val="101010"/>
-                </a:solidFill>
-              </a:rPr>
-              <a:t>- Two LLaVA bugs we had to patch:</a:t>
-            </a:r>
-          </a:p>
-          <a:p>
-            <a:pPr lvl="1">
-              <a:spcAft>
-                <a:spcPts val="400"/>
-              </a:spcAft>
-            </a:pPr>
-            <a:r>
-              <a:rPr sz="1400">
-                <a:solidFill>
-                  <a:srgbClr val="555555"/>
-                </a:solidFill>
-              </a:rPr>
-              <a:t>    - vision_tower[0] fails when loaded from a vendored checkpoint (not a list)</a:t>
-            </a:r>
-          </a:p>
-          <a:p>
-            <a:pPr lvl="1">
-              <a:spcAft>
-                <a:spcPts val="400"/>
-              </a:spcAft>
-            </a:pPr>
-            <a:r>
-              <a:rPr sz="1400">
-                <a:solidFill>
-                  <a:srgbClr val="555555"/>
-                </a:solidFill>
-              </a:rPr>
-              <a:t>    - LoRA adapters created in fp32 after model.to(bf16) → cast LoRA to bf16 too</a:t>
-            </a:r>
-          </a:p>
-          <a:p>
-            <a:pPr>
-              <a:spcAft>
-                <a:spcPts val="400"/>
-              </a:spcAft>
-            </a:pPr>
-            <a:r>
-              <a:rPr sz="1600">
-                <a:solidFill>
-                  <a:srgbClr val="101010"/>
-                </a:solidFill>
-              </a:rPr>
-              <a:t>- Launcher: scripts/run_stage2_fsdp_lora.sh (mirrors run_stage2_zero3_lora.sh)</a:t>
+              <a:t>    –  LoRA adapters are created in fp32 after the base model is cast to bf16. FSDP requires uniform dtype, so we cast LoRA to bf16 too.</a:t>
             </a:r>
           </a:p>
         </p:txBody>
@@ -5842,8 +5362,8 @@
         </p:nvSpPr>
         <p:spPr>
           <a:xfrm>
-            <a:off x="457200" y="320040"/>
-            <a:ext cx="11247120" cy="822960"/>
+            <a:off x="548640" y="365760"/>
+            <a:ext cx="11064240" cy="822960"/>
           </a:xfrm>
           <a:prstGeom prst="rect">
             <a:avLst/>
@@ -5858,7 +5378,7 @@
           <a:p>
             <a:pPr algn="l"/>
             <a:r>
-              <a:rPr sz="3600" b="0">
+              <a:rPr sz="3400" b="1">
                 <a:solidFill>
                   <a:srgbClr val="101010"/>
                 </a:solidFill>
@@ -5876,8 +5396,8 @@
         </p:nvSpPr>
         <p:spPr>
           <a:xfrm>
-            <a:off x="457200" y="1280160"/>
-            <a:ext cx="5760720" cy="5303520"/>
+            <a:off x="548640" y="1371600"/>
+            <a:ext cx="5852160" cy="5120640"/>
           </a:xfrm>
           <a:prstGeom prst="rect">
             <a:avLst/>
@@ -5885,53 +5405,143 @@
           <a:noFill/>
         </p:spPr>
         <p:txBody>
-          <a:bodyPr wrap="square">
+          <a:bodyPr wrap="square" anchor="ctr">
             <a:spAutoFit/>
           </a:bodyPr>
           <a:lstStyle/>
           <a:p>
             <a:pPr>
               <a:spcAft>
+                <a:spcPts val="800"/>
+              </a:spcAft>
+            </a:pPr>
+            <a:r>
+              <a:rPr sz="1700">
+                <a:solidFill>
+                  <a:srgbClr val="101010"/>
+                </a:solidFill>
+              </a:rPr>
+              <a:t>•  Stopped early at step 28 of 1250 to capture metrics — same shape as the ZeRO-3 timeout.</a:t>
+            </a:r>
+          </a:p>
+          <a:p>
+            <a:pPr>
+              <a:spcAft>
+                <a:spcPts val="800"/>
+              </a:spcAft>
+            </a:pPr>
+            <a:r>
+              <a:rPr sz="1700">
+                <a:solidFill>
+                  <a:srgbClr val="101010"/>
+                </a:solidFill>
+              </a:rPr>
+              <a:t>•  Wall time observed: 39 min. Each step took about 80 seconds.</a:t>
+            </a:r>
+          </a:p>
+          <a:p>
+            <a:pPr lvl="1">
+              <a:spcAft>
                 <a:spcPts val="400"/>
               </a:spcAft>
             </a:pPr>
             <a:r>
-              <a:rPr sz="1600">
-                <a:solidFill>
-                  <a:srgbClr val="101010"/>
-                </a:solidFill>
-              </a:rPr>
-              <a:t>- Run: stage2_fsdp_lora_20260426_143948</a:t>
-            </a:r>
-          </a:p>
-          <a:p>
-            <a:pPr>
+              <a:rPr sz="1400">
+                <a:solidFill>
+                  <a:srgbClr val="555555"/>
+                </a:solidFill>
+              </a:rPr>
+              <a:t>    –  Projected full run: 27.9 hours. Slower than ZeRO-3.</a:t>
+            </a:r>
+          </a:p>
+          <a:p>
+            <a:pPr>
+              <a:spcAft>
+                <a:spcPts val="800"/>
+              </a:spcAft>
+            </a:pPr>
+            <a:r>
+              <a:rPr sz="1700">
+                <a:solidFill>
+                  <a:srgbClr val="101010"/>
+                </a:solidFill>
+              </a:rPr>
+              <a:t>•  Throughput: 0.095 samples/sec — about 22× slower than DDP, ~1.7× slower than ZeRO-3.</a:t>
+            </a:r>
+          </a:p>
+          <a:p>
+            <a:pPr>
+              <a:spcAft>
+                <a:spcPts val="800"/>
+              </a:spcAft>
+            </a:pPr>
+            <a:r>
+              <a:rPr sz="1700">
+                <a:solidFill>
+                  <a:srgbClr val="101010"/>
+                </a:solidFill>
+              </a:rPr>
+              <a:t>•  Peak GPU memory: 32.3 GiB. Right at the card's limit.</a:t>
+            </a:r>
+          </a:p>
+          <a:p>
+            <a:pPr lvl="1">
               <a:spcAft>
                 <a:spcPts val="400"/>
               </a:spcAft>
             </a:pPr>
             <a:r>
-              <a:rPr sz="1600">
-                <a:solidFill>
-                  <a:srgbClr val="101010"/>
-                </a:solidFill>
-              </a:rPr>
-              <a:t>- Stopped early at step 28/1250 (matches the ZeRO-3 timeout pattern)</a:t>
-            </a:r>
-          </a:p>
-          <a:p>
-            <a:pPr>
+              <a:rPr sz="1400">
+                <a:solidFill>
+                  <a:srgbClr val="555555"/>
+                </a:solidFill>
+              </a:rPr>
+              <a:t>    –  FSDP's contiguous FlatParameter is bigger than DeepSpeed's bucket-based scheme.</a:t>
+            </a:r>
+          </a:p>
+          <a:p>
+            <a:pPr>
+              <a:spcAft>
+                <a:spcPts val="800"/>
+              </a:spcAft>
+            </a:pPr>
+            <a:r>
+              <a:rPr sz="1700">
+                <a:solidFill>
+                  <a:srgbClr val="101010"/>
+                </a:solidFill>
+              </a:rPr>
+              <a:t>•  GPU utilization: 97.5%.</a:t>
+            </a:r>
+          </a:p>
+          <a:p>
+            <a:pPr>
+              <a:spcAft>
+                <a:spcPts val="800"/>
+              </a:spcAft>
+            </a:pPr>
+            <a:r>
+              <a:rPr sz="1700">
+                <a:solidFill>
+                  <a:srgbClr val="101010"/>
+                </a:solidFill>
+              </a:rPr>
+              <a:t>•  Why slower than ZeRO-3 on the same hardware?</a:t>
+            </a:r>
+          </a:p>
+          <a:p>
+            <a:pPr lvl="1">
               <a:spcAft>
                 <a:spcPts val="400"/>
               </a:spcAft>
             </a:pPr>
             <a:r>
-              <a:rPr sz="1600">
-                <a:solidFill>
-                  <a:srgbClr val="101010"/>
-                </a:solidFill>
-              </a:rPr>
-              <a:t>- Wall time observed: 39 min (2350 s); per-step ≈ 80 s</a:t>
+              <a:rPr sz="1400">
+                <a:solidFill>
+                  <a:srgbClr val="555555"/>
+                </a:solidFill>
+              </a:rPr>
+              <a:t>    –  DeepSpeed's bounded async config (50 MB buckets) overlaps comm with compute aggressively.</a:t>
             </a:r>
           </a:p>
           <a:p>
@@ -5946,157 +5556,22 @@
                   <a:srgbClr val="555555"/>
                 </a:solidFill>
               </a:rPr>
-              <a:t>    - Projected full wall time ≈ 27.9 h — even slower than ZeRO-3</a:t>
-            </a:r>
-          </a:p>
-          <a:p>
-            <a:pPr>
+              <a:t>    –  FSDP's defaults wait for each transformer block's AllGather to finish before computing.</a:t>
+            </a:r>
+          </a:p>
+          <a:p>
+            <a:pPr lvl="1">
               <a:spcAft>
                 <a:spcPts val="400"/>
               </a:spcAft>
             </a:pPr>
             <a:r>
-              <a:rPr sz="1600">
-                <a:solidFill>
-                  <a:srgbClr val="101010"/>
-                </a:solidFill>
-              </a:rPr>
-              <a:t>- Throughput: 0.095 samples/sec — 0.04× DDP, ≈22× slower</a:t>
-            </a:r>
-          </a:p>
-          <a:p>
-            <a:pPr lvl="1">
-              <a:spcAft>
-                <a:spcPts val="400"/>
-              </a:spcAft>
-            </a:pPr>
-            <a:r>
               <a:rPr sz="1400">
                 <a:solidFill>
                   <a:srgbClr val="555555"/>
                 </a:solidFill>
               </a:rPr>
-              <a:t>    - ≈1.7× slower than ZeRO-3 on the same workload, same hardware</a:t>
-            </a:r>
-          </a:p>
-          <a:p>
-            <a:pPr>
-              <a:spcAft>
-                <a:spcPts val="400"/>
-              </a:spcAft>
-            </a:pPr>
-            <a:r>
-              <a:rPr sz="1600">
-                <a:solidFill>
-                  <a:srgbClr val="101010"/>
-                </a:solidFill>
-              </a:rPr>
-              <a:t>- Peak GPU memory: 32.3 GiB — basically saturating the 32 GiB card</a:t>
-            </a:r>
-          </a:p>
-          <a:p>
-            <a:pPr lvl="1">
-              <a:spcAft>
-                <a:spcPts val="400"/>
-              </a:spcAft>
-            </a:pPr>
-            <a:r>
-              <a:rPr sz="1400">
-                <a:solidFill>
-                  <a:srgbClr val="555555"/>
-                </a:solidFill>
-              </a:rPr>
-              <a:t>    - FSDP's FlatParameter contiguous tensor is larger than DeepSpeed's bucket scheme</a:t>
-            </a:r>
-          </a:p>
-          <a:p>
-            <a:pPr>
-              <a:spcAft>
-                <a:spcPts val="400"/>
-              </a:spcAft>
-            </a:pPr>
-            <a:r>
-              <a:rPr sz="1600">
-                <a:solidFill>
-                  <a:srgbClr val="101010"/>
-                </a:solidFill>
-              </a:rPr>
-              <a:t>- Average GPU utilization: 97.5%</a:t>
-            </a:r>
-          </a:p>
-          <a:p>
-            <a:pPr>
-              <a:spcAft>
-                <a:spcPts val="400"/>
-              </a:spcAft>
-            </a:pPr>
-            <a:r>
-              <a:rPr sz="1600">
-                <a:solidFill>
-                  <a:srgbClr val="101010"/>
-                </a:solidFill>
-              </a:rPr>
-              <a:t>- Why even slower than ZeRO-3?</a:t>
-            </a:r>
-          </a:p>
-          <a:p>
-            <a:pPr lvl="1">
-              <a:spcAft>
-                <a:spcPts val="400"/>
-              </a:spcAft>
-            </a:pPr>
-            <a:r>
-              <a:rPr sz="1400">
-                <a:solidFill>
-                  <a:srgbClr val="555555"/>
-                </a:solidFill>
-              </a:rPr>
-              <a:t>    - DeepSpeed ZeRO-3 with bounded async config (50 MB buckets) overlaps better</a:t>
-            </a:r>
-          </a:p>
-          <a:p>
-            <a:pPr lvl="1">
-              <a:spcAft>
-                <a:spcPts val="400"/>
-              </a:spcAft>
-            </a:pPr>
-            <a:r>
-              <a:rPr sz="1400">
-                <a:solidFill>
-                  <a:srgbClr val="555555"/>
-                </a:solidFill>
-              </a:rPr>
-              <a:t>    - FSDP defaults: no forward_prefetch, no bucket tuning → strict serial gather</a:t>
-            </a:r>
-          </a:p>
-          <a:p>
-            <a:pPr lvl="1">
-              <a:spcAft>
-                <a:spcPts val="400"/>
-              </a:spcAft>
-            </a:pPr>
-            <a:r>
-              <a:rPr sz="1400">
-                <a:solidFill>
-                  <a:srgbClr val="555555"/>
-                </a:solidFill>
-              </a:rPr>
-              <a:t>    - FSDP gathers per transformer block (~430 MB), DeepSpeed by 50 MB buckets</a:t>
-            </a:r>
-          </a:p>
-          <a:p>
-            <a:pPr>
-              <a:spcAft>
-                <a:spcPts val="400"/>
-              </a:spcAft>
-            </a:pPr>
-            <a:r>
-              <a:rPr sz="1600">
-                <a:solidFill>
-                  <a:srgbClr val="101010"/>
-                </a:solidFill>
-              </a:rPr>
-              <a:t>- Same fundamental wall: 1 Gbps Ethernet AllGather of bf16 weights every layer.</a:t>
+              <a:t>    –  Same algorithm, different async behavior — the difference is real on a slow link.</a:t>
             </a:r>
           </a:p>
         </p:txBody>
@@ -6117,8 +5592,8 @@
         </p:blipFill>
         <p:spPr>
           <a:xfrm>
-            <a:off x="6400800" y="1371600"/>
-            <a:ext cx="5120640" cy="3200400"/>
+            <a:off x="6766560" y="1828800"/>
+            <a:ext cx="4937760" cy="3086100"/>
           </a:xfrm>
           <a:prstGeom prst="rect">
             <a:avLst/>
@@ -6151,8 +5626,8 @@
         </p:nvSpPr>
         <p:spPr>
           <a:xfrm>
-            <a:off x="457200" y="2926080"/>
-            <a:ext cx="11247120" cy="1097280"/>
+            <a:off x="548640" y="2834640"/>
+            <a:ext cx="11064240" cy="1280160"/>
           </a:xfrm>
           <a:prstGeom prst="rect">
             <a:avLst/>
@@ -6167,12 +5642,12 @@
           <a:p>
             <a:pPr algn="ctr"/>
             <a:r>
-              <a:rPr sz="4800" b="0">
-                <a:solidFill>
-                  <a:srgbClr val="101010"/>
-                </a:solidFill>
-              </a:rPr>
-              <a:t>Cross-method comparison</a:t>
+              <a:rPr sz="5400" b="0">
+                <a:solidFill>
+                  <a:srgbClr val="101010"/>
+                </a:solidFill>
+              </a:rPr>
+              <a:t>Putting it all together</a:t>
             </a:r>
           </a:p>
         </p:txBody>
@@ -6203,8 +5678,8 @@
         </p:nvSpPr>
         <p:spPr>
           <a:xfrm>
-            <a:off x="457200" y="320040"/>
-            <a:ext cx="11247120" cy="822960"/>
+            <a:off x="548640" y="365760"/>
+            <a:ext cx="11064240" cy="822960"/>
           </a:xfrm>
           <a:prstGeom prst="rect">
             <a:avLst/>
@@ -6219,12 +5694,12 @@
           <a:p>
             <a:pPr algn="l"/>
             <a:r>
-              <a:rPr sz="3600" b="0">
-                <a:solidFill>
-                  <a:srgbClr val="101010"/>
-                </a:solidFill>
-              </a:rPr>
-              <a:t>Throughput — samples/sec (log scale)</a:t>
+              <a:rPr sz="3400" b="1">
+                <a:solidFill>
+                  <a:srgbClr val="101010"/>
+                </a:solidFill>
+              </a:rPr>
+              <a:t>Throughput by method</a:t>
             </a:r>
           </a:p>
         </p:txBody>
@@ -6237,8 +5712,8 @@
         </p:nvSpPr>
         <p:spPr>
           <a:xfrm>
-            <a:off x="457200" y="1280160"/>
-            <a:ext cx="4572000" cy="5303520"/>
+            <a:off x="548640" y="1051560"/>
+            <a:ext cx="11064240" cy="365760"/>
           </a:xfrm>
           <a:prstGeom prst="rect">
             <a:avLst/>
@@ -6246,98 +5721,18 @@
           <a:noFill/>
         </p:spPr>
         <p:txBody>
-          <a:bodyPr wrap="square">
+          <a:bodyPr wrap="none">
             <a:spAutoFit/>
           </a:bodyPr>
           <a:lstStyle/>
           <a:p>
-            <a:pPr>
-              <a:spcAft>
-                <a:spcPts val="400"/>
-              </a:spcAft>
-            </a:pPr>
-            <a:r>
-              <a:rPr sz="1600">
-                <a:solidFill>
-                  <a:srgbClr val="101010"/>
-                </a:solidFill>
-              </a:rPr>
-              <a:t>- ZeRO-2: 2.85 sps — only method beating DDP</a:t>
-            </a:r>
-          </a:p>
-          <a:p>
-            <a:pPr>
-              <a:spcAft>
-                <a:spcPts val="400"/>
-              </a:spcAft>
-            </a:pPr>
-            <a:r>
-              <a:rPr sz="1600">
-                <a:solidFill>
-                  <a:srgbClr val="101010"/>
-                </a:solidFill>
-              </a:rPr>
-              <a:t>- DDP:    2.22 sps — naïve baseline</a:t>
-            </a:r>
-          </a:p>
-          <a:p>
-            <a:pPr>
-              <a:spcAft>
-                <a:spcPts val="400"/>
-              </a:spcAft>
-            </a:pPr>
-            <a:r>
-              <a:rPr sz="1600">
-                <a:solidFill>
-                  <a:srgbClr val="101010"/>
-                </a:solidFill>
-              </a:rPr>
-              <a:t>- Pipeline: 2.31 sps — barely above DDP</a:t>
-            </a:r>
-          </a:p>
-          <a:p>
-            <a:pPr>
-              <a:spcAft>
-                <a:spcPts val="400"/>
-              </a:spcAft>
-            </a:pPr>
-            <a:r>
-              <a:rPr sz="1600">
-                <a:solidFill>
-                  <a:srgbClr val="101010"/>
-                </a:solidFill>
-              </a:rPr>
-              <a:t>- 1-GPU LoRA: 1.74 sps — surprisingly close to multi-GPU at batch 1</a:t>
-            </a:r>
-          </a:p>
-          <a:p>
-            <a:pPr>
-              <a:spcAft>
-                <a:spcPts val="400"/>
-              </a:spcAft>
-            </a:pPr>
-            <a:r>
-              <a:rPr sz="1600">
-                <a:solidFill>
-                  <a:srgbClr val="101010"/>
-                </a:solidFill>
-              </a:rPr>
-              <a:t>- ZeRO-3: 0.17 sps — 13× slower (timed out)</a:t>
-            </a:r>
-          </a:p>
-          <a:p>
-            <a:pPr>
-              <a:spcAft>
-                <a:spcPts val="400"/>
-              </a:spcAft>
-            </a:pPr>
-            <a:r>
-              <a:rPr sz="1600">
-                <a:solidFill>
-                  <a:srgbClr val="101010"/>
-                </a:solidFill>
-              </a:rPr>
-              <a:t>- FSDP:   0.095 sps — 22× slower (stopped early)</a:t>
+            <a:r>
+              <a:rPr sz="1800" i="1">
+                <a:solidFill>
+                  <a:srgbClr val="555555"/>
+                </a:solidFill>
+              </a:rPr>
+              <a:t>ZeRO-2 wins. ZeRO-3 and FSDP collapse on the cross-node link.</a:t>
             </a:r>
           </a:p>
         </p:txBody>
@@ -6358,8 +5753,8 @@
         </p:blipFill>
         <p:spPr>
           <a:xfrm>
-            <a:off x="6400800" y="1280160"/>
-            <a:ext cx="6400800" cy="3600450"/>
+            <a:off x="2208276" y="1371600"/>
+            <a:ext cx="7772400" cy="5181600"/>
           </a:xfrm>
           <a:prstGeom prst="rect">
             <a:avLst/>
@@ -6392,8 +5787,8 @@
         </p:nvSpPr>
         <p:spPr>
           <a:xfrm>
-            <a:off x="457200" y="320040"/>
-            <a:ext cx="11247120" cy="822960"/>
+            <a:off x="548640" y="365760"/>
+            <a:ext cx="11064240" cy="822960"/>
           </a:xfrm>
           <a:prstGeom prst="rect">
             <a:avLst/>
@@ -6408,12 +5803,12 @@
           <a:p>
             <a:pPr algn="l"/>
             <a:r>
-              <a:rPr sz="3600" b="0">
-                <a:solidFill>
-                  <a:srgbClr val="101010"/>
-                </a:solidFill>
-              </a:rPr>
-              <a:t>Speedup vs DDP baseline</a:t>
+              <a:rPr sz="3400" b="1">
+                <a:solidFill>
+                  <a:srgbClr val="101010"/>
+                </a:solidFill>
+              </a:rPr>
+              <a:t>Speedup vs DDP</a:t>
             </a:r>
           </a:p>
         </p:txBody>
@@ -6426,8 +5821,8 @@
         </p:nvSpPr>
         <p:spPr>
           <a:xfrm>
-            <a:off x="457200" y="1280160"/>
-            <a:ext cx="4572000" cy="5303520"/>
+            <a:off x="548640" y="1051560"/>
+            <a:ext cx="11064240" cy="365760"/>
           </a:xfrm>
           <a:prstGeom prst="rect">
             <a:avLst/>
@@ -6435,128 +5830,18 @@
           <a:noFill/>
         </p:spPr>
         <p:txBody>
-          <a:bodyPr wrap="square">
+          <a:bodyPr wrap="none">
             <a:spAutoFit/>
           </a:bodyPr>
           <a:lstStyle/>
           <a:p>
-            <a:pPr>
-              <a:spcAft>
-                <a:spcPts val="400"/>
-              </a:spcAft>
-            </a:pPr>
-            <a:r>
-              <a:rPr sz="1600">
-                <a:solidFill>
-                  <a:srgbClr val="101010"/>
-                </a:solidFill>
-              </a:rPr>
-              <a:t>- DDP = 1.00× by definition</a:t>
-            </a:r>
-          </a:p>
-          <a:p>
-            <a:pPr>
-              <a:spcAft>
-                <a:spcPts val="400"/>
-              </a:spcAft>
-            </a:pPr>
-            <a:r>
-              <a:rPr sz="1600">
-                <a:solidFill>
-                  <a:srgbClr val="101010"/>
-                </a:solidFill>
-              </a:rPr>
-              <a:t>- ZeRO-2: 1.28× — only winner</a:t>
-            </a:r>
-          </a:p>
-          <a:p>
-            <a:pPr>
-              <a:spcAft>
-                <a:spcPts val="400"/>
-              </a:spcAft>
-            </a:pPr>
-            <a:r>
-              <a:rPr sz="1600">
-                <a:solidFill>
-                  <a:srgbClr val="101010"/>
-                </a:solidFill>
-              </a:rPr>
-              <a:t>- Pipeline: 1.04× — basically tied with DDP</a:t>
-            </a:r>
-          </a:p>
-          <a:p>
-            <a:pPr>
-              <a:spcAft>
-                <a:spcPts val="400"/>
-              </a:spcAft>
-            </a:pPr>
-            <a:r>
-              <a:rPr sz="1600">
-                <a:solidFill>
-                  <a:srgbClr val="101010"/>
-                </a:solidFill>
-              </a:rPr>
-              <a:t>- 1-GPU LoRA: 0.78× — naïve scaling reference</a:t>
-            </a:r>
-          </a:p>
-          <a:p>
-            <a:pPr>
-              <a:spcAft>
-                <a:spcPts val="400"/>
-              </a:spcAft>
-            </a:pPr>
-            <a:r>
-              <a:rPr sz="1600">
-                <a:solidFill>
-                  <a:srgbClr val="101010"/>
-                </a:solidFill>
-              </a:rPr>
-              <a:t>- ZeRO-3: 0.08× — 13× regression</a:t>
-            </a:r>
-          </a:p>
-          <a:p>
-            <a:pPr>
-              <a:spcAft>
-                <a:spcPts val="400"/>
-              </a:spcAft>
-            </a:pPr>
-            <a:r>
-              <a:rPr sz="1600">
-                <a:solidFill>
-                  <a:srgbClr val="101010"/>
-                </a:solidFill>
-              </a:rPr>
-              <a:t>- FSDP: 0.04× — 22× regression</a:t>
-            </a:r>
-          </a:p>
-          <a:p>
-            <a:pPr>
-              <a:spcAft>
-                <a:spcPts val="400"/>
-              </a:spcAft>
-            </a:pPr>
-            <a:r>
-              <a:rPr sz="1600">
-                <a:solidFill>
-                  <a:srgbClr val="101010"/>
-                </a:solidFill>
-              </a:rPr>
-              <a:t>- Pattern: DP variants that don't shard params win;</a:t>
-            </a:r>
-          </a:p>
-          <a:p>
-            <a:pPr lvl="1">
-              <a:spcAft>
-                <a:spcPts val="400"/>
-              </a:spcAft>
-            </a:pPr>
-            <a:r>
-              <a:rPr sz="1400">
+            <a:r>
+              <a:rPr sz="1800" i="1">
                 <a:solidFill>
                   <a:srgbClr val="555555"/>
                 </a:solidFill>
               </a:rPr>
-              <a:t>    - methods that shard params lose to Ethernet overhead</a:t>
+              <a:t>Only ZeRO-2 actually beats the naïve baseline.</a:t>
             </a:r>
           </a:p>
         </p:txBody>
@@ -6577,8 +5862,8 @@
         </p:blipFill>
         <p:spPr>
           <a:xfrm>
-            <a:off x="6400800" y="1280160"/>
-            <a:ext cx="6400800" cy="3600450"/>
+            <a:off x="2208276" y="1371600"/>
+            <a:ext cx="7772400" cy="5181600"/>
           </a:xfrm>
           <a:prstGeom prst="rect">
             <a:avLst/>
@@ -6611,8 +5896,8 @@
         </p:nvSpPr>
         <p:spPr>
           <a:xfrm>
-            <a:off x="457200" y="320040"/>
-            <a:ext cx="11247120" cy="822960"/>
+            <a:off x="548640" y="365760"/>
+            <a:ext cx="11064240" cy="822960"/>
           </a:xfrm>
           <a:prstGeom prst="rect">
             <a:avLst/>
@@ -6627,7 +5912,7 @@
           <a:p>
             <a:pPr algn="l"/>
             <a:r>
-              <a:rPr sz="3600" b="0">
+              <a:rPr sz="3400" b="1">
                 <a:solidFill>
                   <a:srgbClr val="101010"/>
                 </a:solidFill>
@@ -6645,8 +5930,8 @@
         </p:nvSpPr>
         <p:spPr>
           <a:xfrm>
-            <a:off x="457200" y="1280160"/>
-            <a:ext cx="4572000" cy="5303520"/>
+            <a:off x="548640" y="1051560"/>
+            <a:ext cx="11064240" cy="365760"/>
           </a:xfrm>
           <a:prstGeom prst="rect">
             <a:avLst/>
@@ -6654,113 +5939,18 @@
           <a:noFill/>
         </p:spPr>
         <p:txBody>
-          <a:bodyPr wrap="square">
+          <a:bodyPr wrap="none">
             <a:spAutoFit/>
           </a:bodyPr>
           <a:lstStyle/>
           <a:p>
-            <a:pPr>
-              <a:spcAft>
-                <a:spcPts val="400"/>
-              </a:spcAft>
-            </a:pPr>
-            <a:r>
-              <a:rPr sz="1600">
-                <a:solidFill>
-                  <a:srgbClr val="101010"/>
-                </a:solidFill>
-              </a:rPr>
-              <a:t>- 32 GiB hardware limit (RTX 5000 Ada)</a:t>
-            </a:r>
-          </a:p>
-          <a:p>
-            <a:pPr>
-              <a:spcAft>
-                <a:spcPts val="400"/>
-              </a:spcAft>
-            </a:pPr>
-            <a:r>
-              <a:rPr sz="1600">
-                <a:solidFill>
-                  <a:srgbClr val="101010"/>
-                </a:solidFill>
-              </a:rPr>
-              <a:t>- ZeRO-2: 27.6 GiB — best of the multi-GPU methods</a:t>
-            </a:r>
-          </a:p>
-          <a:p>
-            <a:pPr>
-              <a:spcAft>
-                <a:spcPts val="400"/>
-              </a:spcAft>
-            </a:pPr>
-            <a:r>
-              <a:rPr sz="1600">
-                <a:solidFill>
-                  <a:srgbClr val="101010"/>
-                </a:solidFill>
-              </a:rPr>
-              <a:t>- DDP: 30.7 GiB</a:t>
-            </a:r>
-          </a:p>
-          <a:p>
-            <a:pPr>
-              <a:spcAft>
-                <a:spcPts val="400"/>
-              </a:spcAft>
-            </a:pPr>
-            <a:r>
-              <a:rPr sz="1600">
-                <a:solidFill>
-                  <a:srgbClr val="101010"/>
-                </a:solidFill>
-              </a:rPr>
-              <a:t>- Pipeline (k=12): 31.4 GiB — heavier rank near the limit</a:t>
-            </a:r>
-          </a:p>
-          <a:p>
-            <a:pPr>
-              <a:spcAft>
-                <a:spcPts val="400"/>
-              </a:spcAft>
-            </a:pPr>
-            <a:r>
-              <a:rPr sz="1600">
-                <a:solidFill>
-                  <a:srgbClr val="101010"/>
-                </a:solidFill>
-              </a:rPr>
-              <a:t>- FSDP: 32.3 GiB — saturated; FlatParameter overhead</a:t>
-            </a:r>
-          </a:p>
-          <a:p>
-            <a:pPr>
-              <a:spcAft>
-                <a:spcPts val="400"/>
-              </a:spcAft>
-            </a:pPr>
-            <a:r>
-              <a:rPr sz="1600">
-                <a:solidFill>
-                  <a:srgbClr val="101010"/>
-                </a:solidFill>
-              </a:rPr>
-              <a:t>- ZeRO-3: 22.0 GiB — actual sharding visible (but at huge speed cost)</a:t>
-            </a:r>
-          </a:p>
-          <a:p>
-            <a:pPr>
-              <a:spcAft>
-                <a:spcPts val="400"/>
-              </a:spcAft>
-            </a:pPr>
-            <a:r>
-              <a:rPr sz="1600">
-                <a:solidFill>
-                  <a:srgbClr val="101010"/>
-                </a:solidFill>
-              </a:rPr>
-              <a:t>- 1-GPU LoRA: 25.7 GiB — fits comfortably without parallelism</a:t>
+            <a:r>
+              <a:rPr sz="1800" i="1">
+                <a:solidFill>
+                  <a:srgbClr val="555555"/>
+                </a:solidFill>
+              </a:rPr>
+              <a:t>ZeRO-3 shards the most, FSDP saturates the card. ZeRO-2 hits a sweet spot.</a:t>
             </a:r>
           </a:p>
         </p:txBody>
@@ -6781,8 +5971,8 @@
         </p:blipFill>
         <p:spPr>
           <a:xfrm>
-            <a:off x="6400800" y="1280160"/>
-            <a:ext cx="6400800" cy="3600450"/>
+            <a:off x="2208276" y="1371600"/>
+            <a:ext cx="7772400" cy="5181600"/>
           </a:xfrm>
           <a:prstGeom prst="rect">
             <a:avLst/>
@@ -6815,8 +6005,8 @@
         </p:nvSpPr>
         <p:spPr>
           <a:xfrm>
-            <a:off x="457200" y="320040"/>
-            <a:ext cx="11247120" cy="822960"/>
+            <a:off x="548640" y="365760"/>
+            <a:ext cx="11064240" cy="822960"/>
           </a:xfrm>
           <a:prstGeom prst="rect">
             <a:avLst/>
@@ -6831,12 +6021,12 @@
           <a:p>
             <a:pPr algn="l"/>
             <a:r>
-              <a:rPr sz="3600" b="0">
-                <a:solidFill>
-                  <a:srgbClr val="101010"/>
-                </a:solidFill>
-              </a:rPr>
-              <a:t>Goodput — useful learning per cost</a:t>
+              <a:rPr sz="3400" b="1">
+                <a:solidFill>
+                  <a:srgbClr val="101010"/>
+                </a:solidFill>
+              </a:rPr>
+              <a:t>Goodput — loss reduction per second</a:t>
             </a:r>
           </a:p>
         </p:txBody>
@@ -6849,8 +6039,8 @@
         </p:nvSpPr>
         <p:spPr>
           <a:xfrm>
-            <a:off x="457200" y="1280160"/>
-            <a:ext cx="4572000" cy="5303520"/>
+            <a:off x="548640" y="1051560"/>
+            <a:ext cx="11064240" cy="365760"/>
           </a:xfrm>
           <a:prstGeom prst="rect">
             <a:avLst/>
@@ -6858,180 +6048,25 @@
           <a:noFill/>
         </p:spPr>
         <p:txBody>
-          <a:bodyPr wrap="square">
+          <a:bodyPr wrap="none">
             <a:spAutoFit/>
           </a:bodyPr>
           <a:lstStyle/>
           <a:p>
-            <a:pPr>
-              <a:spcAft>
-                <a:spcPts val="400"/>
-              </a:spcAft>
-            </a:pPr>
-            <a:r>
-              <a:rPr sz="1600">
-                <a:solidFill>
-                  <a:srgbClr val="101010"/>
-                </a:solidFill>
-              </a:rPr>
-              <a:t>- Loss reduction per wall-clock second:</a:t>
-            </a:r>
-          </a:p>
-          <a:p>
-            <a:pPr lvl="1">
-              <a:spcAft>
-                <a:spcPts val="400"/>
-              </a:spcAft>
-            </a:pPr>
-            <a:r>
-              <a:rPr sz="1400">
+            <a:r>
+              <a:rPr sz="1800" i="1">
                 <a:solidFill>
                   <a:srgbClr val="555555"/>
                 </a:solidFill>
               </a:rPr>
-              <a:t>    - ZeRO-2: 0.000372  ← best</a:t>
-            </a:r>
-          </a:p>
-          <a:p>
-            <a:pPr lvl="1">
-              <a:spcAft>
-                <a:spcPts val="400"/>
-              </a:spcAft>
-            </a:pPr>
-            <a:r>
-              <a:rPr sz="1400">
-                <a:solidFill>
-                  <a:srgbClr val="555555"/>
-                </a:solidFill>
-              </a:rPr>
-              <a:t>    - DDP: 0.000313</a:t>
-            </a:r>
-          </a:p>
-          <a:p>
-            <a:pPr lvl="1">
-              <a:spcAft>
-                <a:spcPts val="400"/>
-              </a:spcAft>
-            </a:pPr>
-            <a:r>
-              <a:rPr sz="1400">
-                <a:solidFill>
-                  <a:srgbClr val="555555"/>
-                </a:solidFill>
-              </a:rPr>
-              <a:t>    - ZeRO-3: 0.000294 (still positive — converging, just slowly)</a:t>
-            </a:r>
-          </a:p>
-          <a:p>
-            <a:pPr lvl="1">
-              <a:spcAft>
-                <a:spcPts val="400"/>
-              </a:spcAft>
-            </a:pPr>
-            <a:r>
-              <a:rPr sz="1400">
-                <a:solidFill>
-                  <a:srgbClr val="555555"/>
-                </a:solidFill>
-              </a:rPr>
-              <a:t>    - Pipeline: 0.000239</a:t>
-            </a:r>
-          </a:p>
-          <a:p>
-            <a:pPr lvl="1">
-              <a:spcAft>
-                <a:spcPts val="400"/>
-              </a:spcAft>
-            </a:pPr>
-            <a:r>
-              <a:rPr sz="1400">
-                <a:solidFill>
-                  <a:srgbClr val="555555"/>
-                </a:solidFill>
-              </a:rPr>
-              <a:t>    - FSDP: −0.000056 (only 28 steps; started from already-tuned ckpt)</a:t>
-            </a:r>
-          </a:p>
-          <a:p>
-            <a:pPr>
-              <a:spcAft>
-                <a:spcPts val="400"/>
-              </a:spcAft>
-            </a:pPr>
-            <a:r>
-              <a:rPr sz="1600">
-                <a:solidFill>
-                  <a:srgbClr val="101010"/>
-                </a:solidFill>
-              </a:rPr>
-              <a:t>- Loss reduction per training sample (statistical efficiency):</a:t>
-            </a:r>
-          </a:p>
-          <a:p>
-            <a:pPr lvl="1">
-              <a:spcAft>
-                <a:spcPts val="400"/>
-              </a:spcAft>
-            </a:pPr>
-            <a:r>
-              <a:rPr sz="1400">
-                <a:solidFill>
-                  <a:srgbClr val="555555"/>
-                </a:solidFill>
-              </a:rPr>
-              <a:t>    - DDP: 0.0045 ← best per-sample (effective batch 32)</a:t>
-            </a:r>
-          </a:p>
-          <a:p>
-            <a:pPr lvl="1">
-              <a:spcAft>
-                <a:spcPts val="400"/>
-              </a:spcAft>
-            </a:pPr>
-            <a:r>
-              <a:rPr sz="1400">
-                <a:solidFill>
-                  <a:srgbClr val="555555"/>
-                </a:solidFill>
-              </a:rPr>
-              <a:t>    - ZeRO-2: 0.0042 (also batch 32)</a:t>
-            </a:r>
-          </a:p>
-          <a:p>
-            <a:pPr lvl="1">
-              <a:spcAft>
-                <a:spcPts val="400"/>
-              </a:spcAft>
-            </a:pPr>
-            <a:r>
-              <a:rPr sz="1400">
-                <a:solidFill>
-                  <a:srgbClr val="555555"/>
-                </a:solidFill>
-              </a:rPr>
-              <a:t>    - ZeRO-3 / Pipeline: ~0.0017 (smaller effective batch hurts)</a:t>
-            </a:r>
-          </a:p>
-          <a:p>
-            <a:pPr>
-              <a:spcAft>
-                <a:spcPts val="400"/>
-              </a:spcAft>
-            </a:pPr>
-            <a:r>
-              <a:rPr sz="1600">
-                <a:solidFill>
-                  <a:srgbClr val="101010"/>
-                </a:solidFill>
-              </a:rPr>
-              <a:t>- Wall-clock goodput tracks what slides actually want.</a:t>
+              <a:t>What you get back from each second of GPU time.</a:t>
             </a:r>
           </a:p>
         </p:txBody>
       </p:sp>
       <p:pic>
         <p:nvPicPr>
-          <p:cNvPr id="4" name="Picture 3" descr="9_goodput.png"/>
+          <p:cNvPr id="4" name="Picture 3" descr="9a_goodput_per_sec.png"/>
           <p:cNvPicPr>
             <a:picLocks noChangeAspect="1"/>
           </p:cNvPicPr>
@@ -7045,8 +6080,8 @@
         </p:blipFill>
         <p:spPr>
           <a:xfrm>
-            <a:off x="6400800" y="1463040"/>
-            <a:ext cx="6400800" cy="2057400"/>
+            <a:off x="2208276" y="1371600"/>
+            <a:ext cx="7772400" cy="5181600"/>
           </a:xfrm>
           <a:prstGeom prst="rect">
             <a:avLst/>
@@ -7079,8 +6114,8 @@
         </p:nvSpPr>
         <p:spPr>
           <a:xfrm>
-            <a:off x="457200" y="320040"/>
-            <a:ext cx="11247120" cy="822960"/>
+            <a:off x="548640" y="365760"/>
+            <a:ext cx="11064240" cy="822960"/>
           </a:xfrm>
           <a:prstGeom prst="rect">
             <a:avLst/>
@@ -7095,12 +6130,12 @@
           <a:p>
             <a:pPr algn="l"/>
             <a:r>
-              <a:rPr sz="3600" b="0">
-                <a:solidFill>
-                  <a:srgbClr val="101010"/>
-                </a:solidFill>
-              </a:rPr>
-              <a:t>Loss vs step (smoothed)</a:t>
+              <a:rPr sz="3400" b="1">
+                <a:solidFill>
+                  <a:srgbClr val="101010"/>
+                </a:solidFill>
+              </a:rPr>
+              <a:t>Statistical efficiency</a:t>
             </a:r>
           </a:p>
         </p:txBody>
@@ -7113,8 +6148,8 @@
         </p:nvSpPr>
         <p:spPr>
           <a:xfrm>
-            <a:off x="457200" y="1280160"/>
-            <a:ext cx="4572000" cy="5303520"/>
+            <a:off x="548640" y="1051560"/>
+            <a:ext cx="11064240" cy="365760"/>
           </a:xfrm>
           <a:prstGeom prst="rect">
             <a:avLst/>
@@ -7122,120 +6157,25 @@
           <a:noFill/>
         </p:spPr>
         <p:txBody>
-          <a:bodyPr wrap="square">
+          <a:bodyPr wrap="none">
             <a:spAutoFit/>
           </a:bodyPr>
           <a:lstStyle/>
           <a:p>
-            <a:pPr>
-              <a:spcAft>
-                <a:spcPts val="400"/>
-              </a:spcAft>
-            </a:pPr>
-            <a:r>
-              <a:rPr sz="1600">
-                <a:solidFill>
-                  <a:srgbClr val="101010"/>
-                </a:solidFill>
-              </a:rPr>
-              <a:t>- 1-GPU LoRA: gray, 10000 steps, slowly converging to ~1.0</a:t>
-            </a:r>
-          </a:p>
-          <a:p>
-            <a:pPr>
-              <a:spcAft>
-                <a:spcPts val="400"/>
-              </a:spcAft>
-            </a:pPr>
-            <a:r>
-              <a:rPr sz="1600">
-                <a:solidFill>
-                  <a:srgbClr val="101010"/>
-                </a:solidFill>
-              </a:rPr>
-              <a:t>- DDP / ZeRO-2: ~313 steps each, converge to ~1.04 / 1.11</a:t>
-            </a:r>
-          </a:p>
-          <a:p>
-            <a:pPr>
-              <a:spcAft>
-                <a:spcPts val="400"/>
-              </a:spcAft>
-            </a:pPr>
-            <a:r>
-              <a:rPr sz="1600">
-                <a:solidFill>
-                  <a:srgbClr val="101010"/>
-                </a:solidFill>
-              </a:rPr>
-              <a:t>- Pipeline: 625 steps, slightly higher final loss (smaller batch)</a:t>
-            </a:r>
-          </a:p>
-          <a:p>
-            <a:pPr>
-              <a:spcAft>
-                <a:spcPts val="400"/>
-              </a:spcAft>
-            </a:pPr>
-            <a:r>
-              <a:rPr sz="1600">
-                <a:solidFill>
-                  <a:srgbClr val="101010"/>
-                </a:solidFill>
-              </a:rPr>
-              <a:t>- ZeRO-3: dashed red, only 292 steps reached, last loss 1.31</a:t>
-            </a:r>
-          </a:p>
-          <a:p>
-            <a:pPr>
-              <a:spcAft>
-                <a:spcPts val="400"/>
-              </a:spcAft>
-            </a:pPr>
-            <a:r>
-              <a:rPr sz="1600">
-                <a:solidFill>
-                  <a:srgbClr val="101010"/>
-                </a:solidFill>
-              </a:rPr>
-              <a:t>- FSDP: dashed purple, 28 steps, started from pretrained ckpt</a:t>
-            </a:r>
-          </a:p>
-          <a:p>
-            <a:pPr>
-              <a:spcAft>
-                <a:spcPts val="400"/>
-              </a:spcAft>
-            </a:pPr>
-            <a:r>
-              <a:rPr sz="1600">
-                <a:solidFill>
-                  <a:srgbClr val="101010"/>
-                </a:solidFill>
-              </a:rPr>
-              <a:t>- All methods that completed reach comparable loss</a:t>
-            </a:r>
-          </a:p>
-          <a:p>
-            <a:pPr lvl="1">
-              <a:spcAft>
-                <a:spcPts val="400"/>
-              </a:spcAft>
-            </a:pPr>
-            <a:r>
-              <a:rPr sz="1400">
+            <a:r>
+              <a:rPr sz="1800" i="1">
                 <a:solidFill>
                   <a:srgbClr val="555555"/>
                 </a:solidFill>
               </a:rPr>
-              <a:t>    - Statistical efficiency is similar; differences are wall-clock</a:t>
+              <a:t>Loss reduction per training sample. Larger effective batches converge faster per sample.</a:t>
             </a:r>
           </a:p>
         </p:txBody>
       </p:sp>
       <p:pic>
         <p:nvPicPr>
-          <p:cNvPr id="4" name="Picture 3" descr="6_loss_vs_step.png"/>
+          <p:cNvPr id="4" name="Picture 3" descr="9b_goodput_per_sample.png"/>
           <p:cNvPicPr>
             <a:picLocks noChangeAspect="1"/>
           </p:cNvPicPr>
@@ -7249,8 +6189,8 @@
         </p:blipFill>
         <p:spPr>
           <a:xfrm>
-            <a:off x="6400800" y="1280160"/>
-            <a:ext cx="6400800" cy="3556000"/>
+            <a:off x="2208276" y="1371600"/>
+            <a:ext cx="7772400" cy="5181600"/>
           </a:xfrm>
           <a:prstGeom prst="rect">
             <a:avLst/>
@@ -7283,8 +6223,8 @@
         </p:nvSpPr>
         <p:spPr>
           <a:xfrm>
-            <a:off x="457200" y="320040"/>
-            <a:ext cx="11247120" cy="822960"/>
+            <a:off x="548640" y="365760"/>
+            <a:ext cx="11064240" cy="822960"/>
           </a:xfrm>
           <a:prstGeom prst="rect">
             <a:avLst/>
@@ -7299,12 +6239,12 @@
           <a:p>
             <a:pPr algn="l"/>
             <a:r>
-              <a:rPr sz="3600" b="0">
-                <a:solidFill>
-                  <a:srgbClr val="101010"/>
-                </a:solidFill>
-              </a:rPr>
-              <a:t>Key findings</a:t>
+              <a:rPr sz="3400" b="1">
+                <a:solidFill>
+                  <a:srgbClr val="101010"/>
+                </a:solidFill>
+              </a:rPr>
+              <a:t>Loss vs step (smoothed)</a:t>
             </a:r>
           </a:p>
         </p:txBody>
@@ -7317,8 +6257,8 @@
         </p:nvSpPr>
         <p:spPr>
           <a:xfrm>
-            <a:off x="457200" y="1280160"/>
-            <a:ext cx="11247120" cy="5303520"/>
+            <a:off x="548640" y="1051560"/>
+            <a:ext cx="11064240" cy="365760"/>
           </a:xfrm>
           <a:prstGeom prst="rect">
             <a:avLst/>
@@ -7326,207 +6266,46 @@
           <a:noFill/>
         </p:spPr>
         <p:txBody>
-          <a:bodyPr wrap="square">
+          <a:bodyPr wrap="none">
             <a:spAutoFit/>
           </a:bodyPr>
           <a:lstStyle/>
           <a:p>
-            <a:pPr>
-              <a:spcAft>
-                <a:spcPts val="400"/>
-              </a:spcAft>
-            </a:pPr>
-            <a:r>
-              <a:rPr sz="1600">
-                <a:solidFill>
-                  <a:srgbClr val="101010"/>
-                </a:solidFill>
-              </a:rPr>
-              <a:t>- On 1 Gbps Ethernet with a 7B-LoRA workload:</a:t>
-            </a:r>
-          </a:p>
-          <a:p>
-            <a:pPr>
-              <a:spcAft>
-                <a:spcPts val="400"/>
-              </a:spcAft>
-            </a:pPr>
-            <a:r>
-              <a:rPr sz="1600">
-                <a:solidFill>
-                  <a:srgbClr val="101010"/>
-                </a:solidFill>
-              </a:rPr>
-              <a:t>- 1. ZeRO-2 wins (1.28×) — sharding optimizer + grads, not params, is the sweet spot.</a:t>
-            </a:r>
-          </a:p>
-          <a:p>
-            <a:pPr lvl="1">
-              <a:spcAft>
-                <a:spcPts val="400"/>
-              </a:spcAft>
-            </a:pPr>
-            <a:r>
-              <a:rPr sz="1400">
+            <a:r>
+              <a:rPr sz="1800" i="1">
                 <a:solidFill>
                   <a:srgbClr val="555555"/>
                 </a:solidFill>
               </a:rPr>
-              <a:t>    - LoRA already shrinks the gradient AllReduce → DDP's overhead is the bottleneck.</a:t>
-            </a:r>
-          </a:p>
-          <a:p>
-            <a:pPr lvl="1">
-              <a:spcAft>
-                <a:spcPts val="400"/>
-              </a:spcAft>
-            </a:pPr>
-            <a:r>
-              <a:rPr sz="1400">
-                <a:solidFill>
-                  <a:srgbClr val="555555"/>
-                </a:solidFill>
-              </a:rPr>
-              <a:t>    - DeepSpeed's bucketed async overlap fills the gap better than vanilla DDP.</a:t>
-            </a:r>
-          </a:p>
-          <a:p>
-            <a:pPr>
-              <a:spcAft>
-                <a:spcPts val="400"/>
-              </a:spcAft>
-            </a:pPr>
-            <a:r>
-              <a:rPr sz="1600">
-                <a:solidFill>
-                  <a:srgbClr val="101010"/>
-                </a:solidFill>
-              </a:rPr>
-              <a:t>- 2. Pipeline parallelism (1.04×) makes the model fit but doesn't speed things up.</a:t>
-            </a:r>
-          </a:p>
-          <a:p>
-            <a:pPr lvl="1">
-              <a:spcAft>
-                <a:spcPts val="400"/>
-              </a:spcAft>
-            </a:pPr>
-            <a:r>
-              <a:rPr sz="1400">
-                <a:solidFill>
-                  <a:srgbClr val="555555"/>
-                </a:solidFill>
-              </a:rPr>
-              <a:t>    - Cross-node Gloo activation transfers are slower than DDP's AllReduce.</a:t>
-            </a:r>
-          </a:p>
-          <a:p>
-            <a:pPr lvl="1">
-              <a:spcAft>
-                <a:spcPts val="400"/>
-              </a:spcAft>
-            </a:pPr>
-            <a:r>
-              <a:rPr sz="1400">
-                <a:solidFill>
-                  <a:srgbClr val="555555"/>
-                </a:solidFill>
-              </a:rPr>
-              <a:t>    - Layer count is not a good proxy for memory load — split balancing is empirical.</a:t>
-            </a:r>
-          </a:p>
-          <a:p>
-            <a:pPr>
-              <a:spcAft>
-                <a:spcPts val="400"/>
-              </a:spcAft>
-            </a:pPr>
-            <a:r>
-              <a:rPr sz="1600">
-                <a:solidFill>
-                  <a:srgbClr val="101010"/>
-                </a:solidFill>
-              </a:rPr>
-              <a:t>- 3. ZeRO-3 / FSDP collapse on Ethernet (0.04×–0.08×).</a:t>
-            </a:r>
-          </a:p>
-          <a:p>
-            <a:pPr lvl="1">
-              <a:spcAft>
-                <a:spcPts val="400"/>
-              </a:spcAft>
-            </a:pPr>
-            <a:r>
-              <a:rPr sz="1400">
-                <a:solidFill>
-                  <a:srgbClr val="555555"/>
-                </a:solidFill>
-              </a:rPr>
-              <a:t>    - Per-layer AllGather of full weights every step is intractable over 1 Gbps.</a:t>
-            </a:r>
-          </a:p>
-          <a:p>
-            <a:pPr lvl="1">
-              <a:spcAft>
-                <a:spcPts val="400"/>
-              </a:spcAft>
-            </a:pPr>
-            <a:r>
-              <a:rPr sz="1400">
-                <a:solidFill>
-                  <a:srgbClr val="555555"/>
-                </a:solidFill>
-              </a:rPr>
-              <a:t>    - Implementation matters: DeepSpeed ZeRO-3 is ~1.7× faster than PyTorch FSDP</a:t>
-            </a:r>
-          </a:p>
-          <a:p>
-            <a:pPr lvl="1">
-              <a:spcAft>
-                <a:spcPts val="400"/>
-              </a:spcAft>
-            </a:pPr>
-            <a:r>
-              <a:rPr sz="1400">
-                <a:solidFill>
-                  <a:srgbClr val="555555"/>
-                </a:solidFill>
-              </a:rPr>
-              <a:t>    - because of better bucket tuning and async overlap defaults.</a:t>
-            </a:r>
-          </a:p>
-          <a:p>
-            <a:pPr>
-              <a:spcAft>
-                <a:spcPts val="400"/>
-              </a:spcAft>
-            </a:pPr>
-            <a:r>
-              <a:rPr sz="1600">
-                <a:solidFill>
-                  <a:srgbClr val="101010"/>
-                </a:solidFill>
-              </a:rPr>
-              <a:t>- 4. ZeRO-3 / FSDP would scale on InfiniBand or NVLink — wrong tool for our hardware.</a:t>
-            </a:r>
-          </a:p>
-          <a:p>
-            <a:pPr>
-              <a:spcAft>
-                <a:spcPts val="400"/>
-              </a:spcAft>
-            </a:pPr>
-            <a:r>
-              <a:rPr sz="1600">
-                <a:solidFill>
-                  <a:srgbClr val="101010"/>
-                </a:solidFill>
-              </a:rPr>
-              <a:t>- 5. LoRA training on a 7B model fits on a single RTX 5000 Ada — choose DP variants.</a:t>
-            </a:r>
-          </a:p>
-        </p:txBody>
-      </p:sp>
+              <a:t>Methods that completed all reach a similar loss. The gap is wall-clock, not statistical.</a:t>
+            </a:r>
+          </a:p>
+        </p:txBody>
+      </p:sp>
+      <p:pic>
+        <p:nvPicPr>
+          <p:cNvPr id="4" name="Picture 3" descr="6_loss_vs_step.png"/>
+          <p:cNvPicPr>
+            <a:picLocks noChangeAspect="1"/>
+          </p:cNvPicPr>
+          <p:nvPr/>
+        </p:nvPicPr>
+        <p:blipFill>
+          <a:blip r:embed="rId2"/>
+          <a:stretch>
+            <a:fillRect/>
+          </a:stretch>
+        </p:blipFill>
+        <p:spPr>
+          <a:xfrm>
+            <a:off x="1979676" y="1371600"/>
+            <a:ext cx="8229600" cy="4572000"/>
+          </a:xfrm>
+          <a:prstGeom prst="rect">
+            <a:avLst/>
+          </a:prstGeom>
+        </p:spPr>
+      </p:pic>
     </p:spTree>
   </p:cSld>
   <p:clrMapOvr>
@@ -7553,8 +6332,8 @@
         </p:nvSpPr>
         <p:spPr>
           <a:xfrm>
-            <a:off x="457200" y="320040"/>
-            <a:ext cx="11247120" cy="822960"/>
+            <a:off x="548640" y="365760"/>
+            <a:ext cx="11064240" cy="822960"/>
           </a:xfrm>
           <a:prstGeom prst="rect">
             <a:avLst/>
@@ -7569,12 +6348,12 @@
           <a:p>
             <a:pPr algn="l"/>
             <a:r>
-              <a:rPr sz="3600" b="0">
-                <a:solidFill>
-                  <a:srgbClr val="101010"/>
-                </a:solidFill>
-              </a:rPr>
-              <a:t>Lessons learned</a:t>
+              <a:rPr sz="3400" b="1">
+                <a:solidFill>
+                  <a:srgbClr val="101010"/>
+                </a:solidFill>
+              </a:rPr>
+              <a:t>What we learned</a:t>
             </a:r>
           </a:p>
         </p:txBody>
@@ -7587,8 +6366,8 @@
         </p:nvSpPr>
         <p:spPr>
           <a:xfrm>
-            <a:off x="457200" y="1280160"/>
-            <a:ext cx="11247120" cy="5303520"/>
+            <a:off x="548640" y="1371600"/>
+            <a:ext cx="11064240" cy="5120640"/>
           </a:xfrm>
           <a:prstGeom prst="rect">
             <a:avLst/>
@@ -7596,23 +6375,53 @@
           <a:noFill/>
         </p:spPr>
         <p:txBody>
-          <a:bodyPr wrap="square">
+          <a:bodyPr wrap="square" anchor="ctr">
             <a:spAutoFit/>
           </a:bodyPr>
           <a:lstStyle/>
           <a:p>
             <a:pPr>
               <a:spcAft>
+                <a:spcPts val="800"/>
+              </a:spcAft>
+            </a:pPr>
+            <a:r>
+              <a:rPr sz="2100">
+                <a:solidFill>
+                  <a:srgbClr val="101010"/>
+                </a:solidFill>
+              </a:rPr>
+              <a:t>•  ZeRO-2 is the right tool for LoRA fine-tuning on slow interconnects.</a:t>
+            </a:r>
+          </a:p>
+          <a:p>
+            <a:pPr lvl="1">
+              <a:spcAft>
                 <a:spcPts val="400"/>
               </a:spcAft>
             </a:pPr>
             <a:r>
-              <a:rPr sz="1600">
-                <a:solidFill>
-                  <a:srgbClr val="101010"/>
-                </a:solidFill>
-              </a:rPr>
-              <a:t>- Match the parallelism strategy to the bottleneck</a:t>
+              <a:rPr sz="1800">
+                <a:solidFill>
+                  <a:srgbClr val="555555"/>
+                </a:solidFill>
+              </a:rPr>
+              <a:t>    –  Sharding optimizer + grads is enough. DeepSpeed's overlap quietly does the rest.</a:t>
+            </a:r>
+          </a:p>
+          <a:p>
+            <a:pPr>
+              <a:spcAft>
+                <a:spcPts val="800"/>
+              </a:spcAft>
+            </a:pPr>
+            <a:r>
+              <a:rPr sz="2100">
+                <a:solidFill>
+                  <a:srgbClr val="101010"/>
+                </a:solidFill>
+              </a:rPr>
+              <a:t>•  Pipeline parallelism made the model fit but not faster.</a:t>
             </a:r>
           </a:p>
           <a:p>
@@ -7622,12 +6431,12 @@
               </a:spcAft>
             </a:pPr>
             <a:r>
-              <a:rPr sz="1400">
+              <a:rPr sz="1800">
                 <a:solidFill>
                   <a:srgbClr val="555555"/>
                 </a:solidFill>
               </a:rPr>
-              <a:t>    - Optimizer-state-bound? → ZeRO-2</a:t>
+              <a:t>    –  Cross-node Gloo activation transfers are slower than DDP's single AllReduce.</a:t>
             </a:r>
           </a:p>
           <a:p>
@@ -7637,12 +6446,27 @@
               </a:spcAft>
             </a:pPr>
             <a:r>
-              <a:rPr sz="1400">
+              <a:rPr sz="1800">
                 <a:solidFill>
                   <a:srgbClr val="555555"/>
                 </a:solidFill>
               </a:rPr>
-              <a:t>    - Gradient-comm-bound? → DDP with good overlap is hard to beat</a:t>
+              <a:t>    –  Layer count is a poor proxy for memory cost — the vision tower and LM head dominate.</a:t>
+            </a:r>
+          </a:p>
+          <a:p>
+            <a:pPr>
+              <a:spcAft>
+                <a:spcPts val="800"/>
+              </a:spcAft>
+            </a:pPr>
+            <a:r>
+              <a:rPr sz="2100">
+                <a:solidFill>
+                  <a:srgbClr val="101010"/>
+                </a:solidFill>
+              </a:rPr>
+              <a:t>•  ZeRO-3 and FSDP fall apart over Ethernet.</a:t>
             </a:r>
           </a:p>
           <a:p>
@@ -7652,12 +6476,12 @@
               </a:spcAft>
             </a:pPr>
             <a:r>
-              <a:rPr sz="1400">
+              <a:rPr sz="1800">
                 <a:solidFill>
                   <a:srgbClr val="555555"/>
                 </a:solidFill>
               </a:rPr>
-              <a:t>    - Activation-memory-bound (long sequence)? → Pipeline / TP, not relevant for us</a:t>
+              <a:t>    –  Per-layer AllGather of full bf16 weights is intractable on 1 Gbps.</a:t>
             </a:r>
           </a:p>
           <a:p>
@@ -7667,162 +6491,42 @@
               </a:spcAft>
             </a:pPr>
             <a:r>
-              <a:rPr sz="1400">
+              <a:rPr sz="1800">
                 <a:solidFill>
                   <a:srgbClr val="555555"/>
                 </a:solidFill>
               </a:rPr>
-              <a:t>    - Param-memory-bound (model &gt; GPU)? → ZeRO-3 / FSDP, but only with fast interconnect</a:t>
-            </a:r>
-          </a:p>
-          <a:p>
-            <a:pPr>
-              <a:spcAft>
-                <a:spcPts val="400"/>
-              </a:spcAft>
-            </a:pPr>
-            <a:r>
-              <a:rPr sz="1600">
-                <a:solidFill>
-                  <a:srgbClr val="101010"/>
-                </a:solidFill>
-              </a:rPr>
-              <a:t>- Implementation details actually matter when comm-bound</a:t>
-            </a:r>
-          </a:p>
-          <a:p>
-            <a:pPr lvl="1">
-              <a:spcAft>
-                <a:spcPts val="400"/>
-              </a:spcAft>
-            </a:pPr>
-            <a:r>
-              <a:rPr sz="1400">
-                <a:solidFill>
-                  <a:srgbClr val="555555"/>
-                </a:solidFill>
-              </a:rPr>
-              <a:t>    - Bucket sizes, async overlap, prefetch policy can move 1.7× of perf</a:t>
-            </a:r>
-          </a:p>
-          <a:p>
-            <a:pPr lvl="1">
-              <a:spcAft>
-                <a:spcPts val="400"/>
-              </a:spcAft>
-            </a:pPr>
-            <a:r>
-              <a:rPr sz="1400">
-                <a:solidFill>
-                  <a:srgbClr val="555555"/>
-                </a:solidFill>
-              </a:rPr>
-              <a:t>    - DeepSpeed &gt; FSDP defaults on slow Ethernet</a:t>
-            </a:r>
-          </a:p>
-          <a:p>
-            <a:pPr>
-              <a:spcAft>
-                <a:spcPts val="400"/>
-              </a:spcAft>
-            </a:pPr>
-            <a:r>
-              <a:rPr sz="1600">
-                <a:solidFill>
-                  <a:srgbClr val="101010"/>
-                </a:solidFill>
-              </a:rPr>
-              <a:t>- Memory headroom is not a free win</a:t>
-            </a:r>
-          </a:p>
-          <a:p>
-            <a:pPr lvl="1">
-              <a:spcAft>
-                <a:spcPts val="400"/>
-              </a:spcAft>
-            </a:pPr>
-            <a:r>
-              <a:rPr sz="1400">
-                <a:solidFill>
-                  <a:srgbClr val="555555"/>
-                </a:solidFill>
-              </a:rPr>
-              <a:t>    - ZeRO-3 saved 9 GiB but cost us 13× wall-clock — only useful if model doesn't fit</a:t>
-            </a:r>
-          </a:p>
-          <a:p>
-            <a:pPr>
-              <a:spcAft>
-                <a:spcPts val="400"/>
-              </a:spcAft>
-            </a:pPr>
-            <a:r>
-              <a:rPr sz="1600">
-                <a:solidFill>
-                  <a:srgbClr val="101010"/>
-                </a:solidFill>
-              </a:rPr>
-              <a:t>- LoRA breaks naïve assumptions</a:t>
-            </a:r>
-          </a:p>
-          <a:p>
-            <a:pPr lvl="1">
-              <a:spcAft>
-                <a:spcPts val="400"/>
-              </a:spcAft>
-            </a:pPr>
-            <a:r>
-              <a:rPr sz="1400">
-                <a:solidFill>
-                  <a:srgbClr val="555555"/>
-                </a:solidFill>
-              </a:rPr>
-              <a:t>    - Trainable params drop from 7 B to 340 M → optimizer/grad sharding is small wins</a:t>
-            </a:r>
-          </a:p>
-          <a:p>
-            <a:pPr lvl="1">
-              <a:spcAft>
-                <a:spcPts val="400"/>
-              </a:spcAft>
-            </a:pPr>
-            <a:r>
-              <a:rPr sz="1400">
-                <a:solidFill>
-                  <a:srgbClr val="555555"/>
-                </a:solidFill>
-              </a:rPr>
-              <a:t>    - Mixed dtypes (bf16 base + fp32 LoRA) need explicit handling under FSDP</a:t>
-            </a:r>
-          </a:p>
-          <a:p>
-            <a:pPr>
-              <a:spcAft>
-                <a:spcPts val="400"/>
-              </a:spcAft>
-            </a:pPr>
-            <a:r>
-              <a:rPr sz="1600">
-                <a:solidFill>
-                  <a:srgbClr val="101010"/>
-                </a:solidFill>
-              </a:rPr>
-              <a:t>- Cross-node infrastructure dominates</a:t>
-            </a:r>
-          </a:p>
-          <a:p>
-            <a:pPr lvl="1">
-              <a:spcAft>
-                <a:spcPts val="400"/>
-              </a:spcAft>
-            </a:pPr>
-            <a:r>
-              <a:rPr sz="1400">
-                <a:solidFill>
-                  <a:srgbClr val="555555"/>
-                </a:solidFill>
-              </a:rPr>
-              <a:t>    - 1 Gbps Ethernet is the true bottleneck, not DeepSpeed vs FSDP vs Pipeline</a:t>
+              <a:t>    –  Implementation matters — DeepSpeed ZeRO-3 is ~1.7× faster than PyTorch FSDP because of better overlap.</a:t>
+            </a:r>
+          </a:p>
+          <a:p>
+            <a:pPr>
+              <a:spcAft>
+                <a:spcPts val="800"/>
+              </a:spcAft>
+            </a:pPr>
+            <a:r>
+              <a:rPr sz="2100">
+                <a:solidFill>
+                  <a:srgbClr val="101010"/>
+                </a:solidFill>
+              </a:rPr>
+              <a:t>•  These methods would scale on InfiniBand or NVLink. Wrong tool for this hardware.</a:t>
+            </a:r>
+          </a:p>
+          <a:p>
+            <a:pPr>
+              <a:spcAft>
+                <a:spcPts val="800"/>
+              </a:spcAft>
+            </a:pPr>
+            <a:r>
+              <a:rPr sz="2100">
+                <a:solidFill>
+                  <a:srgbClr val="101010"/>
+                </a:solidFill>
+              </a:rPr>
+              <a:t>•  A 7B model with LoRA fits comfortably on a single 32 GiB card. Pick a data-parallel variant.</a:t>
             </a:r>
           </a:p>
         </p:txBody>
@@ -7853,8 +6557,8 @@
         </p:nvSpPr>
         <p:spPr>
           <a:xfrm>
-            <a:off x="457200" y="320040"/>
-            <a:ext cx="11247120" cy="822960"/>
+            <a:off x="548640" y="365760"/>
+            <a:ext cx="11064240" cy="822960"/>
           </a:xfrm>
           <a:prstGeom prst="rect">
             <a:avLst/>
@@ -7869,12 +6573,12 @@
           <a:p>
             <a:pPr algn="l"/>
             <a:r>
-              <a:rPr sz="3600" b="0">
-                <a:solidFill>
-                  <a:srgbClr val="101010"/>
-                </a:solidFill>
-              </a:rPr>
-              <a:t>ML task: LLaVA</a:t>
+              <a:rPr sz="3400" b="1">
+                <a:solidFill>
+                  <a:srgbClr val="101010"/>
+                </a:solidFill>
+              </a:rPr>
+              <a:t>The model: LLaVA</a:t>
             </a:r>
           </a:p>
         </p:txBody>
@@ -7887,8 +6591,8 @@
         </p:nvSpPr>
         <p:spPr>
           <a:xfrm>
-            <a:off x="457200" y="1280160"/>
-            <a:ext cx="11247120" cy="5303520"/>
+            <a:off x="548640" y="1371600"/>
+            <a:ext cx="11064240" cy="5120640"/>
           </a:xfrm>
           <a:prstGeom prst="rect">
             <a:avLst/>
@@ -7896,53 +6600,98 @@
           <a:noFill/>
         </p:spPr>
         <p:txBody>
-          <a:bodyPr wrap="square">
+          <a:bodyPr wrap="square" anchor="ctr">
             <a:spAutoFit/>
           </a:bodyPr>
           <a:lstStyle/>
           <a:p>
             <a:pPr>
               <a:spcAft>
+                <a:spcPts val="800"/>
+              </a:spcAft>
+            </a:pPr>
+            <a:r>
+              <a:rPr sz="2200">
+                <a:solidFill>
+                  <a:srgbClr val="101010"/>
+                </a:solidFill>
+              </a:rPr>
+              <a:t>•  Liu et al., "Visual Instruction Tuning" (NeurIPS 2023). Multimodal: image + text → text.</a:t>
+            </a:r>
+          </a:p>
+          <a:p>
+            <a:pPr>
+              <a:spcAft>
+                <a:spcPts val="800"/>
+              </a:spcAft>
+            </a:pPr>
+            <a:r>
+              <a:rPr sz="2200">
+                <a:solidFill>
+                  <a:srgbClr val="101010"/>
+                </a:solidFill>
+              </a:rPr>
+              <a:t>•  About 7B parameters total, in three pieces:</a:t>
+            </a:r>
+          </a:p>
+          <a:p>
+            <a:pPr lvl="1">
+              <a:spcAft>
                 <a:spcPts val="400"/>
               </a:spcAft>
             </a:pPr>
             <a:r>
-              <a:rPr sz="1600">
-                <a:solidFill>
-                  <a:srgbClr val="101010"/>
-                </a:solidFill>
-              </a:rPr>
-              <a:t>- Liu et al., "Visual Instruction Tuning", NeurIPS 2023</a:t>
-            </a:r>
-          </a:p>
-          <a:p>
-            <a:pPr>
+              <a:rPr sz="1900">
+                <a:solidFill>
+                  <a:srgbClr val="555555"/>
+                </a:solidFill>
+              </a:rPr>
+              <a:t>    –  CLIP ViT-L/14-336 vision encoder — frozen.</a:t>
+            </a:r>
+          </a:p>
+          <a:p>
+            <a:pPr lvl="1">
               <a:spcAft>
                 <a:spcPts val="400"/>
               </a:spcAft>
             </a:pPr>
             <a:r>
-              <a:rPr sz="1600">
-                <a:solidFill>
-                  <a:srgbClr val="101010"/>
-                </a:solidFill>
-              </a:rPr>
-              <a:t>- Multimodal: image + text → text</a:t>
-            </a:r>
-          </a:p>
-          <a:p>
-            <a:pPr>
+              <a:rPr sz="1900">
+                <a:solidFill>
+                  <a:srgbClr val="555555"/>
+                </a:solidFill>
+              </a:rPr>
+              <a:t>    –  2-layer MLP projection — small, trainable.</a:t>
+            </a:r>
+          </a:p>
+          <a:p>
+            <a:pPr lvl="1">
               <a:spcAft>
                 <a:spcPts val="400"/>
               </a:spcAft>
             </a:pPr>
             <a:r>
-              <a:rPr sz="1600">
-                <a:solidFill>
-                  <a:srgbClr val="101010"/>
-                </a:solidFill>
-              </a:rPr>
-              <a:t>- Architecture (7B params total):</a:t>
+              <a:rPr sz="1900">
+                <a:solidFill>
+                  <a:srgbClr val="555555"/>
+                </a:solidFill>
+              </a:rPr>
+              <a:t>    –  Vicuna-7B language model — frozen in Stage 1, fine-tuned in Stage 2.</a:t>
+            </a:r>
+          </a:p>
+          <a:p>
+            <a:pPr>
+              <a:spcAft>
+                <a:spcPts val="800"/>
+              </a:spcAft>
+            </a:pPr>
+            <a:r>
+              <a:rPr sz="2200">
+                <a:solidFill>
+                  <a:srgbClr val="101010"/>
+                </a:solidFill>
+              </a:rPr>
+              <a:t>•  Two-stage training:</a:t>
             </a:r>
           </a:p>
           <a:p>
@@ -7952,12 +6701,12 @@
               </a:spcAft>
             </a:pPr>
             <a:r>
-              <a:rPr sz="1400">
+              <a:rPr sz="1900">
                 <a:solidFill>
                   <a:srgbClr val="555555"/>
                 </a:solidFill>
               </a:rPr>
-              <a:t>    - CLIP ViT-L/14-336 vision encoder — frozen throughout</a:t>
+              <a:t>    –  Stage 1 trains only the projection (~80 MB) on 558K image-caption pairs.</a:t>
             </a:r>
           </a:p>
           <a:p>
@@ -7967,117 +6716,27 @@
               </a:spcAft>
             </a:pPr>
             <a:r>
-              <a:rPr sz="1400">
+              <a:rPr sz="1900">
                 <a:solidFill>
                   <a:srgbClr val="555555"/>
                 </a:solidFill>
               </a:rPr>
-              <a:t>    - 2-layer MLP (GELU) projection — trainable, ≈80 MB</a:t>
-            </a:r>
-          </a:p>
-          <a:p>
-            <a:pPr lvl="1">
-              <a:spcAft>
-                <a:spcPts val="400"/>
-              </a:spcAft>
-            </a:pPr>
-            <a:r>
-              <a:rPr sz="1400">
-                <a:solidFill>
-                  <a:srgbClr val="555555"/>
-                </a:solidFill>
-              </a:rPr>
-              <a:t>    - Vicuna-7B LLM — frozen in Stage 1, fine-tuned in Stage 2</a:t>
-            </a:r>
-          </a:p>
-          <a:p>
-            <a:pPr>
-              <a:spcAft>
-                <a:spcPts val="400"/>
-              </a:spcAft>
-            </a:pPr>
-            <a:r>
-              <a:rPr sz="1600">
-                <a:solidFill>
-                  <a:srgbClr val="101010"/>
-                </a:solidFill>
-              </a:rPr>
-              <a:t>- Two training stages:</a:t>
-            </a:r>
-          </a:p>
-          <a:p>
-            <a:pPr lvl="1">
-              <a:spcAft>
-                <a:spcPts val="400"/>
-              </a:spcAft>
-            </a:pPr>
-            <a:r>
-              <a:rPr sz="1400">
-                <a:solidFill>
-                  <a:srgbClr val="555555"/>
-                </a:solidFill>
-              </a:rPr>
-              <a:t>    - Stage 1 (pre-train): MLP only on 558K image-caption pairs</a:t>
-            </a:r>
-          </a:p>
-          <a:p>
-            <a:pPr lvl="1">
-              <a:spcAft>
-                <a:spcPts val="400"/>
-              </a:spcAft>
-            </a:pPr>
-            <a:r>
-              <a:rPr sz="1400">
-                <a:solidFill>
-                  <a:srgbClr val="555555"/>
-                </a:solidFill>
-              </a:rPr>
-              <a:t>    - Stage 2 (fine-tune): MLP + LLM (or LoRA) on 665K instructions</a:t>
-            </a:r>
-          </a:p>
-          <a:p>
-            <a:pPr>
-              <a:spcAft>
-                <a:spcPts val="400"/>
-              </a:spcAft>
-            </a:pPr>
-            <a:r>
-              <a:rPr sz="1600">
-                <a:solidFill>
-                  <a:srgbClr val="101010"/>
-                </a:solidFill>
-              </a:rPr>
-              <a:t>- Stage 2 is our main benchmark — meaningful comm volume</a:t>
-            </a:r>
-          </a:p>
-          <a:p>
-            <a:pPr lvl="1">
-              <a:spcAft>
-                <a:spcPts val="400"/>
-              </a:spcAft>
-            </a:pPr>
-            <a:r>
-              <a:rPr sz="1400">
-                <a:solidFill>
-                  <a:srgbClr val="555555"/>
-                </a:solidFill>
-              </a:rPr>
-              <a:t>    - Stage 1 has only ~80 MB trainable; AllReduce trivial</a:t>
-            </a:r>
-          </a:p>
-          <a:p>
-            <a:pPr lvl="1">
-              <a:spcAft>
-                <a:spcPts val="400"/>
-              </a:spcAft>
-            </a:pPr>
-            <a:r>
-              <a:rPr sz="1400">
-                <a:solidFill>
-                  <a:srgbClr val="555555"/>
-                </a:solidFill>
-              </a:rPr>
-              <a:t>    - Stage 2 LoRA: ~340 MB trainable adapters, real DP cost</a:t>
+              <a:t>    –  Stage 2 fine-tunes the projection plus the LLM on 665K instructions.</a:t>
+            </a:r>
+          </a:p>
+          <a:p>
+            <a:pPr>
+              <a:spcAft>
+                <a:spcPts val="800"/>
+              </a:spcAft>
+            </a:pPr>
+            <a:r>
+              <a:rPr sz="2200">
+                <a:solidFill>
+                  <a:srgbClr val="101010"/>
+                </a:solidFill>
+              </a:rPr>
+              <a:t>•  We use Stage 2 because it has meaningful gradient communication. Stage 1's AllReduce is too small to matter.</a:t>
             </a:r>
           </a:p>
         </p:txBody>
@@ -8108,8 +6767,8 @@
         </p:nvSpPr>
         <p:spPr>
           <a:xfrm>
-            <a:off x="457200" y="2286000"/>
-            <a:ext cx="11247120" cy="1371600"/>
+            <a:off x="548640" y="2286000"/>
+            <a:ext cx="11064240" cy="1371600"/>
           </a:xfrm>
           <a:prstGeom prst="rect">
             <a:avLst/>
@@ -8124,7 +6783,7 @@
           <a:p>
             <a:pPr algn="ctr"/>
             <a:r>
-              <a:rPr sz="5400" b="1">
+              <a:rPr sz="5600" b="1">
                 <a:solidFill>
                   <a:srgbClr val="101010"/>
                 </a:solidFill>
@@ -8142,8 +6801,8 @@
         </p:nvSpPr>
         <p:spPr>
           <a:xfrm>
-            <a:off x="457200" y="4114800"/>
-            <a:ext cx="11247120" cy="1828800"/>
+            <a:off x="457200" y="4023360"/>
+            <a:ext cx="11247120" cy="2011680"/>
           </a:xfrm>
           <a:prstGeom prst="rect">
             <a:avLst/>
@@ -8158,7 +6817,7 @@
           <a:p>
             <a:pPr algn="ctr"/>
             <a:r>
-              <a:rPr sz="2200">
+              <a:rPr sz="2400">
                 <a:solidFill>
                   <a:srgbClr val="555555"/>
                 </a:solidFill>
@@ -8174,8 +6833,7 @@
                   <a:srgbClr val="555555"/>
                 </a:solidFill>
               </a:rPr>
-              <a:t>Repo: github.com/rassulmagauin/ml710
-Report: ZERO2_RESULTS.md · results_explanation.md</a:t>
+              <a:t>github.com/rassulmagauin/ml710 · ZERO2_RESULTS.md · results_explanation.md</a:t>
             </a:r>
           </a:p>
         </p:txBody>
@@ -8206,8 +6864,8 @@
         </p:nvSpPr>
         <p:spPr>
           <a:xfrm>
-            <a:off x="457200" y="320040"/>
-            <a:ext cx="11247120" cy="822960"/>
+            <a:off x="548640" y="365760"/>
+            <a:ext cx="11064240" cy="822960"/>
           </a:xfrm>
           <a:prstGeom prst="rect">
             <a:avLst/>
@@ -8222,12 +6880,12 @@
           <a:p>
             <a:pPr algn="l"/>
             <a:r>
-              <a:rPr sz="3600" b="0">
-                <a:solidFill>
-                  <a:srgbClr val="101010"/>
-                </a:solidFill>
-              </a:rPr>
-              <a:t>Stage 2 setup</a:t>
+              <a:rPr sz="3400" b="1">
+                <a:solidFill>
+                  <a:srgbClr val="101010"/>
+                </a:solidFill>
+              </a:rPr>
+              <a:t>Stage 2 — what we trained</a:t>
             </a:r>
           </a:p>
         </p:txBody>
@@ -8240,8 +6898,8 @@
         </p:nvSpPr>
         <p:spPr>
           <a:xfrm>
-            <a:off x="457200" y="1280160"/>
-            <a:ext cx="11247120" cy="5303520"/>
+            <a:off x="548640" y="1371600"/>
+            <a:ext cx="11064240" cy="5120640"/>
           </a:xfrm>
           <a:prstGeom prst="rect">
             <a:avLst/>
@@ -8249,23 +6907,98 @@
           <a:noFill/>
         </p:spPr>
         <p:txBody>
-          <a:bodyPr wrap="square">
+          <a:bodyPr wrap="square" anchor="ctr">
             <a:spAutoFit/>
           </a:bodyPr>
           <a:lstStyle/>
           <a:p>
             <a:pPr>
               <a:spcAft>
+                <a:spcPts val="800"/>
+              </a:spcAft>
+            </a:pPr>
+            <a:r>
+              <a:rPr sz="2200">
+                <a:solidFill>
+                  <a:srgbClr val="101010"/>
+                </a:solidFill>
+              </a:rPr>
+              <a:t>•  Starting checkpoint: liuhaotian/llava-v1.5-7b. The CLIP and MLP were already trained in Stage 1.</a:t>
+            </a:r>
+          </a:p>
+          <a:p>
+            <a:pPr>
+              <a:spcAft>
+                <a:spcPts val="800"/>
+              </a:spcAft>
+            </a:pPr>
+            <a:r>
+              <a:rPr sz="2200">
+                <a:solidFill>
+                  <a:srgbClr val="101010"/>
+                </a:solidFill>
+              </a:rPr>
+              <a:t>•  Dataset: 10K random samples from llava_instruct_150k.json with COCO 2014 train images. One epoch keeps each run under an hour.</a:t>
+            </a:r>
+          </a:p>
+          <a:p>
+            <a:pPr>
+              <a:spcAft>
+                <a:spcPts val="800"/>
+              </a:spcAft>
+            </a:pPr>
+            <a:r>
+              <a:rPr sz="2200">
+                <a:solidFill>
+                  <a:srgbClr val="101010"/>
+                </a:solidFill>
+              </a:rPr>
+              <a:t>•  Training target: LoRA adapters (r=128, α=256) on the LLM, plus the full MLP projection.</a:t>
+            </a:r>
+          </a:p>
+          <a:p>
+            <a:pPr lvl="1">
+              <a:spcAft>
                 <a:spcPts val="400"/>
               </a:spcAft>
             </a:pPr>
             <a:r>
-              <a:rPr sz="1600">
-                <a:solidFill>
-                  <a:srgbClr val="101010"/>
-                </a:solidFill>
-              </a:rPr>
-              <a:t>- Starting checkpoint: liuhaotian/llava-v1.5-7b</a:t>
+              <a:rPr sz="1900">
+                <a:solidFill>
+                  <a:srgbClr val="555555"/>
+                </a:solidFill>
+              </a:rPr>
+              <a:t>    –  ≈4.6% of total parameters — about 340M of 7.4B.</a:t>
+            </a:r>
+          </a:p>
+          <a:p>
+            <a:pPr>
+              <a:spcAft>
+                <a:spcPts val="800"/>
+              </a:spcAft>
+            </a:pPr>
+            <a:r>
+              <a:rPr sz="2200">
+                <a:solidFill>
+                  <a:srgbClr val="101010"/>
+                </a:solidFill>
+              </a:rPr>
+              <a:t>•  AdamW, bf16, gradient checkpointing, cosine schedule.</a:t>
+            </a:r>
+          </a:p>
+          <a:p>
+            <a:pPr>
+              <a:spcAft>
+                <a:spcPts val="800"/>
+              </a:spcAft>
+            </a:pPr>
+            <a:r>
+              <a:rPr sz="2200">
+                <a:solidFill>
+                  <a:srgbClr val="101010"/>
+                </a:solidFill>
+              </a:rPr>
+              <a:t>•  Effective batch sizes vary so each method actually fits in memory:</a:t>
             </a:r>
           </a:p>
           <a:p>
@@ -8275,27 +7008,27 @@
               </a:spcAft>
             </a:pPr>
             <a:r>
-              <a:rPr sz="1400">
+              <a:rPr sz="1900">
                 <a:solidFill>
                   <a:srgbClr val="555555"/>
                 </a:solidFill>
               </a:rPr>
-              <a:t>    - CLIP + MLP already pretrained on 558K LAION/CC/SBU pairs</a:t>
-            </a:r>
-          </a:p>
-          <a:p>
-            <a:pPr>
+              <a:t>    –  DDP and ZeRO-2: 32 (per_device=16, world=2)</a:t>
+            </a:r>
+          </a:p>
+          <a:p>
+            <a:pPr lvl="1">
               <a:spcAft>
                 <a:spcPts val="400"/>
               </a:spcAft>
             </a:pPr>
             <a:r>
-              <a:rPr sz="1600">
-                <a:solidFill>
-                  <a:srgbClr val="101010"/>
-                </a:solidFill>
-              </a:rPr>
-              <a:t>- Dataset: llava_instruct_10k.json (10K random subset, seed=42)</a:t>
+              <a:rPr sz="1900">
+                <a:solidFill>
+                  <a:srgbClr val="555555"/>
+                </a:solidFill>
+              </a:rPr>
+              <a:t>    –  Pipeline: 16 (per_device=1, accum=16, world=2)</a:t>
             </a:r>
           </a:p>
           <a:p>
@@ -8305,147 +7038,12 @@
               </a:spcAft>
             </a:pPr>
             <a:r>
-              <a:rPr sz="1400">
+              <a:rPr sz="1900">
                 <a:solidFill>
                   <a:srgbClr val="555555"/>
                 </a:solidFill>
               </a:rPr>
-              <a:t>    - Source: llava_instruct_150k.json + COCO 2014 train images</a:t>
-            </a:r>
-          </a:p>
-          <a:p>
-            <a:pPr lvl="1">
-              <a:spcAft>
-                <a:spcPts val="400"/>
-              </a:spcAft>
-            </a:pPr>
-            <a:r>
-              <a:rPr sz="1400">
-                <a:solidFill>
-                  <a:srgbClr val="555555"/>
-                </a:solidFill>
-              </a:rPr>
-              <a:t>    - Subset chosen so each run finishes within ~1 hour</a:t>
-            </a:r>
-          </a:p>
-          <a:p>
-            <a:pPr>
-              <a:spcAft>
-                <a:spcPts val="400"/>
-              </a:spcAft>
-            </a:pPr>
-            <a:r>
-              <a:rPr sz="1600">
-                <a:solidFill>
-                  <a:srgbClr val="101010"/>
-                </a:solidFill>
-              </a:rPr>
-              <a:t>- Trainable: LoRA adapters (r=128, α=256) + full MLP projection</a:t>
-            </a:r>
-          </a:p>
-          <a:p>
-            <a:pPr lvl="1">
-              <a:spcAft>
-                <a:spcPts val="400"/>
-              </a:spcAft>
-            </a:pPr>
-            <a:r>
-              <a:rPr sz="1400">
-                <a:solidFill>
-                  <a:srgbClr val="555555"/>
-                </a:solidFill>
-              </a:rPr>
-              <a:t>    - ≈4.6% of total params trainable; ~340 M of 7.4 B</a:t>
-            </a:r>
-          </a:p>
-          <a:p>
-            <a:pPr>
-              <a:spcAft>
-                <a:spcPts val="400"/>
-              </a:spcAft>
-            </a:pPr>
-            <a:r>
-              <a:rPr sz="1600">
-                <a:solidFill>
-                  <a:srgbClr val="101010"/>
-                </a:solidFill>
-              </a:rPr>
-              <a:t>- Optimizer: AdamW; bf16; gradient checkpointing; cosine LR</a:t>
-            </a:r>
-          </a:p>
-          <a:p>
-            <a:pPr lvl="1">
-              <a:spcAft>
-                <a:spcPts val="400"/>
-              </a:spcAft>
-            </a:pPr>
-            <a:r>
-              <a:rPr sz="1400">
-                <a:solidFill>
-                  <a:srgbClr val="555555"/>
-                </a:solidFill>
-              </a:rPr>
-              <a:t>    - LR=2e-4 (LoRA) / 5e-5 (ZeRO-3, FSDP), warmup 0.03 / 0.1</a:t>
-            </a:r>
-          </a:p>
-          <a:p>
-            <a:pPr>
-              <a:spcAft>
-                <a:spcPts val="400"/>
-              </a:spcAft>
-            </a:pPr>
-            <a:r>
-              <a:rPr sz="1600">
-                <a:solidFill>
-                  <a:srgbClr val="101010"/>
-                </a:solidFill>
-              </a:rPr>
-              <a:t>- Effective batch sizes vary by method:</a:t>
-            </a:r>
-          </a:p>
-          <a:p>
-            <a:pPr lvl="1">
-              <a:spcAft>
-                <a:spcPts val="400"/>
-              </a:spcAft>
-            </a:pPr>
-            <a:r>
-              <a:rPr sz="1400">
-                <a:solidFill>
-                  <a:srgbClr val="555555"/>
-                </a:solidFill>
-              </a:rPr>
-              <a:t>    - DDP / ZeRO-2: 32 (per_device=16, accum=1, world=2)</a:t>
-            </a:r>
-          </a:p>
-          <a:p>
-            <a:pPr lvl="1">
-              <a:spcAft>
-                <a:spcPts val="400"/>
-              </a:spcAft>
-            </a:pPr>
-            <a:r>
-              <a:rPr sz="1400">
-                <a:solidFill>
-                  <a:srgbClr val="555555"/>
-                </a:solidFill>
-              </a:rPr>
-              <a:t>    - Pipeline: 16 (per_device=1, accum=16, world=2)</a:t>
-            </a:r>
-          </a:p>
-          <a:p>
-            <a:pPr lvl="1">
-              <a:spcAft>
-                <a:spcPts val="400"/>
-              </a:spcAft>
-            </a:pPr>
-            <a:r>
-              <a:rPr sz="1400">
-                <a:solidFill>
-                  <a:srgbClr val="555555"/>
-                </a:solidFill>
-              </a:rPr>
-              <a:t>    - ZeRO-3 / FSDP: 8 (per_device=1, accum=4, world=2)</a:t>
+              <a:t>    –  ZeRO-3 and FSDP: 8 (per_device=1, accum=4, world=2)</a:t>
             </a:r>
           </a:p>
         </p:txBody>
@@ -8476,8 +7074,8 @@
         </p:nvSpPr>
         <p:spPr>
           <a:xfrm>
-            <a:off x="457200" y="320040"/>
-            <a:ext cx="11247120" cy="822960"/>
+            <a:off x="548640" y="365760"/>
+            <a:ext cx="11064240" cy="822960"/>
           </a:xfrm>
           <a:prstGeom prst="rect">
             <a:avLst/>
@@ -8492,12 +7090,12 @@
           <a:p>
             <a:pPr algn="l"/>
             <a:r>
-              <a:rPr sz="3600" b="0">
-                <a:solidFill>
-                  <a:srgbClr val="101010"/>
-                </a:solidFill>
-              </a:rPr>
-              <a:t>Strategies compared</a:t>
+              <a:rPr sz="3400" b="1">
+                <a:solidFill>
+                  <a:srgbClr val="101010"/>
+                </a:solidFill>
+              </a:rPr>
+              <a:t>What we compared</a:t>
             </a:r>
           </a:p>
         </p:txBody>
@@ -8510,8 +7108,8 @@
         </p:nvSpPr>
         <p:spPr>
           <a:xfrm>
-            <a:off x="457200" y="1280160"/>
-            <a:ext cx="11247120" cy="5303520"/>
+            <a:off x="548640" y="1371600"/>
+            <a:ext cx="11064240" cy="5120640"/>
           </a:xfrm>
           <a:prstGeom prst="rect">
             <a:avLst/>
@@ -8519,218 +7117,113 @@
           <a:noFill/>
         </p:spPr>
         <p:txBody>
-          <a:bodyPr wrap="square">
+          <a:bodyPr wrap="square" anchor="ctr">
             <a:spAutoFit/>
           </a:bodyPr>
           <a:lstStyle/>
           <a:p>
             <a:pPr>
               <a:spcAft>
-                <a:spcPts val="400"/>
-              </a:spcAft>
-            </a:pPr>
-            <a:r>
-              <a:rPr sz="1600">
-                <a:solidFill>
-                  <a:srgbClr val="101010"/>
-                </a:solidFill>
-              </a:rPr>
-              <a:t>- Single-GPU LoRA (no parallelism)</a:t>
-            </a:r>
-          </a:p>
-          <a:p>
-            <a:pPr lvl="1">
-              <a:spcAft>
-                <a:spcPts val="400"/>
-              </a:spcAft>
-            </a:pPr>
-            <a:r>
-              <a:rPr sz="1400">
-                <a:solidFill>
-                  <a:srgbClr val="555555"/>
-                </a:solidFill>
-              </a:rPr>
-              <a:t>    - Reference: how slow is no parallelism?</a:t>
-            </a:r>
-          </a:p>
-          <a:p>
-            <a:pPr>
-              <a:spcAft>
-                <a:spcPts val="400"/>
-              </a:spcAft>
-            </a:pPr>
-            <a:r>
-              <a:rPr sz="1600">
-                <a:solidFill>
-                  <a:srgbClr val="101010"/>
-                </a:solidFill>
-              </a:rPr>
-              <a:t>- DDP (DeepSpeed ZeRO-0) — naïve baseline</a:t>
-            </a:r>
-          </a:p>
-          <a:p>
-            <a:pPr lvl="1">
-              <a:spcAft>
-                <a:spcPts val="400"/>
-              </a:spcAft>
-            </a:pPr>
-            <a:r>
-              <a:rPr sz="1400">
-                <a:solidFill>
-                  <a:srgbClr val="555555"/>
-                </a:solidFill>
-              </a:rPr>
-              <a:t>    - Replicate model on each GPU; AllReduce gradients</a:t>
-            </a:r>
-          </a:p>
-          <a:p>
-            <a:pPr>
-              <a:spcAft>
-                <a:spcPts val="400"/>
-              </a:spcAft>
-            </a:pPr>
-            <a:r>
-              <a:rPr sz="1600">
-                <a:solidFill>
-                  <a:srgbClr val="101010"/>
-                </a:solidFill>
-              </a:rPr>
-              <a:t>- Pipeline parallelism — model parallelism family</a:t>
-            </a:r>
-          </a:p>
-          <a:p>
-            <a:pPr lvl="1">
-              <a:spcAft>
-                <a:spcPts val="400"/>
-              </a:spcAft>
-            </a:pPr>
-            <a:r>
-              <a:rPr sz="1400">
-                <a:solidFill>
-                  <a:srgbClr val="555555"/>
-                </a:solidFill>
-              </a:rPr>
-              <a:t>    - Split decoder layers across 2 nodes (Gloo over Ethernet)</a:t>
-            </a:r>
-          </a:p>
-          <a:p>
-            <a:pPr lvl="1">
-              <a:spcAft>
-                <a:spcPts val="400"/>
-              </a:spcAft>
-            </a:pPr>
-            <a:r>
-              <a:rPr sz="1400">
-                <a:solidFill>
-                  <a:srgbClr val="555555"/>
-                </a:solidFill>
-              </a:rPr>
-              <a:t>    - Owned by Youssef Ghallab</a:t>
-            </a:r>
-          </a:p>
-          <a:p>
-            <a:pPr>
-              <a:spcAft>
-                <a:spcPts val="400"/>
-              </a:spcAft>
-            </a:pPr>
-            <a:r>
-              <a:rPr sz="1600">
-                <a:solidFill>
-                  <a:srgbClr val="101010"/>
-                </a:solidFill>
-              </a:rPr>
-              <a:t>- DeepSpeed ZeRO-2 — data parallelism w/ sharded optimizer + gradients</a:t>
-            </a:r>
-          </a:p>
-          <a:p>
-            <a:pPr lvl="1">
-              <a:spcAft>
-                <a:spcPts val="400"/>
-              </a:spcAft>
-            </a:pPr>
-            <a:r>
-              <a:rPr sz="1400">
-                <a:solidFill>
-                  <a:srgbClr val="555555"/>
-                </a:solidFill>
-              </a:rPr>
-              <a:t>    - Owned by Omar Ahmed</a:t>
-            </a:r>
-          </a:p>
-          <a:p>
-            <a:pPr>
-              <a:spcAft>
-                <a:spcPts val="400"/>
-              </a:spcAft>
-            </a:pPr>
-            <a:r>
-              <a:rPr sz="1600">
-                <a:solidFill>
-                  <a:srgbClr val="101010"/>
-                </a:solidFill>
-              </a:rPr>
-              <a:t>- DeepSpeed ZeRO-3 — data parallelism w/ sharded optimizer + grads + params</a:t>
-            </a:r>
-          </a:p>
-          <a:p>
-            <a:pPr lvl="1">
-              <a:spcAft>
-                <a:spcPts val="400"/>
-              </a:spcAft>
-            </a:pPr>
-            <a:r>
-              <a:rPr sz="1400">
-                <a:solidFill>
-                  <a:srgbClr val="555555"/>
-                </a:solidFill>
-              </a:rPr>
-              <a:t>    - Owned by Rassul Magauin</a:t>
-            </a:r>
-          </a:p>
-          <a:p>
-            <a:pPr>
-              <a:spcAft>
-                <a:spcPts val="400"/>
-              </a:spcAft>
-            </a:pPr>
-            <a:r>
-              <a:rPr sz="1600">
-                <a:solidFill>
-                  <a:srgbClr val="101010"/>
-                </a:solidFill>
-              </a:rPr>
-              <a:t>- PyTorch FSDP — PyTorch-native equivalent of ZeRO-3</a:t>
-            </a:r>
-          </a:p>
-          <a:p>
-            <a:pPr lvl="1">
-              <a:spcAft>
-                <a:spcPts val="400"/>
-              </a:spcAft>
-            </a:pPr>
-            <a:r>
-              <a:rPr sz="1400">
-                <a:solidFill>
-                  <a:srgbClr val="555555"/>
-                </a:solidFill>
-              </a:rPr>
-              <a:t>    - Owned by Rassul Magauin</a:t>
-            </a:r>
-          </a:p>
-          <a:p>
-            <a:pPr>
-              <a:spcAft>
-                <a:spcPts val="400"/>
-              </a:spcAft>
-            </a:pPr>
-            <a:r>
-              <a:rPr sz="1600">
-                <a:solidFill>
-                  <a:srgbClr val="101010"/>
-                </a:solidFill>
-              </a:rPr>
-              <a:t>- All multi-node runs use 2 ws-ia nodes × 1 GPU over Ethernet</a:t>
+                <a:spcPts val="800"/>
+              </a:spcAft>
+            </a:pPr>
+            <a:r>
+              <a:rPr sz="2200">
+                <a:solidFill>
+                  <a:srgbClr val="101010"/>
+                </a:solidFill>
+              </a:rPr>
+              <a:t>•  Single-GPU LoRA — reference for what no parallelism looks like.</a:t>
+            </a:r>
+          </a:p>
+          <a:p>
+            <a:pPr>
+              <a:spcAft>
+                <a:spcPts val="800"/>
+              </a:spcAft>
+            </a:pPr>
+            <a:r>
+              <a:rPr sz="2200">
+                <a:solidFill>
+                  <a:srgbClr val="101010"/>
+                </a:solidFill>
+              </a:rPr>
+              <a:t>•  DDP (DeepSpeed ZeRO-0) — naïve baseline; the model is replicated, gradients are AllReduce'd.</a:t>
+            </a:r>
+          </a:p>
+          <a:p>
+            <a:pPr>
+              <a:spcAft>
+                <a:spcPts val="800"/>
+              </a:spcAft>
+            </a:pPr>
+            <a:r>
+              <a:rPr sz="2200">
+                <a:solidFill>
+                  <a:srgbClr val="101010"/>
+                </a:solidFill>
+              </a:rPr>
+              <a:t>•  Pipeline parallelism — the model is split across the two nodes. Owned by Ghallab.</a:t>
+            </a:r>
+          </a:p>
+          <a:p>
+            <a:pPr>
+              <a:spcAft>
+                <a:spcPts val="800"/>
+              </a:spcAft>
+            </a:pPr>
+            <a:r>
+              <a:rPr sz="2200">
+                <a:solidFill>
+                  <a:srgbClr val="101010"/>
+                </a:solidFill>
+              </a:rPr>
+              <a:t>•  ZeRO-2 — data parallelism with sharded optimizer states and gradients. Owned by Omar.</a:t>
+            </a:r>
+          </a:p>
+          <a:p>
+            <a:pPr>
+              <a:spcAft>
+                <a:spcPts val="800"/>
+              </a:spcAft>
+            </a:pPr>
+            <a:r>
+              <a:rPr sz="2200">
+                <a:solidFill>
+                  <a:srgbClr val="101010"/>
+                </a:solidFill>
+              </a:rPr>
+              <a:t>•  ZeRO-3 — same as ZeRO-2 but parameters are also sharded. Owned by Rassul.</a:t>
+            </a:r>
+          </a:p>
+          <a:p>
+            <a:pPr>
+              <a:spcAft>
+                <a:spcPts val="800"/>
+              </a:spcAft>
+            </a:pPr>
+            <a:r>
+              <a:rPr sz="2200">
+                <a:solidFill>
+                  <a:srgbClr val="101010"/>
+                </a:solidFill>
+              </a:rPr>
+              <a:t>•  PyTorch FSDP — PyTorch-native equivalent of ZeRO-3, different implementation. Owned by Rassul.</a:t>
+            </a:r>
+          </a:p>
+          <a:p>
+            <a:pPr>
+              <a:spcAft>
+                <a:spcPts val="800"/>
+              </a:spcAft>
+            </a:pPr>
+            <a:r>
+              <a:rPr sz="2200">
+                <a:solidFill>
+                  <a:srgbClr val="101010"/>
+                </a:solidFill>
+              </a:rPr>
+              <a:t>•  Every multi-node run uses the same two ws-ia nodes, same Ethernet link.</a:t>
             </a:r>
           </a:p>
         </p:txBody>
@@ -8761,8 +7254,8 @@
         </p:nvSpPr>
         <p:spPr>
           <a:xfrm>
-            <a:off x="457200" y="320040"/>
-            <a:ext cx="11247120" cy="822960"/>
+            <a:off x="548640" y="365760"/>
+            <a:ext cx="11064240" cy="822960"/>
           </a:xfrm>
           <a:prstGeom prst="rect">
             <a:avLst/>
@@ -8777,12 +7270,12 @@
           <a:p>
             <a:pPr algn="l"/>
             <a:r>
-              <a:rPr sz="3600" b="0">
-                <a:solidFill>
-                  <a:srgbClr val="101010"/>
-                </a:solidFill>
-              </a:rPr>
-              <a:t>Baseline: 1 GPU LoRA</a:t>
+              <a:rPr sz="3400" b="1">
+                <a:solidFill>
+                  <a:srgbClr val="101010"/>
+                </a:solidFill>
+              </a:rPr>
+              <a:t>Baseline 1: single GPU</a:t>
             </a:r>
           </a:p>
         </p:txBody>
@@ -8795,8 +7288,8 @@
         </p:nvSpPr>
         <p:spPr>
           <a:xfrm>
-            <a:off x="457200" y="1280160"/>
-            <a:ext cx="11247120" cy="5303520"/>
+            <a:off x="548640" y="1371600"/>
+            <a:ext cx="11064240" cy="5120640"/>
           </a:xfrm>
           <a:prstGeom prst="rect">
             <a:avLst/>
@@ -8804,23 +7297,98 @@
           <a:noFill/>
         </p:spPr>
         <p:txBody>
-          <a:bodyPr wrap="square">
+          <a:bodyPr wrap="square" anchor="ctr">
             <a:spAutoFit/>
           </a:bodyPr>
           <a:lstStyle/>
           <a:p>
             <a:pPr>
               <a:spcAft>
+                <a:spcPts val="800"/>
+              </a:spcAft>
+            </a:pPr>
+            <a:r>
+              <a:rPr sz="2200">
+                <a:solidFill>
+                  <a:srgbClr val="101010"/>
+                </a:solidFill>
+              </a:rPr>
+              <a:t>•  One RTX 5000 Ada, batch size 1, 10000 steps for one epoch over the 10K subset.</a:t>
+            </a:r>
+          </a:p>
+          <a:p>
+            <a:pPr>
+              <a:spcAft>
+                <a:spcPts val="800"/>
+              </a:spcAft>
+            </a:pPr>
+            <a:r>
+              <a:rPr sz="2200">
+                <a:solidFill>
+                  <a:srgbClr val="101010"/>
+                </a:solidFill>
+              </a:rPr>
+              <a:t>•  Wall time: 96 minutes.</a:t>
+            </a:r>
+          </a:p>
+          <a:p>
+            <a:pPr>
+              <a:spcAft>
+                <a:spcPts val="800"/>
+              </a:spcAft>
+            </a:pPr>
+            <a:r>
+              <a:rPr sz="2200">
+                <a:solidFill>
+                  <a:srgbClr val="101010"/>
+                </a:solidFill>
+              </a:rPr>
+              <a:t>•  Throughput: 1.74 samples/sec.</a:t>
+            </a:r>
+          </a:p>
+          <a:p>
+            <a:pPr>
+              <a:spcAft>
+                <a:spcPts val="800"/>
+              </a:spcAft>
+            </a:pPr>
+            <a:r>
+              <a:rPr sz="2200">
+                <a:solidFill>
+                  <a:srgbClr val="101010"/>
+                </a:solidFill>
+              </a:rPr>
+              <a:t>•  Peak GPU memory: 25.7 GiB out of 32. Fits comfortably.</a:t>
+            </a:r>
+          </a:p>
+          <a:p>
+            <a:pPr>
+              <a:spcAft>
+                <a:spcPts val="800"/>
+              </a:spcAft>
+            </a:pPr>
+            <a:r>
+              <a:rPr sz="2200">
+                <a:solidFill>
+                  <a:srgbClr val="101010"/>
+                </a:solidFill>
+              </a:rPr>
+              <a:t>•  Average GPU utilization: 11%.</a:t>
+            </a:r>
+          </a:p>
+          <a:p>
+            <a:pPr lvl="1">
+              <a:spcAft>
                 <a:spcPts val="400"/>
               </a:spcAft>
             </a:pPr>
             <a:r>
-              <a:rPr sz="1600">
-                <a:solidFill>
-                  <a:srgbClr val="101010"/>
-                </a:solidFill>
-              </a:rPr>
-              <a:t>- 1 RTX 5000 Ada (32 GB), no parallelism</a:t>
+              <a:rPr sz="1900">
+                <a:solidFill>
+                  <a:srgbClr val="555555"/>
+                </a:solidFill>
+              </a:rPr>
+              <a:t>    –  CPU-bound on data preprocessing — dataloader_num_workers=0, single-threaded image loading.</a:t>
             </a:r>
           </a:p>
           <a:p>
@@ -8830,132 +7398,42 @@
               </a:spcAft>
             </a:pPr>
             <a:r>
-              <a:rPr sz="1400">
+              <a:rPr sz="1900">
                 <a:solidFill>
                   <a:srgbClr val="555555"/>
                 </a:solidFill>
               </a:rPr>
-              <a:t>    - per_device_batch=1, effective batch=1, 1 epoch over 10K</a:t>
-            </a:r>
-          </a:p>
-          <a:p>
-            <a:pPr lvl="1">
-              <a:spcAft>
-                <a:spcPts val="400"/>
-              </a:spcAft>
-            </a:pPr>
-            <a:r>
-              <a:rPr sz="1400">
-                <a:solidFill>
-                  <a:srgbClr val="555555"/>
-                </a:solidFill>
-              </a:rPr>
-              <a:t>    - 10000 training steps, lr=2e-4, cosine schedule</a:t>
-            </a:r>
-          </a:p>
-          <a:p>
-            <a:pPr>
-              <a:spcAft>
-                <a:spcPts val="400"/>
-              </a:spcAft>
-            </a:pPr>
-            <a:r>
-              <a:rPr sz="1600">
-                <a:solidFill>
-                  <a:srgbClr val="101010"/>
-                </a:solidFill>
-              </a:rPr>
-              <a:t>- Wall time: 96.0 min (5761 s)</a:t>
-            </a:r>
-          </a:p>
-          <a:p>
-            <a:pPr>
-              <a:spcAft>
-                <a:spcPts val="400"/>
-              </a:spcAft>
-            </a:pPr>
-            <a:r>
-              <a:rPr sz="1600">
-                <a:solidFill>
-                  <a:srgbClr val="101010"/>
-                </a:solidFill>
-              </a:rPr>
-              <a:t>- Throughput: 1.74 samples/sec</a:t>
-            </a:r>
-          </a:p>
-          <a:p>
-            <a:pPr>
-              <a:spcAft>
-                <a:spcPts val="400"/>
-              </a:spcAft>
-            </a:pPr>
-            <a:r>
-              <a:rPr sz="1600">
-                <a:solidFill>
-                  <a:srgbClr val="101010"/>
-                </a:solidFill>
-              </a:rPr>
-              <a:t>- Peak GPU memory: 25.7 GiB / 32 GiB (≈80%)</a:t>
-            </a:r>
-          </a:p>
-          <a:p>
-            <a:pPr>
-              <a:spcAft>
-                <a:spcPts val="400"/>
-              </a:spcAft>
-            </a:pPr>
-            <a:r>
-              <a:rPr sz="1600">
-                <a:solidFill>
-                  <a:srgbClr val="101010"/>
-                </a:solidFill>
-              </a:rPr>
-              <a:t>- Average GPU utilization: only 11.4%</a:t>
-            </a:r>
-          </a:p>
-          <a:p>
-            <a:pPr lvl="1">
-              <a:spcAft>
-                <a:spcPts val="400"/>
-              </a:spcAft>
-            </a:pPr>
-            <a:r>
-              <a:rPr sz="1400">
-                <a:solidFill>
-                  <a:srgbClr val="555555"/>
-                </a:solidFill>
-              </a:rPr>
-              <a:t>    - CPU-bound: dataloader_num_workers=0 + bf16 model loading</a:t>
-            </a:r>
-          </a:p>
-          <a:p>
-            <a:pPr lvl="1">
-              <a:spcAft>
-                <a:spcPts val="400"/>
-              </a:spcAft>
-            </a:pPr>
-            <a:r>
-              <a:rPr sz="1400">
-                <a:solidFill>
-                  <a:srgbClr val="555555"/>
-                </a:solidFill>
-              </a:rPr>
-              <a:t>    - Most time in image preprocessing, not GPU compute</a:t>
-            </a:r>
-          </a:p>
-          <a:p>
-            <a:pPr>
-              <a:spcAft>
-                <a:spcPts val="400"/>
-              </a:spcAft>
-            </a:pPr>
-            <a:r>
-              <a:rPr sz="1600">
-                <a:solidFill>
-                  <a:srgbClr val="101010"/>
-                </a:solidFill>
-              </a:rPr>
-              <a:t>- Final loss: 1.32 (avg 1.10 over the run)</a:t>
+              <a:t>    –  The GPU spends most of its time waiting for the next batch.</a:t>
+            </a:r>
+          </a:p>
+          <a:p>
+            <a:pPr>
+              <a:spcAft>
+                <a:spcPts val="800"/>
+              </a:spcAft>
+            </a:pPr>
+            <a:r>
+              <a:rPr sz="2200">
+                <a:solidFill>
+                  <a:srgbClr val="101010"/>
+                </a:solidFill>
+              </a:rPr>
+              <a:t>•  Final loss: 1.32 (avg 1.10 across the run).</a:t>
+            </a:r>
+          </a:p>
+          <a:p>
+            <a:pPr>
+              <a:spcAft>
+                <a:spcPts val="800"/>
+              </a:spcAft>
+            </a:pPr>
+            <a:r>
+              <a:rPr sz="2200">
+                <a:solidFill>
+                  <a:srgbClr val="101010"/>
+                </a:solidFill>
+              </a:rPr>
+              <a:t>•  Reference for what 'no parallelism' looks like before we add anything.</a:t>
             </a:r>
           </a:p>
         </p:txBody>
@@ -8986,8 +7464,8 @@
         </p:nvSpPr>
         <p:spPr>
           <a:xfrm>
-            <a:off x="457200" y="320040"/>
-            <a:ext cx="11247120" cy="822960"/>
+            <a:off x="548640" y="365760"/>
+            <a:ext cx="11064240" cy="822960"/>
           </a:xfrm>
           <a:prstGeom prst="rect">
             <a:avLst/>
@@ -9002,12 +7480,12 @@
           <a:p>
             <a:pPr algn="l"/>
             <a:r>
-              <a:rPr sz="3600" b="0">
-                <a:solidFill>
-                  <a:srgbClr val="101010"/>
-                </a:solidFill>
-              </a:rPr>
-              <a:t>Baseline 2: DDP (2 nodes × 1 GPU)</a:t>
+              <a:rPr sz="3400" b="1">
+                <a:solidFill>
+                  <a:srgbClr val="101010"/>
+                </a:solidFill>
+              </a:rPr>
+              <a:t>Baseline 2: DDP across two nodes</a:t>
             </a:r>
           </a:p>
         </p:txBody>
@@ -9020,8 +7498,8 @@
         </p:nvSpPr>
         <p:spPr>
           <a:xfrm>
-            <a:off x="457200" y="1280160"/>
-            <a:ext cx="5760720" cy="5303520"/>
+            <a:off x="548640" y="1371600"/>
+            <a:ext cx="5852160" cy="5120640"/>
           </a:xfrm>
           <a:prstGeom prst="rect">
             <a:avLst/>
@@ -9029,188 +7507,143 @@
           <a:noFill/>
         </p:spPr>
         <p:txBody>
-          <a:bodyPr wrap="square">
+          <a:bodyPr wrap="square" anchor="ctr">
             <a:spAutoFit/>
           </a:bodyPr>
           <a:lstStyle/>
           <a:p>
             <a:pPr>
               <a:spcAft>
+                <a:spcPts val="800"/>
+              </a:spcAft>
+            </a:pPr>
+            <a:r>
+              <a:rPr sz="2000">
+                <a:solidFill>
+                  <a:srgbClr val="101010"/>
+                </a:solidFill>
+              </a:rPr>
+              <a:t>•  PyTorch DistributedDataParallel via torchrun --nnodes=2.</a:t>
+            </a:r>
+          </a:p>
+          <a:p>
+            <a:pPr lvl="1">
+              <a:spcAft>
                 <a:spcPts val="400"/>
               </a:spcAft>
             </a:pPr>
             <a:r>
-              <a:rPr sz="1600">
-                <a:solidFill>
-                  <a:srgbClr val="101010"/>
-                </a:solidFill>
-              </a:rPr>
-              <a:t>- PyTorch DistributedDataParallel via torchrun --nnodes=2</a:t>
-            </a:r>
-          </a:p>
-          <a:p>
-            <a:pPr>
+              <a:rPr sz="1700">
+                <a:solidFill>
+                  <a:srgbClr val="555555"/>
+                </a:solidFill>
+              </a:rPr>
+              <a:t>    –  DeepSpeed ZeRO-0 — no sharding, each rank holds the whole model.</a:t>
+            </a:r>
+          </a:p>
+          <a:p>
+            <a:pPr>
+              <a:spcAft>
+                <a:spcPts val="800"/>
+              </a:spcAft>
+            </a:pPr>
+            <a:r>
+              <a:rPr sz="2000">
+                <a:solidFill>
+                  <a:srgbClr val="101010"/>
+                </a:solidFill>
+              </a:rPr>
+              <a:t>•  Per-device batch 16, effective batch 32, 313 steps for one epoch.</a:t>
+            </a:r>
+          </a:p>
+          <a:p>
+            <a:pPr>
+              <a:spcAft>
+                <a:spcPts val="800"/>
+              </a:spcAft>
+            </a:pPr>
+            <a:r>
+              <a:rPr sz="2000">
+                <a:solidFill>
+                  <a:srgbClr val="101010"/>
+                </a:solidFill>
+              </a:rPr>
+              <a:t>•  Wall time: 74.8 min — about 1.3× faster than single GPU.</a:t>
+            </a:r>
+          </a:p>
+          <a:p>
+            <a:pPr>
+              <a:spcAft>
+                <a:spcPts val="800"/>
+              </a:spcAft>
+            </a:pPr>
+            <a:r>
+              <a:rPr sz="2000">
+                <a:solidFill>
+                  <a:srgbClr val="101010"/>
+                </a:solidFill>
+              </a:rPr>
+              <a:t>•  Throughput: 2.22 samples/sec.</a:t>
+            </a:r>
+          </a:p>
+          <a:p>
+            <a:pPr>
+              <a:spcAft>
+                <a:spcPts val="800"/>
+              </a:spcAft>
+            </a:pPr>
+            <a:r>
+              <a:rPr sz="2000">
+                <a:solidFill>
+                  <a:srgbClr val="101010"/>
+                </a:solidFill>
+              </a:rPr>
+              <a:t>•  Peak GPU memory: 30.7 GiB.</a:t>
+            </a:r>
+          </a:p>
+          <a:p>
+            <a:pPr>
+              <a:spcAft>
+                <a:spcPts val="800"/>
+              </a:spcAft>
+            </a:pPr>
+            <a:r>
+              <a:rPr sz="2000">
+                <a:solidFill>
+                  <a:srgbClr val="101010"/>
+                </a:solidFill>
+              </a:rPr>
+              <a:t>•  GPU utilization: 70.7%.</a:t>
+            </a:r>
+          </a:p>
+          <a:p>
+            <a:pPr lvl="1">
               <a:spcAft>
                 <a:spcPts val="400"/>
               </a:spcAft>
             </a:pPr>
             <a:r>
-              <a:rPr sz="1600">
-                <a:solidFill>
-                  <a:srgbClr val="101010"/>
-                </a:solidFill>
-              </a:rPr>
-              <a:t>- DeepSpeed ZeRO Stage 0 (no sharding) — pure DP</a:t>
-            </a:r>
-          </a:p>
-          <a:p>
-            <a:pPr lvl="1">
-              <a:spcAft>
-                <a:spcPts val="400"/>
-              </a:spcAft>
-            </a:pPr>
-            <a:r>
-              <a:rPr sz="1400">
+              <a:rPr sz="1700">
                 <a:solidFill>
                   <a:srgbClr val="555555"/>
                 </a:solidFill>
               </a:rPr>
-              <a:t>    - Each rank holds full model; AllReduce LoRA grads only</a:t>
-            </a:r>
-          </a:p>
-          <a:p>
-            <a:pPr>
-              <a:spcAft>
-                <a:spcPts val="400"/>
-              </a:spcAft>
-            </a:pPr>
-            <a:r>
-              <a:rPr sz="1600">
-                <a:solidFill>
-                  <a:srgbClr val="101010"/>
-                </a:solidFill>
-              </a:rPr>
-              <a:t>- per_device_batch=16, accum=1, effective batch=32</a:t>
-            </a:r>
-          </a:p>
-          <a:p>
-            <a:pPr lvl="1">
-              <a:spcAft>
-                <a:spcPts val="400"/>
-              </a:spcAft>
-            </a:pPr>
-            <a:r>
-              <a:rPr sz="1400">
-                <a:solidFill>
-                  <a:srgbClr val="555555"/>
-                </a:solidFill>
-              </a:rPr>
-              <a:t>    - 313 training steps for 10K samples, 1 epoch</a:t>
-            </a:r>
-          </a:p>
-          <a:p>
-            <a:pPr>
-              <a:spcAft>
-                <a:spcPts val="400"/>
-              </a:spcAft>
-            </a:pPr>
-            <a:r>
-              <a:rPr sz="1600">
-                <a:solidFill>
-                  <a:srgbClr val="101010"/>
-                </a:solidFill>
-              </a:rPr>
-              <a:t>- Wall time: 74.8 min (4491 s)</a:t>
-            </a:r>
-          </a:p>
-          <a:p>
-            <a:pPr>
-              <a:spcAft>
-                <a:spcPts val="400"/>
-              </a:spcAft>
-            </a:pPr>
-            <a:r>
-              <a:rPr sz="1600">
-                <a:solidFill>
-                  <a:srgbClr val="101010"/>
-                </a:solidFill>
-              </a:rPr>
-              <a:t>- Throughput: 2.22 samples/sec</a:t>
-            </a:r>
-          </a:p>
-          <a:p>
-            <a:pPr lvl="1">
-              <a:spcAft>
-                <a:spcPts val="400"/>
-              </a:spcAft>
-            </a:pPr>
-            <a:r>
-              <a:rPr sz="1400">
-                <a:solidFill>
-                  <a:srgbClr val="555555"/>
-                </a:solidFill>
-              </a:rPr>
-              <a:t>    - vs 1-GPU @ batch 1: ~1.28× per-sample, ~10× per-step</a:t>
-            </a:r>
-          </a:p>
-          <a:p>
-            <a:pPr>
-              <a:spcAft>
-                <a:spcPts val="400"/>
-              </a:spcAft>
-            </a:pPr>
-            <a:r>
-              <a:rPr sz="1600">
-                <a:solidFill>
-                  <a:srgbClr val="101010"/>
-                </a:solidFill>
-              </a:rPr>
-              <a:t>- Peak GPU memory: 30.7 GiB</a:t>
-            </a:r>
-          </a:p>
-          <a:p>
-            <a:pPr>
-              <a:spcAft>
-                <a:spcPts val="400"/>
-              </a:spcAft>
-            </a:pPr>
-            <a:r>
-              <a:rPr sz="1600">
-                <a:solidFill>
-                  <a:srgbClr val="101010"/>
-                </a:solidFill>
-              </a:rPr>
-              <a:t>- Average GPU utilization: 70.7%</a:t>
-            </a:r>
-          </a:p>
-          <a:p>
-            <a:pPr lvl="1">
-              <a:spcAft>
-                <a:spcPts val="400"/>
-              </a:spcAft>
-            </a:pPr>
-            <a:r>
-              <a:rPr sz="1400">
-                <a:solidFill>
-                  <a:srgbClr val="555555"/>
-                </a:solidFill>
-              </a:rPr>
-              <a:t>    - Synchronization stalls on cross-node Ethernet visible</a:t>
-            </a:r>
-          </a:p>
-          <a:p>
-            <a:pPr>
-              <a:spcAft>
-                <a:spcPts val="400"/>
-              </a:spcAft>
-            </a:pPr>
-            <a:r>
-              <a:rPr sz="1600">
-                <a:solidFill>
-                  <a:srgbClr val="101010"/>
-                </a:solidFill>
-              </a:rPr>
-              <a:t>- Final loss: 1.04 (avg 1.18)</a:t>
+              <a:t>    –  Visible AllReduce stalls when both nodes wait on cross-node Ethernet.</a:t>
+            </a:r>
+          </a:p>
+          <a:p>
+            <a:pPr>
+              <a:spcAft>
+                <a:spcPts val="800"/>
+              </a:spcAft>
+            </a:pPr>
+            <a:r>
+              <a:rPr sz="2000">
+                <a:solidFill>
+                  <a:srgbClr val="101010"/>
+                </a:solidFill>
+              </a:rPr>
+              <a:t>•  Final loss: 1.04. This is the reference everything else is compared against.</a:t>
             </a:r>
           </a:p>
         </p:txBody>
@@ -9231,8 +7664,8 @@
         </p:blipFill>
         <p:spPr>
           <a:xfrm>
-            <a:off x="6400800" y="1554480"/>
-            <a:ext cx="5303520" cy="3314700"/>
+            <a:off x="6766560" y="1645920"/>
+            <a:ext cx="4937760" cy="3086100"/>
           </a:xfrm>
           <a:prstGeom prst="rect">
             <a:avLst/>
@@ -9265,8 +7698,8 @@
         </p:nvSpPr>
         <p:spPr>
           <a:xfrm>
-            <a:off x="457200" y="320040"/>
-            <a:ext cx="11247120" cy="822960"/>
+            <a:off x="548640" y="365760"/>
+            <a:ext cx="11064240" cy="822960"/>
           </a:xfrm>
           <a:prstGeom prst="rect">
             <a:avLst/>
@@ -9281,12 +7714,12 @@
           <a:p>
             <a:pPr algn="l"/>
             <a:r>
-              <a:rPr sz="3600" b="0">
-                <a:solidFill>
-                  <a:srgbClr val="101010"/>
-                </a:solidFill>
-              </a:rPr>
-              <a:t>DDP — GPU utilization &amp; memory</a:t>
+              <a:rPr sz="3400" b="1">
+                <a:solidFill>
+                  <a:srgbClr val="101010"/>
+                </a:solidFill>
+              </a:rPr>
+              <a:t>DDP — GPU utilization over time</a:t>
             </a:r>
           </a:p>
         </p:txBody>
@@ -9299,8 +7732,8 @@
         </p:nvSpPr>
         <p:spPr>
           <a:xfrm>
-            <a:off x="457200" y="1280160"/>
-            <a:ext cx="5760720" cy="5303520"/>
+            <a:off x="548640" y="1051560"/>
+            <a:ext cx="11064240" cy="365760"/>
           </a:xfrm>
           <a:prstGeom prst="rect">
             <a:avLst/>
@@ -9308,68 +7741,18 @@
           <a:noFill/>
         </p:spPr>
         <p:txBody>
-          <a:bodyPr wrap="square">
+          <a:bodyPr wrap="none">
             <a:spAutoFit/>
           </a:bodyPr>
           <a:lstStyle/>
           <a:p>
-            <a:pPr>
-              <a:spcAft>
-                <a:spcPts val="400"/>
-              </a:spcAft>
-            </a:pPr>
-            <a:r>
-              <a:rPr sz="1600">
-                <a:solidFill>
-                  <a:srgbClr val="101010"/>
-                </a:solidFill>
-              </a:rPr>
-              <a:t>- Both nodes track each other closely (DP is symmetric)</a:t>
-            </a:r>
-          </a:p>
-          <a:p>
-            <a:pPr>
-              <a:spcAft>
-                <a:spcPts val="400"/>
-              </a:spcAft>
-            </a:pPr>
-            <a:r>
-              <a:rPr sz="1600">
-                <a:solidFill>
-                  <a:srgbClr val="101010"/>
-                </a:solidFill>
-              </a:rPr>
-              <a:t>- Util oscillates ~70% during compute, drops on AllReduce</a:t>
-            </a:r>
-          </a:p>
-          <a:p>
-            <a:pPr lvl="1">
-              <a:spcAft>
-                <a:spcPts val="400"/>
-              </a:spcAft>
-            </a:pPr>
-            <a:r>
-              <a:rPr sz="1400">
+            <a:r>
+              <a:rPr sz="1800" i="1">
                 <a:solidFill>
                   <a:srgbClr val="555555"/>
                 </a:solidFill>
               </a:rPr>
-              <a:t>    - Cross-node Ethernet AllReduce dominates the gap</a:t>
-            </a:r>
-          </a:p>
-          <a:p>
-            <a:pPr>
-              <a:spcAft>
-                <a:spcPts val="400"/>
-              </a:spcAft>
-            </a:pPr>
-            <a:r>
-              <a:rPr sz="1600">
-                <a:solidFill>
-                  <a:srgbClr val="101010"/>
-                </a:solidFill>
-              </a:rPr>
-              <a:t>- Memory steady ~30 GiB after warmup</a:t>
+              <a:t>Sharp drops on every step are AllReduce stalls — the cost of cross-node Ethernet.</a:t>
             </a:r>
           </a:p>
         </p:txBody>
@@ -9390,8 +7773,8 @@
         </p:blipFill>
         <p:spPr>
           <a:xfrm>
-            <a:off x="6400800" y="1371600"/>
-            <a:ext cx="5303520" cy="3314700"/>
+            <a:off x="1979676" y="1371600"/>
+            <a:ext cx="8229600" cy="5143500"/>
           </a:xfrm>
           <a:prstGeom prst="rect">
             <a:avLst/>
@@ -9424,8 +7807,8 @@
         </p:nvSpPr>
         <p:spPr>
           <a:xfrm>
-            <a:off x="457200" y="2926080"/>
-            <a:ext cx="11247120" cy="1097280"/>
+            <a:off x="548640" y="2834640"/>
+            <a:ext cx="11064240" cy="1280160"/>
           </a:xfrm>
           <a:prstGeom prst="rect">
             <a:avLst/>
@@ -9440,7 +7823,7 @@
           <a:p>
             <a:pPr algn="ctr"/>
             <a:r>
-              <a:rPr sz="4800" b="0">
+              <a:rPr sz="5400" b="0">
                 <a:solidFill>
                   <a:srgbClr val="101010"/>
                 </a:solidFill>

--- a/presentation/ML710_LLaVA_Parallelism.pptx
+++ b/presentation/ML710_LLaVA_Parallelism.pptx
@@ -3244,7 +3244,7 @@
                   <a:srgbClr val="101010"/>
                 </a:solidFill>
               </a:rPr>
-              <a:t>How we built it (Ghallab)</a:t>
+              <a:t>Finding a split that fits</a:t>
             </a:r>
           </a:p>
         </p:txBody>
@@ -3282,7 +3282,22 @@
                   <a:srgbClr val="101010"/>
                 </a:solidFill>
               </a:rPr>
-              <a:t>•  Manual two-stage pipeline. We didn't use torchgpipe or DeepSpeed-Pipeline.</a:t>
+              <a:t>•  Picking the layer index k matters more than expected.</a:t>
+            </a:r>
+          </a:p>
+          <a:p>
+            <a:pPr>
+              <a:spcAft>
+                <a:spcPts val="800"/>
+              </a:spcAft>
+            </a:pPr>
+            <a:r>
+              <a:rPr sz="2200">
+                <a:solidFill>
+                  <a:srgbClr val="101010"/>
+                </a:solidFill>
+              </a:rPr>
+              <a:t>•  k = 16 (50/50 by layer count): rank 0 OOMs in the first forward.</a:t>
             </a:r>
           </a:p>
           <a:p>
@@ -3297,7 +3312,22 @@
                   <a:srgbClr val="555555"/>
                 </a:solidFill>
               </a:rPr>
-              <a:t>    –  Custom training loop: LLaVA/llava/train/train_pipe_dist.py (~520 lines).</a:t>
+              <a:t>    –  Vision tower + image features sit on rank 0. With layers 0..15 it hits 31.4 GiB — over the 32 GiB card.</a:t>
+            </a:r>
+          </a:p>
+          <a:p>
+            <a:pPr>
+              <a:spcAft>
+                <a:spcPts val="800"/>
+              </a:spcAft>
+            </a:pPr>
+            <a:r>
+              <a:rPr sz="2200">
+                <a:solidFill>
+                  <a:srgbClr val="101010"/>
+                </a:solidFill>
+              </a:rPr>
+              <a:t>•  k = 8 (push work to rank 1): rank 1 OOMs.</a:t>
             </a:r>
           </a:p>
           <a:p>
@@ -3312,7 +3342,7 @@
                   <a:srgbClr val="555555"/>
                 </a:solidFill>
               </a:rPr>
-              <a:t>    –  Gloo backend for cross-node send/recv. NCCL had ordering issues with our mixed-dtype activations.</a:t>
+              <a:t>    –  LM head + final norm + layers 8..31 hit 31.0 GiB.</a:t>
             </a:r>
           </a:p>
           <a:p>
@@ -3327,7 +3357,7 @@
                   <a:srgbClr val="101010"/>
                 </a:solidFill>
               </a:rPr>
-              <a:t>•  The model is cut at decoder layer k. There are 32 decoder layers in Vicuna-7B.</a:t>
+              <a:t>•  k = 12 with microbatch 1 + grad accum 16: both ranks fit.</a:t>
             </a:r>
           </a:p>
           <a:p>
@@ -3342,37 +3372,7 @@
                   <a:srgbClr val="555555"/>
                 </a:solidFill>
               </a:rPr>
-              <a:t>    –  Rank 0 holds the vision tower (frozen), the MLP projection, and decoder layers 0..k-1.</a:t>
-            </a:r>
-          </a:p>
-          <a:p>
-            <a:pPr lvl="1">
-              <a:spcAft>
-                <a:spcPts val="400"/>
-              </a:spcAft>
-            </a:pPr>
-            <a:r>
-              <a:rPr sz="1900">
-                <a:solidFill>
-                  <a:srgbClr val="555555"/>
-                </a:solidFill>
-              </a:rPr>
-              <a:t>    –  Rank 1 holds layers k..31, the final norm, the LM head, and computes loss.</a:t>
-            </a:r>
-          </a:p>
-          <a:p>
-            <a:pPr lvl="1">
-              <a:spcAft>
-                <a:spcPts val="400"/>
-              </a:spcAft>
-            </a:pPr>
-            <a:r>
-              <a:rPr sz="1900">
-                <a:solidFill>
-                  <a:srgbClr val="555555"/>
-                </a:solidFill>
-              </a:rPr>
-              <a:t>    –  Activations flow forward, gradients flow back, by hand.</a:t>
+              <a:t>    –  Rank 1 ≈ 31.4 GiB, rank 0 ≈ 28 GiB. Run completes 625/625 steps.</a:t>
             </a:r>
           </a:p>
           <a:p>
@@ -3387,7 +3387,7 @@
                   <a:srgbClr val="101010"/>
                 </a:solidFill>
               </a:rPr>
-              <a:t>•  Gradient accumulation 16, microbatch 1 → effective batch 16. LoRA is added on each rank's local layers.</a:t>
+              <a:t>•  Lesson: layer count is a poor proxy for memory cost. The vision tower and LM head are heavier than they look.</a:t>
             </a:r>
           </a:p>
         </p:txBody>
@@ -3439,7 +3439,7 @@
                   <a:srgbClr val="101010"/>
                 </a:solidFill>
               </a:rPr>
-              <a:t>Finding a split that fits</a:t>
+              <a:t>Pipeline — results</a:t>
             </a:r>
           </a:p>
         </p:txBody>
@@ -3453,7 +3453,7 @@
         <p:spPr>
           <a:xfrm>
             <a:off x="548640" y="1371600"/>
-            <a:ext cx="11064240" cy="5120640"/>
+            <a:ext cx="5852160" cy="5120640"/>
           </a:xfrm>
           <a:prstGeom prst="rect">
             <a:avLst/>
@@ -3472,27 +3472,72 @@
               </a:spcAft>
             </a:pPr>
             <a:r>
-              <a:rPr sz="2200">
-                <a:solidFill>
-                  <a:srgbClr val="101010"/>
-                </a:solidFill>
-              </a:rPr>
-              <a:t>•  Picking the layer index k matters more than expected.</a:t>
-            </a:r>
-          </a:p>
-          <a:p>
-            <a:pPr>
-              <a:spcAft>
-                <a:spcPts val="800"/>
-              </a:spcAft>
-            </a:pPr>
-            <a:r>
-              <a:rPr sz="2200">
-                <a:solidFill>
-                  <a:srgbClr val="101010"/>
-                </a:solidFill>
-              </a:rPr>
-              <a:t>•  k = 16 (50/50 by layer count): rank 0 OOMs in the first forward.</a:t>
+              <a:rPr sz="1800">
+                <a:solidFill>
+                  <a:srgbClr val="101010"/>
+                </a:solidFill>
+              </a:rPr>
+              <a:t>•  Wall time: 72.1 min. Almost identical to DDP.</a:t>
+            </a:r>
+          </a:p>
+          <a:p>
+            <a:pPr>
+              <a:spcAft>
+                <a:spcPts val="800"/>
+              </a:spcAft>
+            </a:pPr>
+            <a:r>
+              <a:rPr sz="1800">
+                <a:solidFill>
+                  <a:srgbClr val="101010"/>
+                </a:solidFill>
+              </a:rPr>
+              <a:t>•  Throughput: 2.31 samples/sec — 1.04× DDP. Barely faster.</a:t>
+            </a:r>
+          </a:p>
+          <a:p>
+            <a:pPr>
+              <a:spcAft>
+                <a:spcPts val="800"/>
+              </a:spcAft>
+            </a:pPr>
+            <a:r>
+              <a:rPr sz="1800">
+                <a:solidFill>
+                  <a:srgbClr val="101010"/>
+                </a:solidFill>
+              </a:rPr>
+              <a:t>•  Effective batch 16, half of DDP, so fewer steps per epoch.</a:t>
+            </a:r>
+          </a:p>
+          <a:p>
+            <a:pPr>
+              <a:spcAft>
+                <a:spcPts val="800"/>
+              </a:spcAft>
+            </a:pPr>
+            <a:r>
+              <a:rPr sz="1800">
+                <a:solidFill>
+                  <a:srgbClr val="101010"/>
+                </a:solidFill>
+              </a:rPr>
+              <a:t>•  Peak GPU memory: 31.4 GiB on the heavier rank.</a:t>
+            </a:r>
+          </a:p>
+          <a:p>
+            <a:pPr>
+              <a:spcAft>
+                <a:spcPts val="800"/>
+              </a:spcAft>
+            </a:pPr>
+            <a:r>
+              <a:rPr sz="1800">
+                <a:solidFill>
+                  <a:srgbClr val="101010"/>
+                </a:solidFill>
+              </a:rPr>
+              <a:t>•  GPU utilization is uneven: rank 0 at 34%, rank 1 at 56%.</a:t>
             </a:r>
           </a:p>
           <a:p>
@@ -3502,27 +3547,12 @@
               </a:spcAft>
             </a:pPr>
             <a:r>
-              <a:rPr sz="1900">
+              <a:rPr sz="1500">
                 <a:solidFill>
                   <a:srgbClr val="555555"/>
                 </a:solidFill>
               </a:rPr>
-              <a:t>    –  Vision tower + image features sit on rank 0. With layers 0..15 it hits 31.4 GiB — over the 32 GiB card.</a:t>
-            </a:r>
-          </a:p>
-          <a:p>
-            <a:pPr>
-              <a:spcAft>
-                <a:spcPts val="800"/>
-              </a:spcAft>
-            </a:pPr>
-            <a:r>
-              <a:rPr sz="2200">
-                <a:solidFill>
-                  <a:srgbClr val="101010"/>
-                </a:solidFill>
-              </a:rPr>
-              <a:t>•  k = 8 (push work to rank 1): rank 1 OOMs.</a:t>
+              <a:t>    –  Whichever rank finishes its layers first sits idle until the other catches up.</a:t>
             </a:r>
           </a:p>
           <a:p>
@@ -3532,61 +3562,70 @@
               </a:spcAft>
             </a:pPr>
             <a:r>
-              <a:rPr sz="1900">
+              <a:rPr sz="1500">
                 <a:solidFill>
                   <a:srgbClr val="555555"/>
                 </a:solidFill>
               </a:rPr>
-              <a:t>    –  LM head + final norm + layers 8..31 hit 31.0 GiB.</a:t>
-            </a:r>
-          </a:p>
-          <a:p>
-            <a:pPr>
-              <a:spcAft>
-                <a:spcPts val="800"/>
-              </a:spcAft>
-            </a:pPr>
-            <a:r>
-              <a:rPr sz="2200">
-                <a:solidFill>
-                  <a:srgbClr val="101010"/>
-                </a:solidFill>
-              </a:rPr>
-              <a:t>•  k = 12 with microbatch 1 + grad accum 16: both ranks fit.</a:t>
-            </a:r>
-          </a:p>
-          <a:p>
-            <a:pPr lvl="1">
-              <a:spcAft>
-                <a:spcPts val="400"/>
-              </a:spcAft>
-            </a:pPr>
-            <a:r>
-              <a:rPr sz="1900">
-                <a:solidFill>
-                  <a:srgbClr val="555555"/>
-                </a:solidFill>
-              </a:rPr>
-              <a:t>    –  Rank 1 ≈ 31.4 GiB, rank 0 ≈ 28 GiB. Run completes 625/625 steps.</a:t>
-            </a:r>
-          </a:p>
-          <a:p>
-            <a:pPr>
-              <a:spcAft>
-                <a:spcPts val="800"/>
-              </a:spcAft>
-            </a:pPr>
-            <a:r>
-              <a:rPr sz="2200">
-                <a:solidFill>
-                  <a:srgbClr val="101010"/>
-                </a:solidFill>
-              </a:rPr>
-              <a:t>•  Lesson: layer count is a poor proxy for memory cost. The vision tower and LM head are heavier than they look.</a:t>
-            </a:r>
-          </a:p>
-        </p:txBody>
-      </p:sp>
+              <a:t>    –  Gloo is much slower than NCCL, so the comm gap is wider.</a:t>
+            </a:r>
+          </a:p>
+          <a:p>
+            <a:pPr>
+              <a:spcAft>
+                <a:spcPts val="800"/>
+              </a:spcAft>
+            </a:pPr>
+            <a:r>
+              <a:rPr sz="1800">
+                <a:solidFill>
+                  <a:srgbClr val="101010"/>
+                </a:solidFill>
+              </a:rPr>
+              <a:t>•  Final loss: 1.57 — higher than DDP because of the smaller effective batch.</a:t>
+            </a:r>
+          </a:p>
+          <a:p>
+            <a:pPr>
+              <a:spcAft>
+                <a:spcPts val="800"/>
+              </a:spcAft>
+            </a:pPr>
+            <a:r>
+              <a:rPr sz="1800">
+                <a:solidFill>
+                  <a:srgbClr val="101010"/>
+                </a:solidFill>
+              </a:rPr>
+              <a:t>•  Pipeline made the model fit. It did not make it faster.</a:t>
+            </a:r>
+          </a:p>
+        </p:txBody>
+      </p:sp>
+      <p:pic>
+        <p:nvPicPr>
+          <p:cNvPr id="4" name="Picture 3" descr="gpu_utilization_curve.png"/>
+          <p:cNvPicPr>
+            <a:picLocks noChangeAspect="1"/>
+          </p:cNvPicPr>
+          <p:nvPr/>
+        </p:nvPicPr>
+        <p:blipFill>
+          <a:blip r:embed="rId2"/>
+          <a:stretch>
+            <a:fillRect/>
+          </a:stretch>
+        </p:blipFill>
+        <p:spPr>
+          <a:xfrm>
+            <a:off x="6766560" y="1828800"/>
+            <a:ext cx="4937760" cy="3086100"/>
+          </a:xfrm>
+          <a:prstGeom prst="rect">
+            <a:avLst/>
+          </a:prstGeom>
+        </p:spPr>
+      </p:pic>
     </p:spTree>
   </p:cSld>
   <p:clrMapOvr>
@@ -3613,8 +3652,8 @@
         </p:nvSpPr>
         <p:spPr>
           <a:xfrm>
-            <a:off x="548640" y="365760"/>
-            <a:ext cx="11064240" cy="822960"/>
+            <a:off x="548640" y="2834640"/>
+            <a:ext cx="11064240" cy="1280160"/>
           </a:xfrm>
           <a:prstGeom prst="rect">
             <a:avLst/>
@@ -3627,200 +3666,18 @@
           </a:bodyPr>
           <a:lstStyle/>
           <a:p>
-            <a:pPr algn="l"/>
-            <a:r>
-              <a:rPr sz="3400" b="1">
-                <a:solidFill>
-                  <a:srgbClr val="101010"/>
-                </a:solidFill>
-              </a:rPr>
-              <a:t>Pipeline — results</a:t>
-            </a:r>
-          </a:p>
-        </p:txBody>
-      </p:sp>
-      <p:sp>
-        <p:nvSpPr>
-          <p:cNvPr id="3" name="TextBox 2"/>
-          <p:cNvSpPr txBox="1"/>
-          <p:nvPr/>
-        </p:nvSpPr>
-        <p:spPr>
-          <a:xfrm>
-            <a:off x="548640" y="1371600"/>
-            <a:ext cx="5852160" cy="5120640"/>
-          </a:xfrm>
-          <a:prstGeom prst="rect">
-            <a:avLst/>
-          </a:prstGeom>
-          <a:noFill/>
-        </p:spPr>
-        <p:txBody>
-          <a:bodyPr wrap="square" anchor="ctr">
-            <a:spAutoFit/>
-          </a:bodyPr>
-          <a:lstStyle/>
-          <a:p>
-            <a:pPr>
-              <a:spcAft>
-                <a:spcPts val="800"/>
-              </a:spcAft>
-            </a:pPr>
-            <a:r>
-              <a:rPr sz="1800">
-                <a:solidFill>
-                  <a:srgbClr val="101010"/>
-                </a:solidFill>
-              </a:rPr>
-              <a:t>•  Wall time: 72.1 min. Almost identical to DDP.</a:t>
-            </a:r>
-          </a:p>
-          <a:p>
-            <a:pPr>
-              <a:spcAft>
-                <a:spcPts val="800"/>
-              </a:spcAft>
-            </a:pPr>
-            <a:r>
-              <a:rPr sz="1800">
-                <a:solidFill>
-                  <a:srgbClr val="101010"/>
-                </a:solidFill>
-              </a:rPr>
-              <a:t>•  Throughput: 2.31 samples/sec — 1.04× DDP. Barely faster.</a:t>
-            </a:r>
-          </a:p>
-          <a:p>
-            <a:pPr>
-              <a:spcAft>
-                <a:spcPts val="800"/>
-              </a:spcAft>
-            </a:pPr>
-            <a:r>
-              <a:rPr sz="1800">
-                <a:solidFill>
-                  <a:srgbClr val="101010"/>
-                </a:solidFill>
-              </a:rPr>
-              <a:t>•  Effective batch 16, half of DDP, so fewer steps per epoch.</a:t>
-            </a:r>
-          </a:p>
-          <a:p>
-            <a:pPr>
-              <a:spcAft>
-                <a:spcPts val="800"/>
-              </a:spcAft>
-            </a:pPr>
-            <a:r>
-              <a:rPr sz="1800">
-                <a:solidFill>
-                  <a:srgbClr val="101010"/>
-                </a:solidFill>
-              </a:rPr>
-              <a:t>•  Peak GPU memory: 31.4 GiB on the heavier rank.</a:t>
-            </a:r>
-          </a:p>
-          <a:p>
-            <a:pPr>
-              <a:spcAft>
-                <a:spcPts val="800"/>
-              </a:spcAft>
-            </a:pPr>
-            <a:r>
-              <a:rPr sz="1800">
-                <a:solidFill>
-                  <a:srgbClr val="101010"/>
-                </a:solidFill>
-              </a:rPr>
-              <a:t>•  GPU utilization is uneven: rank 0 at 34%, rank 1 at 56%.</a:t>
-            </a:r>
-          </a:p>
-          <a:p>
-            <a:pPr lvl="1">
-              <a:spcAft>
-                <a:spcPts val="400"/>
-              </a:spcAft>
-            </a:pPr>
-            <a:r>
-              <a:rPr sz="1500">
-                <a:solidFill>
-                  <a:srgbClr val="555555"/>
-                </a:solidFill>
-              </a:rPr>
-              <a:t>    –  Whichever rank finishes its layers first sits idle until the other catches up.</a:t>
-            </a:r>
-          </a:p>
-          <a:p>
-            <a:pPr lvl="1">
-              <a:spcAft>
-                <a:spcPts val="400"/>
-              </a:spcAft>
-            </a:pPr>
-            <a:r>
-              <a:rPr sz="1500">
-                <a:solidFill>
-                  <a:srgbClr val="555555"/>
-                </a:solidFill>
-              </a:rPr>
-              <a:t>    –  Gloo is much slower than NCCL, so the comm gap is wider.</a:t>
-            </a:r>
-          </a:p>
-          <a:p>
-            <a:pPr>
-              <a:spcAft>
-                <a:spcPts val="800"/>
-              </a:spcAft>
-            </a:pPr>
-            <a:r>
-              <a:rPr sz="1800">
-                <a:solidFill>
-                  <a:srgbClr val="101010"/>
-                </a:solidFill>
-              </a:rPr>
-              <a:t>•  Final loss: 1.57 — higher than DDP because of the smaller effective batch.</a:t>
-            </a:r>
-          </a:p>
-          <a:p>
-            <a:pPr>
-              <a:spcAft>
-                <a:spcPts val="800"/>
-              </a:spcAft>
-            </a:pPr>
-            <a:r>
-              <a:rPr sz="1800">
-                <a:solidFill>
-                  <a:srgbClr val="101010"/>
-                </a:solidFill>
-              </a:rPr>
-              <a:t>•  Pipeline made the model fit. It did not make it faster.</a:t>
-            </a:r>
-          </a:p>
-        </p:txBody>
-      </p:sp>
-      <p:pic>
-        <p:nvPicPr>
-          <p:cNvPr id="4" name="Picture 3" descr="gpu_utilization_curve.png"/>
-          <p:cNvPicPr>
-            <a:picLocks noChangeAspect="1"/>
-          </p:cNvPicPr>
-          <p:nvPr/>
-        </p:nvPicPr>
-        <p:blipFill>
-          <a:blip r:embed="rId2"/>
-          <a:stretch>
-            <a:fillRect/>
-          </a:stretch>
-        </p:blipFill>
-        <p:spPr>
-          <a:xfrm>
-            <a:off x="6766560" y="1828800"/>
-            <a:ext cx="4937760" cy="3086100"/>
-          </a:xfrm>
-          <a:prstGeom prst="rect">
-            <a:avLst/>
-          </a:prstGeom>
-        </p:spPr>
-      </p:pic>
+            <a:pPr algn="ctr"/>
+            <a:r>
+              <a:rPr sz="5400" b="0">
+                <a:solidFill>
+                  <a:srgbClr val="101010"/>
+                </a:solidFill>
+              </a:rPr>
+              <a:t>DeepSpeed ZeRO-1 / ZeRO-2</a:t>
+            </a:r>
+          </a:p>
+        </p:txBody>
+      </p:sp>
     </p:spTree>
   </p:cSld>
   <p:clrMapOvr>
@@ -3847,8 +3704,8 @@
         </p:nvSpPr>
         <p:spPr>
           <a:xfrm>
-            <a:off x="548640" y="2834640"/>
-            <a:ext cx="11064240" cy="1280160"/>
+            <a:off x="548640" y="365760"/>
+            <a:ext cx="11064240" cy="822960"/>
           </a:xfrm>
           <a:prstGeom prst="rect">
             <a:avLst/>
@@ -3861,14 +3718,187 @@
           </a:bodyPr>
           <a:lstStyle/>
           <a:p>
-            <a:pPr algn="ctr"/>
-            <a:r>
-              <a:rPr sz="5400" b="0">
-                <a:solidFill>
-                  <a:srgbClr val="101010"/>
-                </a:solidFill>
-              </a:rPr>
-              <a:t>DeepSpeed ZeRO-2</a:t>
+            <a:pPr algn="l"/>
+            <a:r>
+              <a:rPr sz="3400" b="1">
+                <a:solidFill>
+                  <a:srgbClr val="101010"/>
+                </a:solidFill>
+              </a:rPr>
+              <a:t>ZeRO-1 vs ZeRO-2 (Omar)</a:t>
+            </a:r>
+          </a:p>
+        </p:txBody>
+      </p:sp>
+      <p:sp>
+        <p:nvSpPr>
+          <p:cNvPr id="3" name="TextBox 2"/>
+          <p:cNvSpPr txBox="1"/>
+          <p:nvPr/>
+        </p:nvSpPr>
+        <p:spPr>
+          <a:xfrm>
+            <a:off x="548640" y="1371600"/>
+            <a:ext cx="11064240" cy="5120640"/>
+          </a:xfrm>
+          <a:prstGeom prst="rect">
+            <a:avLst/>
+          </a:prstGeom>
+          <a:noFill/>
+        </p:spPr>
+        <p:txBody>
+          <a:bodyPr wrap="square" anchor="ctr">
+            <a:spAutoFit/>
+          </a:bodyPr>
+          <a:lstStyle/>
+          <a:p>
+            <a:pPr>
+              <a:spcAft>
+                <a:spcPts val="800"/>
+              </a:spcAft>
+            </a:pPr>
+            <a:r>
+              <a:rPr sz="2000">
+                <a:solidFill>
+                  <a:srgbClr val="101010"/>
+                </a:solidFill>
+              </a:rPr>
+              <a:t>•  Both are data parallelism with sharded state. The difference is what gets sharded.</a:t>
+            </a:r>
+          </a:p>
+          <a:p>
+            <a:pPr>
+              <a:spcAft>
+                <a:spcPts val="800"/>
+              </a:spcAft>
+            </a:pPr>
+            <a:r>
+              <a:rPr sz="2000">
+                <a:solidFill>
+                  <a:srgbClr val="101010"/>
+                </a:solidFill>
+              </a:rPr>
+              <a:t>•  ZeRO-1:</a:t>
+            </a:r>
+          </a:p>
+          <a:p>
+            <a:pPr lvl="1">
+              <a:spcAft>
+                <a:spcPts val="400"/>
+              </a:spcAft>
+            </a:pPr>
+            <a:r>
+              <a:rPr sz="1700">
+                <a:solidFill>
+                  <a:srgbClr val="555555"/>
+                </a:solidFill>
+              </a:rPr>
+              <a:t>    –  Optimizer states sharded. Gradients still AllReduce'd (like DDP), parameters replicated.</a:t>
+            </a:r>
+          </a:p>
+          <a:p>
+            <a:pPr lvl="1">
+              <a:spcAft>
+                <a:spcPts val="400"/>
+              </a:spcAft>
+            </a:pPr>
+            <a:r>
+              <a:rPr sz="1700">
+                <a:solidFill>
+                  <a:srgbClr val="555555"/>
+                </a:solidFill>
+              </a:rPr>
+              <a:t>    –  After the optimizer step, AllGather to put updated parameters back on every rank.</a:t>
+            </a:r>
+          </a:p>
+          <a:p>
+            <a:pPr>
+              <a:spcAft>
+                <a:spcPts val="800"/>
+              </a:spcAft>
+            </a:pPr>
+            <a:r>
+              <a:rPr sz="2000">
+                <a:solidFill>
+                  <a:srgbClr val="101010"/>
+                </a:solidFill>
+              </a:rPr>
+              <a:t>•  ZeRO-2 adds gradient sharding via ReduceScatter:</a:t>
+            </a:r>
+          </a:p>
+          <a:p>
+            <a:pPr lvl="1">
+              <a:spcAft>
+                <a:spcPts val="400"/>
+              </a:spcAft>
+            </a:pPr>
+            <a:r>
+              <a:rPr sz="1700">
+                <a:solidFill>
+                  <a:srgbClr val="555555"/>
+                </a:solidFill>
+              </a:rPr>
+              <a:t>    –  Gradients land on their owner-rank shards directly, no AllReduce.</a:t>
+            </a:r>
+          </a:p>
+          <a:p>
+            <a:pPr lvl="1">
+              <a:spcAft>
+                <a:spcPts val="400"/>
+              </a:spcAft>
+            </a:pPr>
+            <a:r>
+              <a:rPr sz="1700">
+                <a:solidFill>
+                  <a:srgbClr val="555555"/>
+                </a:solidFill>
+              </a:rPr>
+              <a:t>    –  Each rank takes one optimizer step on its shard, then AllGather params back.</a:t>
+            </a:r>
+          </a:p>
+          <a:p>
+            <a:pPr lvl="1">
+              <a:spcAft>
+                <a:spcPts val="400"/>
+              </a:spcAft>
+            </a:pPr>
+            <a:r>
+              <a:rPr sz="1700">
+                <a:solidFill>
+                  <a:srgbClr val="555555"/>
+                </a:solidFill>
+              </a:rPr>
+              <a:t>    –  Comm volume per step is roughly 1.5× the model size — same as ZeRO-1, different schedule.</a:t>
+            </a:r>
+          </a:p>
+          <a:p>
+            <a:pPr>
+              <a:spcAft>
+                <a:spcPts val="800"/>
+              </a:spcAft>
+            </a:pPr>
+            <a:r>
+              <a:rPr sz="2000">
+                <a:solidFill>
+                  <a:srgbClr val="101010"/>
+                </a:solidFill>
+              </a:rPr>
+              <a:t>•  On a LoRA workload, both win mostly from DeepSpeed's bucketed async overlap, not from the sharding itself.</a:t>
+            </a:r>
+          </a:p>
+          <a:p>
+            <a:pPr lvl="1">
+              <a:spcAft>
+                <a:spcPts val="400"/>
+              </a:spcAft>
+            </a:pPr>
+            <a:r>
+              <a:rPr sz="1700">
+                <a:solidFill>
+                  <a:srgbClr val="555555"/>
+                </a:solidFill>
+              </a:rPr>
+              <a:t>    –  ZeRO-1 throughput is between DDP and ZeRO-2; ZeRO-2 is fastest because ReduceScatter overlaps better with backward.</a:t>
             </a:r>
           </a:p>
         </p:txBody>
@@ -3920,7 +3950,7 @@
                   <a:srgbClr val="101010"/>
                 </a:solidFill>
               </a:rPr>
-              <a:t>What ZeRO-2 actually does (Omar)</a:t>
+              <a:t>ZeRO-1 / ZeRO-2 — results</a:t>
             </a:r>
           </a:p>
         </p:txBody>
@@ -3934,7 +3964,7 @@
         <p:spPr>
           <a:xfrm>
             <a:off x="548640" y="1371600"/>
-            <a:ext cx="11064240" cy="5120640"/>
+            <a:ext cx="5852160" cy="5120640"/>
           </a:xfrm>
           <a:prstGeom prst="rect">
             <a:avLst/>
@@ -3953,27 +3983,42 @@
               </a:spcAft>
             </a:pPr>
             <a:r>
-              <a:rPr sz="2000">
-                <a:solidFill>
-                  <a:srgbClr val="101010"/>
-                </a:solidFill>
-              </a:rPr>
-              <a:t>•  Still data parallelism: each rank trains on a different microbatch.</a:t>
-            </a:r>
-          </a:p>
-          <a:p>
-            <a:pPr>
-              <a:spcAft>
-                <a:spcPts val="800"/>
-              </a:spcAft>
-            </a:pPr>
-            <a:r>
-              <a:rPr sz="2000">
-                <a:solidFill>
-                  <a:srgbClr val="101010"/>
-                </a:solidFill>
-              </a:rPr>
-              <a:t>•  What's sharded across the two ranks vs DDP:</a:t>
+              <a:rPr sz="1800">
+                <a:solidFill>
+                  <a:srgbClr val="101010"/>
+                </a:solidFill>
+              </a:rPr>
+              <a:t>•  Both at effective batch 32, full epoch (313 steps).</a:t>
+            </a:r>
+          </a:p>
+          <a:p>
+            <a:pPr>
+              <a:spcAft>
+                <a:spcPts val="800"/>
+              </a:spcAft>
+            </a:pPr>
+            <a:r>
+              <a:rPr sz="1800">
+                <a:solidFill>
+                  <a:srgbClr val="101010"/>
+                </a:solidFill>
+              </a:rPr>
+              <a:t>•  ZeRO-1: 65 min, 2.56 sps, 28.8 GiB, 81% util, loss 1.14 — 1.15× DDP.</a:t>
+            </a:r>
+          </a:p>
+          <a:p>
+            <a:pPr>
+              <a:spcAft>
+                <a:spcPts val="800"/>
+              </a:spcAft>
+            </a:pPr>
+            <a:r>
+              <a:rPr sz="1800">
+                <a:solidFill>
+                  <a:srgbClr val="101010"/>
+                </a:solidFill>
+              </a:rPr>
+              <a:t>•  ZeRO-2: 58 min, 2.85 sps, 27.6 GiB, 89% util, loss 1.11 — 1.28× DDP.</a:t>
             </a:r>
           </a:p>
           <a:p>
@@ -3983,136 +4028,70 @@
               </a:spcAft>
             </a:pPr>
             <a:r>
-              <a:rPr sz="1700">
+              <a:rPr sz="1500">
                 <a:solidFill>
                   <a:srgbClr val="555555"/>
                 </a:solidFill>
               </a:rPr>
-              <a:t>    –  Optimizer states (AdamW m, v) — sharded.</a:t>
-            </a:r>
-          </a:p>
-          <a:p>
-            <a:pPr lvl="1">
-              <a:spcAft>
-                <a:spcPts val="400"/>
-              </a:spcAft>
-            </a:pPr>
-            <a:r>
-              <a:rPr sz="1700">
-                <a:solidFill>
-                  <a:srgbClr val="555555"/>
-                </a:solidFill>
-              </a:rPr>
-              <a:t>    –  Gradients — sharded after backward via ReduceScatter.</a:t>
-            </a:r>
-          </a:p>
-          <a:p>
-            <a:pPr lvl="1">
-              <a:spcAft>
-                <a:spcPts val="400"/>
-              </a:spcAft>
-            </a:pPr>
-            <a:r>
-              <a:rPr sz="1700">
-                <a:solidFill>
-                  <a:srgbClr val="555555"/>
-                </a:solidFill>
-              </a:rPr>
-              <a:t>    –  Parameters — still replicated on every rank.</a:t>
-            </a:r>
-          </a:p>
-          <a:p>
-            <a:pPr>
-              <a:spcAft>
-                <a:spcPts val="800"/>
-              </a:spcAft>
-            </a:pPr>
-            <a:r>
-              <a:rPr sz="2000">
-                <a:solidFill>
-                  <a:srgbClr val="101010"/>
-                </a:solidFill>
-              </a:rPr>
-              <a:t>•  Per-step communication:</a:t>
-            </a:r>
-          </a:p>
-          <a:p>
-            <a:pPr lvl="1">
-              <a:spcAft>
-                <a:spcPts val="400"/>
-              </a:spcAft>
-            </a:pPr>
-            <a:r>
-              <a:rPr sz="1700">
-                <a:solidFill>
-                  <a:srgbClr val="555555"/>
-                </a:solidFill>
-              </a:rPr>
-              <a:t>    –  Backward pass ReduceScatters the gradients to their owner-rank shards.</a:t>
-            </a:r>
-          </a:p>
-          <a:p>
-            <a:pPr lvl="1">
-              <a:spcAft>
-                <a:spcPts val="400"/>
-              </a:spcAft>
-            </a:pPr>
-            <a:r>
-              <a:rPr sz="1700">
-                <a:solidFill>
-                  <a:srgbClr val="555555"/>
-                </a:solidFill>
-              </a:rPr>
-              <a:t>    –  Each rank takes one optimizer step on its shard.</a:t>
-            </a:r>
-          </a:p>
-          <a:p>
-            <a:pPr lvl="1">
-              <a:spcAft>
-                <a:spcPts val="400"/>
-              </a:spcAft>
-            </a:pPr>
-            <a:r>
-              <a:rPr sz="1700">
-                <a:solidFill>
-                  <a:srgbClr val="555555"/>
-                </a:solidFill>
-              </a:rPr>
-              <a:t>    –  AllGather puts the updated parameters back on every rank.</a:t>
-            </a:r>
-          </a:p>
-          <a:p>
-            <a:pPr>
-              <a:spcAft>
-                <a:spcPts val="800"/>
-              </a:spcAft>
-            </a:pPr>
-            <a:r>
-              <a:rPr sz="2000">
-                <a:solidFill>
-                  <a:srgbClr val="101010"/>
-                </a:solidFill>
-              </a:rPr>
-              <a:t>•  On paper this saves a lot of memory. On a LoRA workload it doesn't, because the trainable optimizer state is already small.</a:t>
-            </a:r>
-          </a:p>
-          <a:p>
-            <a:pPr lvl="1">
-              <a:spcAft>
-                <a:spcPts val="400"/>
-              </a:spcAft>
-            </a:pPr>
-            <a:r>
-              <a:rPr sz="1700">
-                <a:solidFill>
-                  <a:srgbClr val="555555"/>
-                </a:solidFill>
-              </a:rPr>
-              <a:t>    –  The real win comes from DeepSpeed's bucketed async overlap, not from sharding.</a:t>
-            </a:r>
-          </a:p>
-        </p:txBody>
-      </p:sp>
+              <a:t>    –  The only method that beats plain DDP outright.</a:t>
+            </a:r>
+          </a:p>
+          <a:p>
+            <a:pPr>
+              <a:spcAft>
+                <a:spcPts val="800"/>
+              </a:spcAft>
+            </a:pPr>
+            <a:r>
+              <a:rPr sz="1800">
+                <a:solidFill>
+                  <a:srgbClr val="101010"/>
+                </a:solidFill>
+              </a:rPr>
+              <a:t>•  Why ZeRO-2 edges out ZeRO-1: ReduceScatter overlaps with the backward pass, AllReduce doesn't as cleanly.</a:t>
+            </a:r>
+          </a:p>
+          <a:p>
+            <a:pPr>
+              <a:spcAft>
+                <a:spcPts val="800"/>
+              </a:spcAft>
+            </a:pPr>
+            <a:r>
+              <a:rPr sz="1800">
+                <a:solidFill>
+                  <a:srgbClr val="101010"/>
+                </a:solidFill>
+              </a:rPr>
+              <a:t>•  Why the speedup over DDP isn't 2×: LoRA's optimizer state is tiny — most of the win is overlap, not sharding.</a:t>
+            </a:r>
+          </a:p>
+        </p:txBody>
+      </p:sp>
+      <p:pic>
+        <p:nvPicPr>
+          <p:cNvPr id="4" name="Picture 3" descr="gpu_utilization_curve.png"/>
+          <p:cNvPicPr>
+            <a:picLocks noChangeAspect="1"/>
+          </p:cNvPicPr>
+          <p:nvPr/>
+        </p:nvPicPr>
+        <p:blipFill>
+          <a:blip r:embed="rId2"/>
+          <a:stretch>
+            <a:fillRect/>
+          </a:stretch>
+        </p:blipFill>
+        <p:spPr>
+          <a:xfrm>
+            <a:off x="6766560" y="1828800"/>
+            <a:ext cx="4937760" cy="3086100"/>
+          </a:xfrm>
+          <a:prstGeom prst="rect">
+            <a:avLst/>
+          </a:prstGeom>
+        </p:spPr>
+      </p:pic>
     </p:spTree>
   </p:cSld>
   <p:clrMapOvr>
@@ -4139,8 +4118,8 @@
         </p:nvSpPr>
         <p:spPr>
           <a:xfrm>
-            <a:off x="548640" y="365760"/>
-            <a:ext cx="11064240" cy="822960"/>
+            <a:off x="548640" y="2834640"/>
+            <a:ext cx="11064240" cy="1280160"/>
           </a:xfrm>
           <a:prstGeom prst="rect">
             <a:avLst/>
@@ -4153,215 +4132,18 @@
           </a:bodyPr>
           <a:lstStyle/>
           <a:p>
-            <a:pPr algn="l"/>
-            <a:r>
-              <a:rPr sz="3400" b="1">
-                <a:solidFill>
-                  <a:srgbClr val="101010"/>
-                </a:solidFill>
-              </a:rPr>
-              <a:t>ZeRO-2 — results</a:t>
-            </a:r>
-          </a:p>
-        </p:txBody>
-      </p:sp>
-      <p:sp>
-        <p:nvSpPr>
-          <p:cNvPr id="3" name="TextBox 2"/>
-          <p:cNvSpPr txBox="1"/>
-          <p:nvPr/>
-        </p:nvSpPr>
-        <p:spPr>
-          <a:xfrm>
-            <a:off x="548640" y="1371600"/>
-            <a:ext cx="5852160" cy="5120640"/>
-          </a:xfrm>
-          <a:prstGeom prst="rect">
-            <a:avLst/>
-          </a:prstGeom>
-          <a:noFill/>
-        </p:spPr>
-        <p:txBody>
-          <a:bodyPr wrap="square" anchor="ctr">
-            <a:spAutoFit/>
-          </a:bodyPr>
-          <a:lstStyle/>
-          <a:p>
-            <a:pPr>
-              <a:spcAft>
-                <a:spcPts val="800"/>
-              </a:spcAft>
-            </a:pPr>
-            <a:r>
-              <a:rPr sz="1800">
-                <a:solidFill>
-                  <a:srgbClr val="101010"/>
-                </a:solidFill>
-              </a:rPr>
-              <a:t>•  Wall time: 58.4 min — 16 minutes faster than DDP, 22% less wall-clock.</a:t>
-            </a:r>
-          </a:p>
-          <a:p>
-            <a:pPr>
-              <a:spcAft>
-                <a:spcPts val="800"/>
-              </a:spcAft>
-            </a:pPr>
-            <a:r>
-              <a:rPr sz="1800">
-                <a:solidFill>
-                  <a:srgbClr val="101010"/>
-                </a:solidFill>
-              </a:rPr>
-              <a:t>•  Throughput: 2.85 samples/sec — 1.28× DDP.</a:t>
-            </a:r>
-          </a:p>
-          <a:p>
-            <a:pPr>
-              <a:spcAft>
-                <a:spcPts val="800"/>
-              </a:spcAft>
-            </a:pPr>
-            <a:r>
-              <a:rPr sz="1800">
-                <a:solidFill>
-                  <a:srgbClr val="101010"/>
-                </a:solidFill>
-              </a:rPr>
-              <a:t>•  Peak GPU memory: 27.6 GiB. About 3 GiB lower than DDP.</a:t>
-            </a:r>
-          </a:p>
-          <a:p>
-            <a:pPr>
-              <a:spcAft>
-                <a:spcPts val="800"/>
-              </a:spcAft>
-            </a:pPr>
-            <a:r>
-              <a:rPr sz="1800">
-                <a:solidFill>
-                  <a:srgbClr val="101010"/>
-                </a:solidFill>
-              </a:rPr>
-              <a:t>•  GPU utilization: 88.5% (DDP was 70.7%).</a:t>
-            </a:r>
-          </a:p>
-          <a:p>
-            <a:pPr lvl="1">
-              <a:spcAft>
-                <a:spcPts val="400"/>
-              </a:spcAft>
-            </a:pPr>
-            <a:r>
-              <a:rPr sz="1500">
-                <a:solidFill>
-                  <a:srgbClr val="555555"/>
-                </a:solidFill>
-              </a:rPr>
-              <a:t>    –  DeepSpeed's overlap fills the AllReduce-stall gap that DDP couldn't hide.</a:t>
-            </a:r>
-          </a:p>
-          <a:p>
-            <a:pPr>
-              <a:spcAft>
-                <a:spcPts val="800"/>
-              </a:spcAft>
-            </a:pPr>
-            <a:r>
-              <a:rPr sz="1800">
-                <a:solidFill>
-                  <a:srgbClr val="101010"/>
-                </a:solidFill>
-              </a:rPr>
-              <a:t>•  Final loss: 1.11 — same as DDP within noise.</a:t>
-            </a:r>
-          </a:p>
-          <a:p>
-            <a:pPr>
-              <a:spcAft>
-                <a:spcPts val="800"/>
-              </a:spcAft>
-            </a:pPr>
-            <a:r>
-              <a:rPr sz="1800">
-                <a:solidFill>
-                  <a:srgbClr val="101010"/>
-                </a:solidFill>
-              </a:rPr>
-              <a:t>•  Why isn't the speedup closer to 2×?</a:t>
-            </a:r>
-          </a:p>
-          <a:p>
-            <a:pPr lvl="1">
-              <a:spcAft>
-                <a:spcPts val="400"/>
-              </a:spcAft>
-            </a:pPr>
-            <a:r>
-              <a:rPr sz="1500">
-                <a:solidFill>
-                  <a:srgbClr val="555555"/>
-                </a:solidFill>
-              </a:rPr>
-              <a:t>    –  LoRA's optimizer state is tiny, so there isn't much to shard.</a:t>
-            </a:r>
-          </a:p>
-          <a:p>
-            <a:pPr lvl="1">
-              <a:spcAft>
-                <a:spcPts val="400"/>
-              </a:spcAft>
-            </a:pPr>
-            <a:r>
-              <a:rPr sz="1500">
-                <a:solidFill>
-                  <a:srgbClr val="555555"/>
-                </a:solidFill>
-              </a:rPr>
-              <a:t>    –  Most of the win is the better overlap, not the sharding itself.</a:t>
-            </a:r>
-          </a:p>
-          <a:p>
-            <a:pPr>
-              <a:spcAft>
-                <a:spcPts val="800"/>
-              </a:spcAft>
-            </a:pPr>
-            <a:r>
-              <a:rPr sz="1800">
-                <a:solidFill>
-                  <a:srgbClr val="101010"/>
-                </a:solidFill>
-              </a:rPr>
-              <a:t>•  Even so: this is the only method in the comparison that beats plain DDP.</a:t>
-            </a:r>
-          </a:p>
-        </p:txBody>
-      </p:sp>
-      <p:pic>
-        <p:nvPicPr>
-          <p:cNvPr id="4" name="Picture 3" descr="gpu_utilization_curve.png"/>
-          <p:cNvPicPr>
-            <a:picLocks noChangeAspect="1"/>
-          </p:cNvPicPr>
-          <p:nvPr/>
-        </p:nvPicPr>
-        <p:blipFill>
-          <a:blip r:embed="rId2"/>
-          <a:stretch>
-            <a:fillRect/>
-          </a:stretch>
-        </p:blipFill>
-        <p:spPr>
-          <a:xfrm>
-            <a:off x="6766560" y="1828800"/>
-            <a:ext cx="4937760" cy="3086100"/>
-          </a:xfrm>
-          <a:prstGeom prst="rect">
-            <a:avLst/>
-          </a:prstGeom>
-        </p:spPr>
-      </p:pic>
+            <a:pPr algn="ctr"/>
+            <a:r>
+              <a:rPr sz="5400" b="0">
+                <a:solidFill>
+                  <a:srgbClr val="101010"/>
+                </a:solidFill>
+              </a:rPr>
+              <a:t>DeepSpeed ZeRO-3</a:t>
+            </a:r>
+          </a:p>
+        </p:txBody>
+      </p:sp>
     </p:spTree>
   </p:cSld>
   <p:clrMapOvr>
@@ -4388,8 +4170,8 @@
         </p:nvSpPr>
         <p:spPr>
           <a:xfrm>
-            <a:off x="548640" y="2834640"/>
-            <a:ext cx="11064240" cy="1280160"/>
+            <a:off x="548640" y="365760"/>
+            <a:ext cx="11064240" cy="822960"/>
           </a:xfrm>
           <a:prstGeom prst="rect">
             <a:avLst/>
@@ -4402,14 +4184,217 @@
           </a:bodyPr>
           <a:lstStyle/>
           <a:p>
-            <a:pPr algn="ctr"/>
-            <a:r>
-              <a:rPr sz="5400" b="0">
-                <a:solidFill>
-                  <a:srgbClr val="101010"/>
-                </a:solidFill>
-              </a:rPr>
-              <a:t>DeepSpeed ZeRO-3</a:t>
+            <a:pPr algn="l"/>
+            <a:r>
+              <a:rPr sz="3400" b="1">
+                <a:solidFill>
+                  <a:srgbClr val="101010"/>
+                </a:solidFill>
+              </a:rPr>
+              <a:t>ZeRO-3: shard everything (Omar)</a:t>
+            </a:r>
+          </a:p>
+        </p:txBody>
+      </p:sp>
+      <p:sp>
+        <p:nvSpPr>
+          <p:cNvPr id="3" name="TextBox 2"/>
+          <p:cNvSpPr txBox="1"/>
+          <p:nvPr/>
+        </p:nvSpPr>
+        <p:spPr>
+          <a:xfrm>
+            <a:off x="548640" y="1371600"/>
+            <a:ext cx="11064240" cy="5120640"/>
+          </a:xfrm>
+          <a:prstGeom prst="rect">
+            <a:avLst/>
+          </a:prstGeom>
+          <a:noFill/>
+        </p:spPr>
+        <p:txBody>
+          <a:bodyPr wrap="square" anchor="ctr">
+            <a:spAutoFit/>
+          </a:bodyPr>
+          <a:lstStyle/>
+          <a:p>
+            <a:pPr>
+              <a:spcAft>
+                <a:spcPts val="800"/>
+              </a:spcAft>
+            </a:pPr>
+            <a:r>
+              <a:rPr sz="1800">
+                <a:solidFill>
+                  <a:srgbClr val="101010"/>
+                </a:solidFill>
+              </a:rPr>
+              <a:t>•  Same data-parallel semantics as ZeRO-2. Each rank still sees a different microbatch.</a:t>
+            </a:r>
+          </a:p>
+          <a:p>
+            <a:pPr>
+              <a:spcAft>
+                <a:spcPts val="800"/>
+              </a:spcAft>
+            </a:pPr>
+            <a:r>
+              <a:rPr sz="1800">
+                <a:solidFill>
+                  <a:srgbClr val="101010"/>
+                </a:solidFill>
+              </a:rPr>
+              <a:t>•  The difference: parameters are also sharded across the two ranks.</a:t>
+            </a:r>
+          </a:p>
+          <a:p>
+            <a:pPr>
+              <a:spcAft>
+                <a:spcPts val="800"/>
+              </a:spcAft>
+            </a:pPr>
+            <a:r>
+              <a:rPr sz="1800">
+                <a:solidFill>
+                  <a:srgbClr val="101010"/>
+                </a:solidFill>
+              </a:rPr>
+              <a:t>•  Per-step comm now happens at every layer, twice:</a:t>
+            </a:r>
+          </a:p>
+          <a:p>
+            <a:pPr lvl="1">
+              <a:spcAft>
+                <a:spcPts val="400"/>
+              </a:spcAft>
+            </a:pPr>
+            <a:r>
+              <a:rPr sz="1500">
+                <a:solidFill>
+                  <a:srgbClr val="555555"/>
+                </a:solidFill>
+              </a:rPr>
+              <a:t>    –  Forward pass: AllGather parameters for layer N → compute → drop them.</a:t>
+            </a:r>
+          </a:p>
+          <a:p>
+            <a:pPr lvl="1">
+              <a:spcAft>
+                <a:spcPts val="400"/>
+              </a:spcAft>
+            </a:pPr>
+            <a:r>
+              <a:rPr sz="1500">
+                <a:solidFill>
+                  <a:srgbClr val="555555"/>
+                </a:solidFill>
+              </a:rPr>
+              <a:t>    –  Backward pass: AllGather them again → compute gradients → drop again.</a:t>
+            </a:r>
+          </a:p>
+          <a:p>
+            <a:pPr lvl="1">
+              <a:spcAft>
+                <a:spcPts val="400"/>
+              </a:spcAft>
+            </a:pPr>
+            <a:r>
+              <a:rPr sz="1500">
+                <a:solidFill>
+                  <a:srgbClr val="555555"/>
+                </a:solidFill>
+              </a:rPr>
+              <a:t>    –  ReduceScatter the gradients at the end of backward, then run the optimizer on each shard.</a:t>
+            </a:r>
+          </a:p>
+          <a:p>
+            <a:pPr>
+              <a:spcAft>
+                <a:spcPts val="800"/>
+              </a:spcAft>
+            </a:pPr>
+            <a:r>
+              <a:rPr sz="1800">
+                <a:solidFill>
+                  <a:srgbClr val="101010"/>
+                </a:solidFill>
+              </a:rPr>
+              <a:t>•  On 2 ranks, ~7 GB of parameters live on each. But every layer briefly re-materializes its full ~430 MB on every rank.</a:t>
+            </a:r>
+          </a:p>
+          <a:p>
+            <a:pPr>
+              <a:spcAft>
+                <a:spcPts val="800"/>
+              </a:spcAft>
+            </a:pPr>
+            <a:r>
+              <a:rPr sz="1800">
+                <a:solidFill>
+                  <a:srgbClr val="101010"/>
+                </a:solidFill>
+              </a:rPr>
+              <a:t>•  Back-of-envelope per microbatch:</a:t>
+            </a:r>
+          </a:p>
+          <a:p>
+            <a:pPr lvl="1">
+              <a:spcAft>
+                <a:spcPts val="400"/>
+              </a:spcAft>
+            </a:pPr>
+            <a:r>
+              <a:rPr sz="1500">
+                <a:solidFill>
+                  <a:srgbClr val="555555"/>
+                </a:solidFill>
+              </a:rPr>
+              <a:t>    –  AllGather other rank's 7 GB shard, fwd + bwd → ~14 GB cross-node per microbatch.</a:t>
+            </a:r>
+          </a:p>
+          <a:p>
+            <a:pPr lvl="1">
+              <a:spcAft>
+                <a:spcPts val="400"/>
+              </a:spcAft>
+            </a:pPr>
+            <a:r>
+              <a:rPr sz="1500">
+                <a:solidFill>
+                  <a:srgbClr val="555555"/>
+                </a:solidFill>
+              </a:rPr>
+              <a:t>    –  × 4 microbatches per optimizer step + ReduceScatter at end ≈ ~63 GB on the wire per step.</a:t>
+            </a:r>
+          </a:p>
+          <a:p>
+            <a:pPr lvl="1">
+              <a:spcAft>
+                <a:spcPts val="400"/>
+              </a:spcAft>
+            </a:pPr>
+            <a:r>
+              <a:rPr sz="1500">
+                <a:solidFill>
+                  <a:srgbClr val="555555"/>
+                </a:solidFill>
+              </a:rPr>
+              <a:t>    –  Over 1 Gbps Ethernet that's minutes of pure comm — DeepSpeed bucketed-async overlap (50 MB) is the only thing keeping it tractable.</a:t>
+            </a:r>
+          </a:p>
+          <a:p>
+            <a:pPr>
+              <a:spcAft>
+                <a:spcPts val="800"/>
+              </a:spcAft>
+            </a:pPr>
+            <a:r>
+              <a:rPr sz="1800">
+                <a:solidFill>
+                  <a:srgbClr val="101010"/>
+                </a:solidFill>
+              </a:rPr>
+              <a:t>•  We used configs/zero3_bounded_async.json to cap allgather/reduce buckets.</a:t>
             </a:r>
           </a:p>
         </p:txBody>
@@ -4461,7 +4446,7 @@
                   <a:srgbClr val="101010"/>
                 </a:solidFill>
               </a:rPr>
-              <a:t>ZeRO-3: shard everything (Rassul)</a:t>
+              <a:t>ZeRO-3 — results</a:t>
             </a:r>
           </a:p>
         </p:txBody>
@@ -4494,42 +4479,12 @@
               </a:spcAft>
             </a:pPr>
             <a:r>
-              <a:rPr sz="1800">
-                <a:solidFill>
-                  <a:srgbClr val="101010"/>
-                </a:solidFill>
-              </a:rPr>
-              <a:t>•  Same data-parallel semantics as ZeRO-2. Each rank still sees a different microbatch.</a:t>
-            </a:r>
-          </a:p>
-          <a:p>
-            <a:pPr>
-              <a:spcAft>
-                <a:spcPts val="800"/>
-              </a:spcAft>
-            </a:pPr>
-            <a:r>
-              <a:rPr sz="1800">
-                <a:solidFill>
-                  <a:srgbClr val="101010"/>
-                </a:solidFill>
-              </a:rPr>
-              <a:t>•  The difference: parameters are also sharded across the two ranks.</a:t>
-            </a:r>
-          </a:p>
-          <a:p>
-            <a:pPr>
-              <a:spcAft>
-                <a:spcPts val="800"/>
-              </a:spcAft>
-            </a:pPr>
-            <a:r>
-              <a:rPr sz="1800">
-                <a:solidFill>
-                  <a:srgbClr val="101010"/>
-                </a:solidFill>
-              </a:rPr>
-              <a:t>•  Per-step comm now happens at every layer, twice:</a:t>
+              <a:rPr sz="2000">
+                <a:solidFill>
+                  <a:srgbClr val="101010"/>
+                </a:solidFill>
+              </a:rPr>
+              <a:t>•  Hit the SLURM time limit before finishing. Reached 292 of 1250 steps in 3 h 52 min.</a:t>
             </a:r>
           </a:p>
           <a:p>
@@ -4539,12 +4494,42 @@
               </a:spcAft>
             </a:pPr>
             <a:r>
-              <a:rPr sz="1500">
+              <a:rPr sz="1700">
                 <a:solidFill>
                   <a:srgbClr val="555555"/>
                 </a:solidFill>
               </a:rPr>
-              <a:t>    –  Forward pass: AllGather parameters for layer N → compute → drop them.</a:t>
+              <a:t>    –  Each step took about 48 seconds. Projected full run: 16.5 hours.</a:t>
+            </a:r>
+          </a:p>
+          <a:p>
+            <a:pPr>
+              <a:spcAft>
+                <a:spcPts val="800"/>
+              </a:spcAft>
+            </a:pPr>
+            <a:r>
+              <a:rPr sz="2000">
+                <a:solidFill>
+                  <a:srgbClr val="101010"/>
+                </a:solidFill>
+              </a:rPr>
+              <a:t>•  Throughput: 0.17 samples/sec — about 13× slower than DDP.</a:t>
+            </a:r>
+          </a:p>
+          <a:p>
+            <a:pPr>
+              <a:spcAft>
+                <a:spcPts val="800"/>
+              </a:spcAft>
+            </a:pPr>
+            <a:r>
+              <a:rPr sz="2000">
+                <a:solidFill>
+                  <a:srgbClr val="101010"/>
+                </a:solidFill>
+              </a:rPr>
+              <a:t>•  Peak GPU memory: 22 GiB — actual sharding showing up.</a:t>
             </a:r>
           </a:p>
           <a:p>
@@ -4554,12 +4539,27 @@
               </a:spcAft>
             </a:pPr>
             <a:r>
-              <a:rPr sz="1500">
+              <a:rPr sz="1700">
                 <a:solidFill>
                   <a:srgbClr val="555555"/>
                 </a:solidFill>
               </a:rPr>
-              <a:t>    –  Backward pass: AllGather them again → compute gradients → drop again.</a:t>
+              <a:t>    –  But memory was never the bottleneck on this card. Communication was.</a:t>
+            </a:r>
+          </a:p>
+          <a:p>
+            <a:pPr>
+              <a:spcAft>
+                <a:spcPts val="800"/>
+              </a:spcAft>
+            </a:pPr>
+            <a:r>
+              <a:rPr sz="2000">
+                <a:solidFill>
+                  <a:srgbClr val="101010"/>
+                </a:solidFill>
+              </a:rPr>
+              <a:t>•  GPU utilization: 99%. This is misleading.</a:t>
             </a:r>
           </a:p>
           <a:p>
@@ -4569,42 +4569,12 @@
               </a:spcAft>
             </a:pPr>
             <a:r>
-              <a:rPr sz="1500">
+              <a:rPr sz="1700">
                 <a:solidFill>
                   <a:srgbClr val="555555"/>
                 </a:solidFill>
               </a:rPr>
-              <a:t>    –  ReduceScatter the gradients at the end of backward, then run the optimizer on each shard.</a:t>
-            </a:r>
-          </a:p>
-          <a:p>
-            <a:pPr>
-              <a:spcAft>
-                <a:spcPts val="800"/>
-              </a:spcAft>
-            </a:pPr>
-            <a:r>
-              <a:rPr sz="1800">
-                <a:solidFill>
-                  <a:srgbClr val="101010"/>
-                </a:solidFill>
-              </a:rPr>
-              <a:t>•  On 2 ranks, ~7 GB of parameters live on each. But every layer briefly re-materializes its full ~430 MB on every rank.</a:t>
-            </a:r>
-          </a:p>
-          <a:p>
-            <a:pPr>
-              <a:spcAft>
-                <a:spcPts val="800"/>
-              </a:spcAft>
-            </a:pPr>
-            <a:r>
-              <a:rPr sz="1800">
-                <a:solidFill>
-                  <a:srgbClr val="101010"/>
-                </a:solidFill>
-              </a:rPr>
-              <a:t>•  Back-of-envelope for our model:</a:t>
+              <a:t>    –  DeepSpeed pipelines comm with compute, so 'utilization' includes time spent waiting on AllGather.</a:t>
             </a:r>
           </a:p>
           <a:p>
@@ -4614,42 +4584,42 @@
               </a:spcAft>
             </a:pPr>
             <a:r>
-              <a:rPr sz="1500">
+              <a:rPr sz="1700">
                 <a:solidFill>
                   <a:srgbClr val="555555"/>
                 </a:solidFill>
               </a:rPr>
-              <a:t>    –  32 transformer layers × 430 MB × 2 (fwd + bwd) ≈ 27.5 GB transferred per step.</a:t>
-            </a:r>
-          </a:p>
-          <a:p>
-            <a:pPr lvl="1">
-              <a:spcAft>
-                <a:spcPts val="400"/>
-              </a:spcAft>
-            </a:pPr>
-            <a:r>
-              <a:rPr sz="1500">
-                <a:solidFill>
-                  <a:srgbClr val="555555"/>
-                </a:solidFill>
-              </a:rPr>
-              <a:t>    –  Over 1 Gbps Ethernet: roughly 4 minutes of comm per step before any compute.</a:t>
-            </a:r>
-          </a:p>
-          <a:p>
-            <a:pPr>
-              <a:spcAft>
-                <a:spcPts val="800"/>
-              </a:spcAft>
-            </a:pPr>
-            <a:r>
-              <a:rPr sz="1800">
-                <a:solidFill>
-                  <a:srgbClr val="101010"/>
-                </a:solidFill>
-              </a:rPr>
-              <a:t>•  We used configs/zero3_bounded_async.json: bucketed allgather/reduce at 50 MB.</a:t>
+              <a:t>    –  High util doesn't mean fast — it means the engine kept the GPU busy on something.</a:t>
+            </a:r>
+          </a:p>
+          <a:p>
+            <a:pPr>
+              <a:spcAft>
+                <a:spcPts val="800"/>
+              </a:spcAft>
+            </a:pPr>
+            <a:r>
+              <a:rPr sz="2000">
+                <a:solidFill>
+                  <a:srgbClr val="101010"/>
+                </a:solidFill>
+              </a:rPr>
+              <a:t>•  Last logged loss: 1.31. Convergence was fine — the run was just too slow to finish.</a:t>
+            </a:r>
+          </a:p>
+          <a:p>
+            <a:pPr>
+              <a:spcAft>
+                <a:spcPts val="800"/>
+              </a:spcAft>
+            </a:pPr>
+            <a:r>
+              <a:rPr sz="2000">
+                <a:solidFill>
+                  <a:srgbClr val="101010"/>
+                </a:solidFill>
+              </a:rPr>
+              <a:t>•  Diagnosis: per-layer AllGather over 1 Gbps Ethernet is the wall.</a:t>
             </a:r>
           </a:p>
         </p:txBody>
@@ -4680,8 +4650,8 @@
         </p:nvSpPr>
         <p:spPr>
           <a:xfrm>
-            <a:off x="548640" y="365760"/>
-            <a:ext cx="11064240" cy="822960"/>
+            <a:off x="548640" y="2834640"/>
+            <a:ext cx="11064240" cy="1280160"/>
           </a:xfrm>
           <a:prstGeom prst="rect">
             <a:avLst/>
@@ -4694,187 +4664,14 @@
           </a:bodyPr>
           <a:lstStyle/>
           <a:p>
-            <a:pPr algn="l"/>
-            <a:r>
-              <a:rPr sz="3400" b="1">
-                <a:solidFill>
-                  <a:srgbClr val="101010"/>
-                </a:solidFill>
-              </a:rPr>
-              <a:t>ZeRO-3 — results</a:t>
-            </a:r>
-          </a:p>
-        </p:txBody>
-      </p:sp>
-      <p:sp>
-        <p:nvSpPr>
-          <p:cNvPr id="3" name="TextBox 2"/>
-          <p:cNvSpPr txBox="1"/>
-          <p:nvPr/>
-        </p:nvSpPr>
-        <p:spPr>
-          <a:xfrm>
-            <a:off x="548640" y="1371600"/>
-            <a:ext cx="11064240" cy="5120640"/>
-          </a:xfrm>
-          <a:prstGeom prst="rect">
-            <a:avLst/>
-          </a:prstGeom>
-          <a:noFill/>
-        </p:spPr>
-        <p:txBody>
-          <a:bodyPr wrap="square" anchor="ctr">
-            <a:spAutoFit/>
-          </a:bodyPr>
-          <a:lstStyle/>
-          <a:p>
-            <a:pPr>
-              <a:spcAft>
-                <a:spcPts val="800"/>
-              </a:spcAft>
-            </a:pPr>
-            <a:r>
-              <a:rPr sz="2000">
-                <a:solidFill>
-                  <a:srgbClr val="101010"/>
-                </a:solidFill>
-              </a:rPr>
-              <a:t>•  Hit the SLURM time limit before finishing. Reached 292 of 1250 steps in 3 h 52 min.</a:t>
-            </a:r>
-          </a:p>
-          <a:p>
-            <a:pPr lvl="1">
-              <a:spcAft>
-                <a:spcPts val="400"/>
-              </a:spcAft>
-            </a:pPr>
-            <a:r>
-              <a:rPr sz="1700">
-                <a:solidFill>
-                  <a:srgbClr val="555555"/>
-                </a:solidFill>
-              </a:rPr>
-              <a:t>    –  Each step took about 48 seconds. Projected full run: 16.5 hours.</a:t>
-            </a:r>
-          </a:p>
-          <a:p>
-            <a:pPr>
-              <a:spcAft>
-                <a:spcPts val="800"/>
-              </a:spcAft>
-            </a:pPr>
-            <a:r>
-              <a:rPr sz="2000">
-                <a:solidFill>
-                  <a:srgbClr val="101010"/>
-                </a:solidFill>
-              </a:rPr>
-              <a:t>•  Throughput: 0.17 samples/sec — about 13× slower than DDP.</a:t>
-            </a:r>
-          </a:p>
-          <a:p>
-            <a:pPr>
-              <a:spcAft>
-                <a:spcPts val="800"/>
-              </a:spcAft>
-            </a:pPr>
-            <a:r>
-              <a:rPr sz="2000">
-                <a:solidFill>
-                  <a:srgbClr val="101010"/>
-                </a:solidFill>
-              </a:rPr>
-              <a:t>•  Peak GPU memory: 22 GiB — actual sharding showing up.</a:t>
-            </a:r>
-          </a:p>
-          <a:p>
-            <a:pPr lvl="1">
-              <a:spcAft>
-                <a:spcPts val="400"/>
-              </a:spcAft>
-            </a:pPr>
-            <a:r>
-              <a:rPr sz="1700">
-                <a:solidFill>
-                  <a:srgbClr val="555555"/>
-                </a:solidFill>
-              </a:rPr>
-              <a:t>    –  But memory was never the bottleneck on this card. Communication was.</a:t>
-            </a:r>
-          </a:p>
-          <a:p>
-            <a:pPr>
-              <a:spcAft>
-                <a:spcPts val="800"/>
-              </a:spcAft>
-            </a:pPr>
-            <a:r>
-              <a:rPr sz="2000">
-                <a:solidFill>
-                  <a:srgbClr val="101010"/>
-                </a:solidFill>
-              </a:rPr>
-              <a:t>•  GPU utilization: 99%. This is misleading.</a:t>
-            </a:r>
-          </a:p>
-          <a:p>
-            <a:pPr lvl="1">
-              <a:spcAft>
-                <a:spcPts val="400"/>
-              </a:spcAft>
-            </a:pPr>
-            <a:r>
-              <a:rPr sz="1700">
-                <a:solidFill>
-                  <a:srgbClr val="555555"/>
-                </a:solidFill>
-              </a:rPr>
-              <a:t>    –  DeepSpeed pipelines comm with compute, so 'utilization' includes time spent waiting on AllGather.</a:t>
-            </a:r>
-          </a:p>
-          <a:p>
-            <a:pPr lvl="1">
-              <a:spcAft>
-                <a:spcPts val="400"/>
-              </a:spcAft>
-            </a:pPr>
-            <a:r>
-              <a:rPr sz="1700">
-                <a:solidFill>
-                  <a:srgbClr val="555555"/>
-                </a:solidFill>
-              </a:rPr>
-              <a:t>    –  High util doesn't mean fast — it means the engine kept the GPU busy on something.</a:t>
-            </a:r>
-          </a:p>
-          <a:p>
-            <a:pPr>
-              <a:spcAft>
-                <a:spcPts val="800"/>
-              </a:spcAft>
-            </a:pPr>
-            <a:r>
-              <a:rPr sz="2000">
-                <a:solidFill>
-                  <a:srgbClr val="101010"/>
-                </a:solidFill>
-              </a:rPr>
-              <a:t>•  Last logged loss: 1.31. Convergence was fine — the run was just too slow to finish.</a:t>
-            </a:r>
-          </a:p>
-          <a:p>
-            <a:pPr>
-              <a:spcAft>
-                <a:spcPts val="800"/>
-              </a:spcAft>
-            </a:pPr>
-            <a:r>
-              <a:rPr sz="2000">
-                <a:solidFill>
-                  <a:srgbClr val="101010"/>
-                </a:solidFill>
-              </a:rPr>
-              <a:t>•  Diagnosis: per-layer AllGather over 1 Gbps Ethernet is the wall.</a:t>
+            <a:pPr algn="ctr"/>
+            <a:r>
+              <a:rPr sz="5400" b="0">
+                <a:solidFill>
+                  <a:srgbClr val="101010"/>
+                </a:solidFill>
+              </a:rPr>
+              <a:t>PyTorch FSDP</a:t>
             </a:r>
           </a:p>
         </p:txBody>
@@ -4905,8 +4702,8 @@
         </p:nvSpPr>
         <p:spPr>
           <a:xfrm>
-            <a:off x="548640" y="2834640"/>
-            <a:ext cx="11064240" cy="1280160"/>
+            <a:off x="548640" y="365760"/>
+            <a:ext cx="11064240" cy="822960"/>
           </a:xfrm>
           <a:prstGeom prst="rect">
             <a:avLst/>
@@ -4919,14 +4716,172 @@
           </a:bodyPr>
           <a:lstStyle/>
           <a:p>
-            <a:pPr algn="ctr"/>
-            <a:r>
-              <a:rPr sz="5400" b="0">
-                <a:solidFill>
-                  <a:srgbClr val="101010"/>
-                </a:solidFill>
-              </a:rPr>
-              <a:t>PyTorch FSDP</a:t>
+            <a:pPr algn="l"/>
+            <a:r>
+              <a:rPr sz="3400" b="1">
+                <a:solidFill>
+                  <a:srgbClr val="101010"/>
+                </a:solidFill>
+              </a:rPr>
+              <a:t>FSDP: PyTorch's take (Rassul)</a:t>
+            </a:r>
+          </a:p>
+        </p:txBody>
+      </p:sp>
+      <p:sp>
+        <p:nvSpPr>
+          <p:cNvPr id="3" name="TextBox 2"/>
+          <p:cNvSpPr txBox="1"/>
+          <p:nvPr/>
+        </p:nvSpPr>
+        <p:spPr>
+          <a:xfrm>
+            <a:off x="548640" y="1371600"/>
+            <a:ext cx="11064240" cy="5120640"/>
+          </a:xfrm>
+          <a:prstGeom prst="rect">
+            <a:avLst/>
+          </a:prstGeom>
+          <a:noFill/>
+        </p:spPr>
+        <p:txBody>
+          <a:bodyPr wrap="square" anchor="ctr">
+            <a:spAutoFit/>
+          </a:bodyPr>
+          <a:lstStyle/>
+          <a:p>
+            <a:pPr>
+              <a:spcAft>
+                <a:spcPts val="800"/>
+              </a:spcAft>
+            </a:pPr>
+            <a:r>
+              <a:rPr sz="2000">
+                <a:solidFill>
+                  <a:srgbClr val="101010"/>
+                </a:solidFill>
+              </a:rPr>
+              <a:t>•  PyTorch-native equivalent of ZeRO-3. Same algorithm, different implementation.</a:t>
+            </a:r>
+          </a:p>
+          <a:p>
+            <a:pPr>
+              <a:spcAft>
+                <a:spcPts val="800"/>
+              </a:spcAft>
+            </a:pPr>
+            <a:r>
+              <a:rPr sz="2000">
+                <a:solidFill>
+                  <a:srgbClr val="101010"/>
+                </a:solidFill>
+              </a:rPr>
+              <a:t>•  Design choices that differ from DeepSpeed:</a:t>
+            </a:r>
+          </a:p>
+          <a:p>
+            <a:pPr lvl="1">
+              <a:spcAft>
+                <a:spcPts val="400"/>
+              </a:spcAft>
+            </a:pPr>
+            <a:r>
+              <a:rPr sz="1700">
+                <a:solidFill>
+                  <a:srgbClr val="555555"/>
+                </a:solidFill>
+              </a:rPr>
+              <a:t>    –  Each transformer block is wrapped as one FSDP unit (a contiguous FlatParameter).</a:t>
+            </a:r>
+          </a:p>
+          <a:p>
+            <a:pPr lvl="1">
+              <a:spcAft>
+                <a:spcPts val="400"/>
+              </a:spcAft>
+            </a:pPr>
+            <a:r>
+              <a:rPr sz="1700">
+                <a:solidFill>
+                  <a:srgbClr val="555555"/>
+                </a:solidFill>
+              </a:rPr>
+              <a:t>    –  AllGather happens at the unit boundary, not per-tensor.</a:t>
+            </a:r>
+          </a:p>
+          <a:p>
+            <a:pPr lvl="1">
+              <a:spcAft>
+                <a:spcPts val="400"/>
+              </a:spcAft>
+            </a:pPr>
+            <a:r>
+              <a:rPr sz="1700">
+                <a:solidFill>
+                  <a:srgbClr val="555555"/>
+                </a:solidFill>
+              </a:rPr>
+              <a:t>    –  Mixed precision is set explicitly via a policy (we used bf16).</a:t>
+            </a:r>
+          </a:p>
+          <a:p>
+            <a:pPr>
+              <a:spcAft>
+                <a:spcPts val="800"/>
+              </a:spcAft>
+            </a:pPr>
+            <a:r>
+              <a:rPr sz="2000">
+                <a:solidFill>
+                  <a:srgbClr val="101010"/>
+                </a:solidFill>
+              </a:rPr>
+              <a:t>•  Our config: full_shard auto_wrap on LlamaDecoderLayer, use_orig_params=True (required for LoRA), cpu_ram_efficient_loading=true.</a:t>
+            </a:r>
+          </a:p>
+          <a:p>
+            <a:pPr>
+              <a:spcAft>
+                <a:spcPts val="800"/>
+              </a:spcAft>
+            </a:pPr>
+            <a:r>
+              <a:rPr sz="2000">
+                <a:solidFill>
+                  <a:srgbClr val="101010"/>
+                </a:solidFill>
+              </a:rPr>
+              <a:t>•  Two LLaVA-specific bugs we had to patch to get this running:</a:t>
+            </a:r>
+          </a:p>
+          <a:p>
+            <a:pPr lvl="1">
+              <a:spcAft>
+                <a:spcPts val="400"/>
+              </a:spcAft>
+            </a:pPr>
+            <a:r>
+              <a:rPr sz="1700">
+                <a:solidFill>
+                  <a:srgbClr val="555555"/>
+                </a:solidFill>
+              </a:rPr>
+              <a:t>    –  self.vision_tower[0] crashes when loading from a vendored checkpoint where vision_tower isn't a list.</a:t>
+            </a:r>
+          </a:p>
+          <a:p>
+            <a:pPr lvl="1">
+              <a:spcAft>
+                <a:spcPts val="400"/>
+              </a:spcAft>
+            </a:pPr>
+            <a:r>
+              <a:rPr sz="1700">
+                <a:solidFill>
+                  <a:srgbClr val="555555"/>
+                </a:solidFill>
+              </a:rPr>
+              <a:t>    –  LoRA adapters are created in fp32 after the base model is cast to bf16. FSDP requires uniform dtype, so we cast LoRA to bf16 too.</a:t>
             </a:r>
           </a:p>
         </p:txBody>
@@ -5106,7 +5061,7 @@
                   <a:srgbClr val="555555"/>
                 </a:solidFill>
               </a:rPr>
-              <a:t>    –  DeepSpeed ZeRO-2 — Omar Ahmed</a:t>
+              <a:t>    –  DeepSpeed ZeRO-1, ZeRO-2, and ZeRO-3 — Omar Ahmed</a:t>
             </a:r>
           </a:p>
           <a:p>
@@ -5121,7 +5076,7 @@
                   <a:srgbClr val="555555"/>
                 </a:solidFill>
               </a:rPr>
-              <a:t>    –  DeepSpeed ZeRO-3 and PyTorch FSDP — Rassul Magauin</a:t>
+              <a:t>    –  PyTorch FSDP and Tensor Parallelism — Rassul Magauin</a:t>
             </a:r>
           </a:p>
         </p:txBody>
@@ -5173,7 +5128,7 @@
                   <a:srgbClr val="101010"/>
                 </a:solidFill>
               </a:rPr>
-              <a:t>FSDP: PyTorch's take (Rassul)</a:t>
+              <a:t>FSDP — results</a:t>
             </a:r>
           </a:p>
         </p:txBody>
@@ -5187,7 +5142,7 @@
         <p:spPr>
           <a:xfrm>
             <a:off x="548640" y="1371600"/>
-            <a:ext cx="11064240" cy="5120640"/>
+            <a:ext cx="5852160" cy="5120640"/>
           </a:xfrm>
           <a:prstGeom prst="rect">
             <a:avLst/>
@@ -5206,27 +5161,72 @@
               </a:spcAft>
             </a:pPr>
             <a:r>
-              <a:rPr sz="2000">
-                <a:solidFill>
-                  <a:srgbClr val="101010"/>
-                </a:solidFill>
-              </a:rPr>
-              <a:t>•  PyTorch-native equivalent of ZeRO-3. Same algorithm, different implementation.</a:t>
-            </a:r>
-          </a:p>
-          <a:p>
-            <a:pPr>
-              <a:spcAft>
-                <a:spcPts val="800"/>
-              </a:spcAft>
-            </a:pPr>
-            <a:r>
-              <a:rPr sz="2000">
-                <a:solidFill>
-                  <a:srgbClr val="101010"/>
-                </a:solidFill>
-              </a:rPr>
-              <a:t>•  Design choices that differ from DeepSpeed:</a:t>
+              <a:rPr sz="1800">
+                <a:solidFill>
+                  <a:srgbClr val="101010"/>
+                </a:solidFill>
+              </a:rPr>
+              <a:t>•  Ran to step 292 — matched ZeRO-3's stopping point — at 84 s/step.</a:t>
+            </a:r>
+          </a:p>
+          <a:p>
+            <a:pPr>
+              <a:spcAft>
+                <a:spcPts val="800"/>
+              </a:spcAft>
+            </a:pPr>
+            <a:r>
+              <a:rPr sz="1800">
+                <a:solidFill>
+                  <a:srgbClr val="101010"/>
+                </a:solidFill>
+              </a:rPr>
+              <a:t>•  Wall time: 6.8 h. Throughput: 0.095 sps — ~22× slower than DDP, ~1.8× slower than ZeRO-3.</a:t>
+            </a:r>
+          </a:p>
+          <a:p>
+            <a:pPr>
+              <a:spcAft>
+                <a:spcPts val="800"/>
+              </a:spcAft>
+            </a:pPr>
+            <a:r>
+              <a:rPr sz="1800">
+                <a:solidFill>
+                  <a:srgbClr val="101010"/>
+                </a:solidFill>
+              </a:rPr>
+              <a:t>•  Peak GPU memory: 31.6 GiB (right at the card's limit).</a:t>
+            </a:r>
+          </a:p>
+          <a:p>
+            <a:pPr>
+              <a:spcAft>
+                <a:spcPts val="800"/>
+              </a:spcAft>
+            </a:pPr>
+            <a:r>
+              <a:rPr sz="1800">
+                <a:solidFill>
+                  <a:srgbClr val="101010"/>
+                </a:solidFill>
+              </a:rPr>
+              <a:t>•  GPU utilization: 97.5%. Final loss: 1.34 — matches ZeRO-3 within noise (same algorithm).</a:t>
+            </a:r>
+          </a:p>
+          <a:p>
+            <a:pPr>
+              <a:spcAft>
+                <a:spcPts val="800"/>
+              </a:spcAft>
+            </a:pPr>
+            <a:r>
+              <a:rPr sz="1800">
+                <a:solidFill>
+                  <a:srgbClr val="101010"/>
+                </a:solidFill>
+              </a:rPr>
+              <a:t>•  Why slower than ZeRO-3 on the same hardware?</a:t>
             </a:r>
           </a:p>
           <a:p>
@@ -5236,12 +5236,12 @@
               </a:spcAft>
             </a:pPr>
             <a:r>
-              <a:rPr sz="1700">
+              <a:rPr sz="1500">
                 <a:solidFill>
                   <a:srgbClr val="555555"/>
                 </a:solidFill>
               </a:rPr>
-              <a:t>    –  Each transformer block is wrapped as one FSDP unit (a contiguous FlatParameter).</a:t>
+              <a:t>    –  DeepSpeed's bounded async (50 MB buckets) overlaps comm with compute aggressively.</a:t>
             </a:r>
           </a:p>
           <a:p>
@@ -5251,12 +5251,12 @@
               </a:spcAft>
             </a:pPr>
             <a:r>
-              <a:rPr sz="1700">
+              <a:rPr sz="1500">
                 <a:solidFill>
                   <a:srgbClr val="555555"/>
                 </a:solidFill>
               </a:rPr>
-              <a:t>    –  AllGather happens at the unit boundary, not per-tensor.</a:t>
+              <a:t>    –  FSDP's defaults wait for each block's AllGather to finish before computing.</a:t>
             </a:r>
           </a:p>
           <a:p>
@@ -5266,76 +5266,40 @@
               </a:spcAft>
             </a:pPr>
             <a:r>
-              <a:rPr sz="1700">
+              <a:rPr sz="1500">
                 <a:solidFill>
                   <a:srgbClr val="555555"/>
                 </a:solidFill>
               </a:rPr>
-              <a:t>    –  Mixed precision is set explicitly via a policy (we used bf16).</a:t>
-            </a:r>
-          </a:p>
-          <a:p>
-            <a:pPr>
-              <a:spcAft>
-                <a:spcPts val="800"/>
-              </a:spcAft>
-            </a:pPr>
-            <a:r>
-              <a:rPr sz="2000">
-                <a:solidFill>
-                  <a:srgbClr val="101010"/>
-                </a:solidFill>
-              </a:rPr>
-              <a:t>•  Our config: full_shard auto_wrap on LlamaDecoderLayer, use_orig_params=True (required for LoRA), cpu_ram_efficient_loading=true.</a:t>
-            </a:r>
-          </a:p>
-          <a:p>
-            <a:pPr>
-              <a:spcAft>
-                <a:spcPts val="800"/>
-              </a:spcAft>
-            </a:pPr>
-            <a:r>
-              <a:rPr sz="2000">
-                <a:solidFill>
-                  <a:srgbClr val="101010"/>
-                </a:solidFill>
-              </a:rPr>
-              <a:t>•  Two LLaVA-specific bugs we had to patch to get this running:</a:t>
-            </a:r>
-          </a:p>
-          <a:p>
-            <a:pPr lvl="1">
-              <a:spcAft>
-                <a:spcPts val="400"/>
-              </a:spcAft>
-            </a:pPr>
-            <a:r>
-              <a:rPr sz="1700">
-                <a:solidFill>
-                  <a:srgbClr val="555555"/>
-                </a:solidFill>
-              </a:rPr>
-              <a:t>    –  self.vision_tower[0] crashes when loading from a vendored checkpoint where vision_tower isn't a list.</a:t>
-            </a:r>
-          </a:p>
-          <a:p>
-            <a:pPr lvl="1">
-              <a:spcAft>
-                <a:spcPts val="400"/>
-              </a:spcAft>
-            </a:pPr>
-            <a:r>
-              <a:rPr sz="1700">
-                <a:solidFill>
-                  <a:srgbClr val="555555"/>
-                </a:solidFill>
-              </a:rPr>
-              <a:t>    –  LoRA adapters are created in fp32 after the base model is cast to bf16. FSDP requires uniform dtype, so we cast LoRA to bf16 too.</a:t>
-            </a:r>
-          </a:p>
-        </p:txBody>
-      </p:sp>
+              <a:t>    –  Same algorithm, different async behavior — the difference is real on a slow link.</a:t>
+            </a:r>
+          </a:p>
+        </p:txBody>
+      </p:sp>
+      <p:pic>
+        <p:nvPicPr>
+          <p:cNvPr id="4" name="Picture 3" descr="gpu_utilization_curve.png"/>
+          <p:cNvPicPr>
+            <a:picLocks noChangeAspect="1"/>
+          </p:cNvPicPr>
+          <p:nvPr/>
+        </p:nvPicPr>
+        <p:blipFill>
+          <a:blip r:embed="rId2"/>
+          <a:stretch>
+            <a:fillRect/>
+          </a:stretch>
+        </p:blipFill>
+        <p:spPr>
+          <a:xfrm>
+            <a:off x="6766560" y="1828800"/>
+            <a:ext cx="4937760" cy="3086100"/>
+          </a:xfrm>
+          <a:prstGeom prst="rect">
+            <a:avLst/>
+          </a:prstGeom>
+        </p:spPr>
+      </p:pic>
     </p:spTree>
   </p:cSld>
   <p:clrMapOvr>
@@ -5362,8 +5326,8 @@
         </p:nvSpPr>
         <p:spPr>
           <a:xfrm>
-            <a:off x="548640" y="365760"/>
-            <a:ext cx="11064240" cy="822960"/>
+            <a:off x="548640" y="2834640"/>
+            <a:ext cx="11064240" cy="1280160"/>
           </a:xfrm>
           <a:prstGeom prst="rect">
             <a:avLst/>
@@ -5376,230 +5340,18 @@
           </a:bodyPr>
           <a:lstStyle/>
           <a:p>
-            <a:pPr algn="l"/>
-            <a:r>
-              <a:rPr sz="3400" b="1">
-                <a:solidFill>
-                  <a:srgbClr val="101010"/>
-                </a:solidFill>
-              </a:rPr>
-              <a:t>FSDP — results</a:t>
-            </a:r>
-          </a:p>
-        </p:txBody>
-      </p:sp>
-      <p:sp>
-        <p:nvSpPr>
-          <p:cNvPr id="3" name="TextBox 2"/>
-          <p:cNvSpPr txBox="1"/>
-          <p:nvPr/>
-        </p:nvSpPr>
-        <p:spPr>
-          <a:xfrm>
-            <a:off x="548640" y="1371600"/>
-            <a:ext cx="5852160" cy="5120640"/>
-          </a:xfrm>
-          <a:prstGeom prst="rect">
-            <a:avLst/>
-          </a:prstGeom>
-          <a:noFill/>
-        </p:spPr>
-        <p:txBody>
-          <a:bodyPr wrap="square" anchor="ctr">
-            <a:spAutoFit/>
-          </a:bodyPr>
-          <a:lstStyle/>
-          <a:p>
-            <a:pPr>
-              <a:spcAft>
-                <a:spcPts val="800"/>
-              </a:spcAft>
-            </a:pPr>
-            <a:r>
-              <a:rPr sz="1700">
-                <a:solidFill>
-                  <a:srgbClr val="101010"/>
-                </a:solidFill>
-              </a:rPr>
-              <a:t>•  Stopped early at step 28 of 1250 to capture metrics — same shape as the ZeRO-3 timeout.</a:t>
-            </a:r>
-          </a:p>
-          <a:p>
-            <a:pPr>
-              <a:spcAft>
-                <a:spcPts val="800"/>
-              </a:spcAft>
-            </a:pPr>
-            <a:r>
-              <a:rPr sz="1700">
-                <a:solidFill>
-                  <a:srgbClr val="101010"/>
-                </a:solidFill>
-              </a:rPr>
-              <a:t>•  Wall time observed: 39 min. Each step took about 80 seconds.</a:t>
-            </a:r>
-          </a:p>
-          <a:p>
-            <a:pPr lvl="1">
-              <a:spcAft>
-                <a:spcPts val="400"/>
-              </a:spcAft>
-            </a:pPr>
-            <a:r>
-              <a:rPr sz="1400">
-                <a:solidFill>
-                  <a:srgbClr val="555555"/>
-                </a:solidFill>
-              </a:rPr>
-              <a:t>    –  Projected full run: 27.9 hours. Slower than ZeRO-3.</a:t>
-            </a:r>
-          </a:p>
-          <a:p>
-            <a:pPr>
-              <a:spcAft>
-                <a:spcPts val="800"/>
-              </a:spcAft>
-            </a:pPr>
-            <a:r>
-              <a:rPr sz="1700">
-                <a:solidFill>
-                  <a:srgbClr val="101010"/>
-                </a:solidFill>
-              </a:rPr>
-              <a:t>•  Throughput: 0.095 samples/sec — about 22× slower than DDP, ~1.7× slower than ZeRO-3.</a:t>
-            </a:r>
-          </a:p>
-          <a:p>
-            <a:pPr>
-              <a:spcAft>
-                <a:spcPts val="800"/>
-              </a:spcAft>
-            </a:pPr>
-            <a:r>
-              <a:rPr sz="1700">
-                <a:solidFill>
-                  <a:srgbClr val="101010"/>
-                </a:solidFill>
-              </a:rPr>
-              <a:t>•  Peak GPU memory: 32.3 GiB. Right at the card's limit.</a:t>
-            </a:r>
-          </a:p>
-          <a:p>
-            <a:pPr lvl="1">
-              <a:spcAft>
-                <a:spcPts val="400"/>
-              </a:spcAft>
-            </a:pPr>
-            <a:r>
-              <a:rPr sz="1400">
-                <a:solidFill>
-                  <a:srgbClr val="555555"/>
-                </a:solidFill>
-              </a:rPr>
-              <a:t>    –  FSDP's contiguous FlatParameter is bigger than DeepSpeed's bucket-based scheme.</a:t>
-            </a:r>
-          </a:p>
-          <a:p>
-            <a:pPr>
-              <a:spcAft>
-                <a:spcPts val="800"/>
-              </a:spcAft>
-            </a:pPr>
-            <a:r>
-              <a:rPr sz="1700">
-                <a:solidFill>
-                  <a:srgbClr val="101010"/>
-                </a:solidFill>
-              </a:rPr>
-              <a:t>•  GPU utilization: 97.5%.</a:t>
-            </a:r>
-          </a:p>
-          <a:p>
-            <a:pPr>
-              <a:spcAft>
-                <a:spcPts val="800"/>
-              </a:spcAft>
-            </a:pPr>
-            <a:r>
-              <a:rPr sz="1700">
-                <a:solidFill>
-                  <a:srgbClr val="101010"/>
-                </a:solidFill>
-              </a:rPr>
-              <a:t>•  Why slower than ZeRO-3 on the same hardware?</a:t>
-            </a:r>
-          </a:p>
-          <a:p>
-            <a:pPr lvl="1">
-              <a:spcAft>
-                <a:spcPts val="400"/>
-              </a:spcAft>
-            </a:pPr>
-            <a:r>
-              <a:rPr sz="1400">
-                <a:solidFill>
-                  <a:srgbClr val="555555"/>
-                </a:solidFill>
-              </a:rPr>
-              <a:t>    –  DeepSpeed's bounded async config (50 MB buckets) overlaps comm with compute aggressively.</a:t>
-            </a:r>
-          </a:p>
-          <a:p>
-            <a:pPr lvl="1">
-              <a:spcAft>
-                <a:spcPts val="400"/>
-              </a:spcAft>
-            </a:pPr>
-            <a:r>
-              <a:rPr sz="1400">
-                <a:solidFill>
-                  <a:srgbClr val="555555"/>
-                </a:solidFill>
-              </a:rPr>
-              <a:t>    –  FSDP's defaults wait for each transformer block's AllGather to finish before computing.</a:t>
-            </a:r>
-          </a:p>
-          <a:p>
-            <a:pPr lvl="1">
-              <a:spcAft>
-                <a:spcPts val="400"/>
-              </a:spcAft>
-            </a:pPr>
-            <a:r>
-              <a:rPr sz="1400">
-                <a:solidFill>
-                  <a:srgbClr val="555555"/>
-                </a:solidFill>
-              </a:rPr>
-              <a:t>    –  Same algorithm, different async behavior — the difference is real on a slow link.</a:t>
-            </a:r>
-          </a:p>
-        </p:txBody>
-      </p:sp>
-      <p:pic>
-        <p:nvPicPr>
-          <p:cNvPr id="4" name="Picture 3" descr="gpu_utilization_curve.png"/>
-          <p:cNvPicPr>
-            <a:picLocks noChangeAspect="1"/>
-          </p:cNvPicPr>
-          <p:nvPr/>
-        </p:nvPicPr>
-        <p:blipFill>
-          <a:blip r:embed="rId2"/>
-          <a:stretch>
-            <a:fillRect/>
-          </a:stretch>
-        </p:blipFill>
-        <p:spPr>
-          <a:xfrm>
-            <a:off x="6766560" y="1828800"/>
-            <a:ext cx="4937760" cy="3086100"/>
-          </a:xfrm>
-          <a:prstGeom prst="rect">
-            <a:avLst/>
-          </a:prstGeom>
-        </p:spPr>
-      </p:pic>
+            <a:pPr algn="ctr"/>
+            <a:r>
+              <a:rPr sz="5400" b="0">
+                <a:solidFill>
+                  <a:srgbClr val="101010"/>
+                </a:solidFill>
+              </a:rPr>
+              <a:t>Tensor Parallelism</a:t>
+            </a:r>
+          </a:p>
+        </p:txBody>
+      </p:sp>
     </p:spTree>
   </p:cSld>
   <p:clrMapOvr>
@@ -5626,8 +5378,8 @@
         </p:nvSpPr>
         <p:spPr>
           <a:xfrm>
-            <a:off x="548640" y="2834640"/>
-            <a:ext cx="11064240" cy="1280160"/>
+            <a:off x="548640" y="365760"/>
+            <a:ext cx="11064240" cy="822960"/>
           </a:xfrm>
           <a:prstGeom prst="rect">
             <a:avLst/>
@@ -5640,14 +5392,157 @@
           </a:bodyPr>
           <a:lstStyle/>
           <a:p>
-            <a:pPr algn="ctr"/>
-            <a:r>
-              <a:rPr sz="5400" b="0">
-                <a:solidFill>
-                  <a:srgbClr val="101010"/>
-                </a:solidFill>
-              </a:rPr>
-              <a:t>Putting it all together</a:t>
+            <a:pPr algn="l"/>
+            <a:r>
+              <a:rPr sz="3400" b="1">
+                <a:solidFill>
+                  <a:srgbClr val="101010"/>
+                </a:solidFill>
+              </a:rPr>
+              <a:t>Tensor Parallel: split the matmuls (Rassul)</a:t>
+            </a:r>
+          </a:p>
+        </p:txBody>
+      </p:sp>
+      <p:sp>
+        <p:nvSpPr>
+          <p:cNvPr id="3" name="TextBox 2"/>
+          <p:cNvSpPr txBox="1"/>
+          <p:nvPr/>
+        </p:nvSpPr>
+        <p:spPr>
+          <a:xfrm>
+            <a:off x="548640" y="1371600"/>
+            <a:ext cx="11064240" cy="5120640"/>
+          </a:xfrm>
+          <a:prstGeom prst="rect">
+            <a:avLst/>
+          </a:prstGeom>
+          <a:noFill/>
+        </p:spPr>
+        <p:txBody>
+          <a:bodyPr wrap="square" anchor="ctr">
+            <a:spAutoFit/>
+          </a:bodyPr>
+          <a:lstStyle/>
+          <a:p>
+            <a:pPr>
+              <a:spcAft>
+                <a:spcPts val="800"/>
+              </a:spcAft>
+            </a:pPr>
+            <a:r>
+              <a:rPr sz="1800">
+                <a:solidFill>
+                  <a:srgbClr val="101010"/>
+                </a:solidFill>
+              </a:rPr>
+              <a:t>•  Megatron-style intra-layer model parallelism. Each LlamaDecoderLayer's linear sublayers are sharded column-wise or row-wise across the two ranks.</a:t>
+            </a:r>
+          </a:p>
+          <a:p>
+            <a:pPr>
+              <a:spcAft>
+                <a:spcPts val="800"/>
+              </a:spcAft>
+            </a:pPr>
+            <a:r>
+              <a:rPr sz="1800">
+                <a:solidFill>
+                  <a:srgbClr val="101010"/>
+                </a:solidFill>
+              </a:rPr>
+              <a:t>•  Sharding plan, applied per layer via torch.distributed.tensor.parallel.parallelize_module:</a:t>
+            </a:r>
+          </a:p>
+          <a:p>
+            <a:pPr lvl="1">
+              <a:spcAft>
+                <a:spcPts val="400"/>
+              </a:spcAft>
+            </a:pPr>
+            <a:r>
+              <a:rPr sz="1500">
+                <a:solidFill>
+                  <a:srgbClr val="555555"/>
+                </a:solidFill>
+              </a:rPr>
+              <a:t>    –  q_proj, k_proj, v_proj, gate_proj, up_proj — Colwise (output dim split).</a:t>
+            </a:r>
+          </a:p>
+          <a:p>
+            <a:pPr lvl="1">
+              <a:spcAft>
+                <a:spcPts val="400"/>
+              </a:spcAft>
+            </a:pPr>
+            <a:r>
+              <a:rPr sz="1500">
+                <a:solidFill>
+                  <a:srgbClr val="555555"/>
+                </a:solidFill>
+              </a:rPr>
+              <a:t>    –  o_proj, down_proj — Rowwise (input dim split, AllReduce on output).</a:t>
+            </a:r>
+          </a:p>
+          <a:p>
+            <a:pPr lvl="1">
+              <a:spcAft>
+                <a:spcPts val="400"/>
+              </a:spcAft>
+            </a:pPr>
+            <a:r>
+              <a:rPr sz="1500">
+                <a:solidFill>
+                  <a:srgbClr val="555555"/>
+                </a:solidFill>
+              </a:rPr>
+              <a:t>    –  After parallelize, num_heads / num_key_value_heads / hidden_size are halved per rank.</a:t>
+            </a:r>
+          </a:p>
+          <a:p>
+            <a:pPr>
+              <a:spcAft>
+                <a:spcPts val="800"/>
+              </a:spcAft>
+            </a:pPr>
+            <a:r>
+              <a:rPr sz="1800">
+                <a:solidFill>
+                  <a:srgbClr val="101010"/>
+                </a:solidFill>
+              </a:rPr>
+              <a:t>•  Per-step communication: ~6 cross-node AllReduces per layer × 32 layers × 2 (fwd+bwd) ≈ 384 collectives per microbatch, × 4 grad-accum.</a:t>
+            </a:r>
+          </a:p>
+          <a:p>
+            <a:pPr>
+              <a:spcAft>
+                <a:spcPts val="800"/>
+              </a:spcAft>
+            </a:pPr>
+            <a:r>
+              <a:rPr sz="1800">
+                <a:solidFill>
+                  <a:srgbClr val="101010"/>
+                </a:solidFill>
+              </a:rPr>
+              <a:t>•  We trained the MLP projection only — LoRA on TP-sharded base linears is fragile in PyTorch 2.1.2 (DTensor + LoRA's lora_A/B reshape don't compose cleanly).</a:t>
+            </a:r>
+          </a:p>
+          <a:p>
+            <a:pPr>
+              <a:spcAft>
+                <a:spcPts val="800"/>
+              </a:spcAft>
+            </a:pPr>
+            <a:r>
+              <a:rPr sz="1800">
+                <a:solidFill>
+                  <a:srgbClr val="101010"/>
+                </a:solidFill>
+              </a:rPr>
+              <a:t>•  Custom 2-rank torchrun launcher: LLaVA/llava/train/train_tp_dist.py + scripts/run_stage2_tp.sh.</a:t>
             </a:r>
           </a:p>
         </p:txBody>
@@ -5699,7 +5594,7 @@
                   <a:srgbClr val="101010"/>
                 </a:solidFill>
               </a:rPr>
-              <a:t>Throughput by method</a:t>
+              <a:t>TP — results</a:t>
             </a:r>
           </a:p>
         </p:txBody>
@@ -5712,8 +5607,8 @@
         </p:nvSpPr>
         <p:spPr>
           <a:xfrm>
-            <a:off x="548640" y="1051560"/>
-            <a:ext cx="11064240" cy="365760"/>
+            <a:off x="548640" y="1371600"/>
+            <a:ext cx="5852160" cy="5120640"/>
           </a:xfrm>
           <a:prstGeom prst="rect">
             <a:avLst/>
@@ -5721,25 +5616,120 @@
           <a:noFill/>
         </p:spPr>
         <p:txBody>
-          <a:bodyPr wrap="none">
+          <a:bodyPr wrap="square" anchor="ctr">
             <a:spAutoFit/>
           </a:bodyPr>
           <a:lstStyle/>
           <a:p>
-            <a:r>
-              <a:rPr sz="1800" i="1">
+            <a:pPr>
+              <a:spcAft>
+                <a:spcPts val="800"/>
+              </a:spcAft>
+            </a:pPr>
+            <a:r>
+              <a:rPr sz="1800">
+                <a:solidFill>
+                  <a:srgbClr val="101010"/>
+                </a:solidFill>
+              </a:rPr>
+              <a:t>•  Ran a full epoch — 1250 steps × effective batch 8 — at 11 s/step.</a:t>
+            </a:r>
+          </a:p>
+          <a:p>
+            <a:pPr>
+              <a:spcAft>
+                <a:spcPts val="800"/>
+              </a:spcAft>
+            </a:pPr>
+            <a:r>
+              <a:rPr sz="1800">
+                <a:solidFill>
+                  <a:srgbClr val="101010"/>
+                </a:solidFill>
+              </a:rPr>
+              <a:t>•  Wall time: 3.85 h. Throughput: 0.72 sps — 0.32× DDP, but 4× faster than ZeRO-3 and 8× faster than FSDP.</a:t>
+            </a:r>
+          </a:p>
+          <a:p>
+            <a:pPr lvl="1">
+              <a:spcAft>
+                <a:spcPts val="400"/>
+              </a:spcAft>
+            </a:pPr>
+            <a:r>
+              <a:rPr sz="1500">
                 <a:solidFill>
                   <a:srgbClr val="555555"/>
                 </a:solidFill>
               </a:rPr>
-              <a:t>ZeRO-2 wins. ZeRO-3 and FSDP collapse on the cross-node link.</a:t>
+              <a:t>    –  TP ships ~2 GB of activations per microbatch vs ZeRO-3's ~14 GB of weights — order of magnitude less.</a:t>
+            </a:r>
+          </a:p>
+          <a:p>
+            <a:pPr>
+              <a:spcAft>
+                <a:spcPts val="800"/>
+              </a:spcAft>
+            </a:pPr>
+            <a:r>
+              <a:rPr sz="1800">
+                <a:solidFill>
+                  <a:srgbClr val="101010"/>
+                </a:solidFill>
+              </a:rPr>
+              <a:t>•  Peak GPU memory: 30.6 GiB. GPU util: 77.7%. Final loss: 1.03 — matches DDP at full epoch.</a:t>
+            </a:r>
+          </a:p>
+          <a:p>
+            <a:pPr>
+              <a:spcAft>
+                <a:spcPts val="800"/>
+              </a:spcAft>
+            </a:pPr>
+            <a:r>
+              <a:rPr sz="1800">
+                <a:solidFill>
+                  <a:srgbClr val="101010"/>
+                </a:solidFill>
+              </a:rPr>
+              <a:t>•  Takeaway: TP is the only model-parallel method actually usable on this link.</a:t>
+            </a:r>
+          </a:p>
+          <a:p>
+            <a:pPr lvl="1">
+              <a:spcAft>
+                <a:spcPts val="400"/>
+              </a:spcAft>
+            </a:pPr>
+            <a:r>
+              <a:rPr sz="1500">
+                <a:solidFill>
+                  <a:srgbClr val="555555"/>
+                </a:solidFill>
+              </a:rPr>
+              <a:t>    –  Still 3× slower than DDP — per-layer collectives accumulate Ethernet latency.</a:t>
+            </a:r>
+          </a:p>
+          <a:p>
+            <a:pPr lvl="1">
+              <a:spcAft>
+                <a:spcPts val="400"/>
+              </a:spcAft>
+            </a:pPr>
+            <a:r>
+              <a:rPr sz="1500">
+                <a:solidFill>
+                  <a:srgbClr val="555555"/>
+                </a:solidFill>
+              </a:rPr>
+              <a:t>    –  Designed for NVLink, where AllReduce is essentially free.</a:t>
             </a:r>
           </a:p>
         </p:txBody>
       </p:sp>
       <p:pic>
         <p:nvPicPr>
-          <p:cNvPr id="4" name="Picture 3" descr="1_throughput.png"/>
+          <p:cNvPr id="4" name="Picture 3" descr="gpu_utilization_curve.png"/>
           <p:cNvPicPr>
             <a:picLocks noChangeAspect="1"/>
           </p:cNvPicPr>
@@ -5753,8 +5743,8 @@
         </p:blipFill>
         <p:spPr>
           <a:xfrm>
-            <a:off x="2208276" y="1371600"/>
-            <a:ext cx="7772400" cy="5181600"/>
+            <a:off x="6766560" y="1828800"/>
+            <a:ext cx="4937760" cy="3086100"/>
           </a:xfrm>
           <a:prstGeom prst="rect">
             <a:avLst/>
@@ -5787,8 +5777,8 @@
         </p:nvSpPr>
         <p:spPr>
           <a:xfrm>
-            <a:off x="548640" y="365760"/>
-            <a:ext cx="11064240" cy="822960"/>
+            <a:off x="548640" y="2834640"/>
+            <a:ext cx="11064240" cy="1280160"/>
           </a:xfrm>
           <a:prstGeom prst="rect">
             <a:avLst/>
@@ -5801,75 +5791,18 @@
           </a:bodyPr>
           <a:lstStyle/>
           <a:p>
-            <a:pPr algn="l"/>
-            <a:r>
-              <a:rPr sz="3400" b="1">
-                <a:solidFill>
-                  <a:srgbClr val="101010"/>
-                </a:solidFill>
-              </a:rPr>
-              <a:t>Speedup vs DDP</a:t>
-            </a:r>
-          </a:p>
-        </p:txBody>
-      </p:sp>
-      <p:sp>
-        <p:nvSpPr>
-          <p:cNvPr id="3" name="TextBox 2"/>
-          <p:cNvSpPr txBox="1"/>
-          <p:nvPr/>
-        </p:nvSpPr>
-        <p:spPr>
-          <a:xfrm>
-            <a:off x="548640" y="1051560"/>
-            <a:ext cx="11064240" cy="365760"/>
-          </a:xfrm>
-          <a:prstGeom prst="rect">
-            <a:avLst/>
-          </a:prstGeom>
-          <a:noFill/>
-        </p:spPr>
-        <p:txBody>
-          <a:bodyPr wrap="none">
-            <a:spAutoFit/>
-          </a:bodyPr>
-          <a:lstStyle/>
-          <a:p>
-            <a:r>
-              <a:rPr sz="1800" i="1">
-                <a:solidFill>
-                  <a:srgbClr val="555555"/>
-                </a:solidFill>
-              </a:rPr>
-              <a:t>Only ZeRO-2 actually beats the naïve baseline.</a:t>
-            </a:r>
-          </a:p>
-        </p:txBody>
-      </p:sp>
-      <p:pic>
-        <p:nvPicPr>
-          <p:cNvPr id="4" name="Picture 3" descr="3_speedup_vs_ddp.png"/>
-          <p:cNvPicPr>
-            <a:picLocks noChangeAspect="1"/>
-          </p:cNvPicPr>
-          <p:nvPr/>
-        </p:nvPicPr>
-        <p:blipFill>
-          <a:blip r:embed="rId2"/>
-          <a:stretch>
-            <a:fillRect/>
-          </a:stretch>
-        </p:blipFill>
-        <p:spPr>
-          <a:xfrm>
-            <a:off x="2208276" y="1371600"/>
-            <a:ext cx="7772400" cy="5181600"/>
-          </a:xfrm>
-          <a:prstGeom prst="rect">
-            <a:avLst/>
-          </a:prstGeom>
-        </p:spPr>
-      </p:pic>
+            <a:pPr algn="ctr"/>
+            <a:r>
+              <a:rPr sz="5400" b="0">
+                <a:solidFill>
+                  <a:srgbClr val="101010"/>
+                </a:solidFill>
+              </a:rPr>
+              <a:t>Putting it all together</a:t>
+            </a:r>
+          </a:p>
+        </p:txBody>
+      </p:sp>
     </p:spTree>
   </p:cSld>
   <p:clrMapOvr>
@@ -5917,7 +5850,7 @@
                   <a:srgbClr val="101010"/>
                 </a:solidFill>
               </a:rPr>
-              <a:t>Peak GPU memory</a:t>
+              <a:t>Throughput by method</a:t>
             </a:r>
           </a:p>
         </p:txBody>
@@ -5931,7 +5864,7 @@
         <p:spPr>
           <a:xfrm>
             <a:off x="548640" y="1051560"/>
-            <a:ext cx="11064240" cy="365760"/>
+            <a:ext cx="11064240" cy="685800"/>
           </a:xfrm>
           <a:prstGeom prst="rect">
             <a:avLst/>
@@ -5939,25 +5872,25 @@
           <a:noFill/>
         </p:spPr>
         <p:txBody>
-          <a:bodyPr wrap="none">
+          <a:bodyPr wrap="square">
             <a:spAutoFit/>
           </a:bodyPr>
           <a:lstStyle/>
           <a:p>
             <a:r>
-              <a:rPr sz="1800" i="1">
+              <a:rPr sz="1600" i="1">
                 <a:solidFill>
                   <a:srgbClr val="555555"/>
                 </a:solidFill>
               </a:rPr>
-              <a:t>ZeRO-3 shards the most, FSDP saturates the card. ZeRO-2 hits a sweet spot.</a:t>
+              <a:t>ZeRO-2 wins, ZeRO-1 close behind. ZeRO-3 / FSDP collapse on Ethernet; TP in the middle.</a:t>
             </a:r>
           </a:p>
         </p:txBody>
       </p:sp>
       <p:pic>
         <p:nvPicPr>
-          <p:cNvPr id="4" name="Picture 3" descr="4_gpu_memory.png"/>
+          <p:cNvPr id="4" name="Picture 3" descr="1_throughput.png"/>
           <p:cNvPicPr>
             <a:picLocks noChangeAspect="1"/>
           </p:cNvPicPr>
@@ -5971,7 +5904,7 @@
         </p:blipFill>
         <p:spPr>
           <a:xfrm>
-            <a:off x="2208276" y="1371600"/>
+            <a:off x="2208276" y="1737360"/>
             <a:ext cx="7772400" cy="5181600"/>
           </a:xfrm>
           <a:prstGeom prst="rect">
@@ -6026,7 +5959,7 @@
                   <a:srgbClr val="101010"/>
                 </a:solidFill>
               </a:rPr>
-              <a:t>Goodput — loss reduction per second</a:t>
+              <a:t>Peak GPU memory</a:t>
             </a:r>
           </a:p>
         </p:txBody>
@@ -6040,7 +5973,7 @@
         <p:spPr>
           <a:xfrm>
             <a:off x="548640" y="1051560"/>
-            <a:ext cx="11064240" cy="365760"/>
+            <a:ext cx="11064240" cy="685800"/>
           </a:xfrm>
           <a:prstGeom prst="rect">
             <a:avLst/>
@@ -6048,25 +5981,25 @@
           <a:noFill/>
         </p:spPr>
         <p:txBody>
-          <a:bodyPr wrap="none">
+          <a:bodyPr wrap="square">
             <a:spAutoFit/>
           </a:bodyPr>
           <a:lstStyle/>
           <a:p>
             <a:r>
-              <a:rPr sz="1800" i="1">
+              <a:rPr sz="1600" i="1">
                 <a:solidFill>
                   <a:srgbClr val="555555"/>
                 </a:solidFill>
               </a:rPr>
-              <a:t>What you get back from each second of GPU time.</a:t>
+              <a:t>ZeRO-3 shards the most. FSDP and TP saturate the card. ZeRO-2 hits a sweet spot.</a:t>
             </a:r>
           </a:p>
         </p:txBody>
       </p:sp>
       <p:pic>
         <p:nvPicPr>
-          <p:cNvPr id="4" name="Picture 3" descr="9a_goodput_per_sec.png"/>
+          <p:cNvPr id="4" name="Picture 3" descr="4_gpu_memory.png"/>
           <p:cNvPicPr>
             <a:picLocks noChangeAspect="1"/>
           </p:cNvPicPr>
@@ -6080,7 +6013,7 @@
         </p:blipFill>
         <p:spPr>
           <a:xfrm>
-            <a:off x="2208276" y="1371600"/>
+            <a:off x="2208276" y="1737360"/>
             <a:ext cx="7772400" cy="5181600"/>
           </a:xfrm>
           <a:prstGeom prst="rect">
@@ -6135,7 +6068,7 @@
                   <a:srgbClr val="101010"/>
                 </a:solidFill>
               </a:rPr>
-              <a:t>Statistical efficiency</a:t>
+              <a:t>Goodput — loss reduction per second</a:t>
             </a:r>
           </a:p>
         </p:txBody>
@@ -6149,7 +6082,7 @@
         <p:spPr>
           <a:xfrm>
             <a:off x="548640" y="1051560"/>
-            <a:ext cx="11064240" cy="365760"/>
+            <a:ext cx="11064240" cy="685800"/>
           </a:xfrm>
           <a:prstGeom prst="rect">
             <a:avLst/>
@@ -6157,25 +6090,25 @@
           <a:noFill/>
         </p:spPr>
         <p:txBody>
-          <a:bodyPr wrap="none">
+          <a:bodyPr wrap="square">
             <a:spAutoFit/>
           </a:bodyPr>
           <a:lstStyle/>
           <a:p>
             <a:r>
-              <a:rPr sz="1800" i="1">
+              <a:rPr sz="1600" i="1">
                 <a:solidFill>
                   <a:srgbClr val="555555"/>
                 </a:solidFill>
               </a:rPr>
-              <a:t>Loss reduction per training sample. Larger effective batches converge faster per sample.</a:t>
+              <a:t>Full-epoch methods cluster on top; cross-layer-comm methods (ZeRO-3 / FSDP / TP) sit below, ordered by throughput.</a:t>
             </a:r>
           </a:p>
         </p:txBody>
       </p:sp>
       <p:pic>
         <p:nvPicPr>
-          <p:cNvPr id="4" name="Picture 3" descr="9b_goodput_per_sample.png"/>
+          <p:cNvPr id="4" name="Picture 3" descr="9a_goodput_per_sec.png"/>
           <p:cNvPicPr>
             <a:picLocks noChangeAspect="1"/>
           </p:cNvPicPr>
@@ -6189,7 +6122,7 @@
         </p:blipFill>
         <p:spPr>
           <a:xfrm>
-            <a:off x="2208276" y="1371600"/>
+            <a:off x="2208276" y="1737360"/>
             <a:ext cx="7772400" cy="5181600"/>
           </a:xfrm>
           <a:prstGeom prst="rect">
@@ -6258,7 +6191,7 @@
         <p:spPr>
           <a:xfrm>
             <a:off x="548640" y="1051560"/>
-            <a:ext cx="11064240" cy="365760"/>
+            <a:ext cx="11064240" cy="685800"/>
           </a:xfrm>
           <a:prstGeom prst="rect">
             <a:avLst/>
@@ -6266,18 +6199,18 @@
           <a:noFill/>
         </p:spPr>
         <p:txBody>
-          <a:bodyPr wrap="none">
+          <a:bodyPr wrap="square">
             <a:spAutoFit/>
           </a:bodyPr>
           <a:lstStyle/>
           <a:p>
             <a:r>
-              <a:rPr sz="1800" i="1">
+              <a:rPr sz="1600" i="1">
                 <a:solidFill>
                   <a:srgbClr val="555555"/>
                 </a:solidFill>
               </a:rPr>
-              <a:t>Methods that completed all reach a similar loss. The gap is wall-clock, not statistical.</a:t>
+              <a:t>All methods follow the same loss-vs-step curve at matched batch. TP's curve extends further because its smaller batch (8 vs 32) needs 1250 steps for a full epoch.</a:t>
             </a:r>
           </a:p>
         </p:txBody>
@@ -6298,7 +6231,7 @@
         </p:blipFill>
         <p:spPr>
           <a:xfrm>
-            <a:off x="1979676" y="1371600"/>
+            <a:off x="1979676" y="1737360"/>
             <a:ext cx="8229600" cy="4572000"/>
           </a:xfrm>
           <a:prstGeom prst="rect">
@@ -6386,12 +6319,42 @@
               </a:spcAft>
             </a:pPr>
             <a:r>
-              <a:rPr sz="2100">
-                <a:solidFill>
-                  <a:srgbClr val="101010"/>
-                </a:solidFill>
-              </a:rPr>
-              <a:t>•  ZeRO-2 is the right tool for LoRA fine-tuning on slow interconnects.</a:t>
+              <a:rPr sz="2200">
+                <a:solidFill>
+                  <a:srgbClr val="101010"/>
+                </a:solidFill>
+              </a:rPr>
+              <a:t>•  ZeRO-2 wins for LoRA on slow interconnects (1.28× DDP). ZeRO-1 is close behind at 1.15×.</a:t>
+            </a:r>
+          </a:p>
+          <a:p>
+            <a:pPr>
+              <a:spcAft>
+                <a:spcPts val="800"/>
+              </a:spcAft>
+            </a:pPr>
+            <a:r>
+              <a:rPr sz="2200">
+                <a:solidFill>
+                  <a:srgbClr val="101010"/>
+                </a:solidFill>
+              </a:rPr>
+              <a:t>•  Pipeline parallelism made the model fit but not faster — Gloo cross-node transfers cost more than DDP's single AllReduce.</a:t>
+            </a:r>
+          </a:p>
+          <a:p>
+            <a:pPr>
+              <a:spcAft>
+                <a:spcPts val="800"/>
+              </a:spcAft>
+            </a:pPr>
+            <a:r>
+              <a:rPr sz="2200">
+                <a:solidFill>
+                  <a:srgbClr val="101010"/>
+                </a:solidFill>
+              </a:rPr>
+              <a:t>•  ZeRO-3 and FSDP fall apart over 1 Gbps Ethernet — per-layer AllGather of bf16 weights is intractable.</a:t>
             </a:r>
           </a:p>
           <a:p>
@@ -6401,132 +6364,57 @@
               </a:spcAft>
             </a:pPr>
             <a:r>
-              <a:rPr sz="1800">
+              <a:rPr sz="1900">
                 <a:solidFill>
                   <a:srgbClr val="555555"/>
                 </a:solidFill>
               </a:rPr>
-              <a:t>    –  Sharding optimizer + grads is enough. DeepSpeed's overlap quietly does the rest.</a:t>
-            </a:r>
-          </a:p>
-          <a:p>
-            <a:pPr>
-              <a:spcAft>
-                <a:spcPts val="800"/>
-              </a:spcAft>
-            </a:pPr>
-            <a:r>
-              <a:rPr sz="2100">
-                <a:solidFill>
-                  <a:srgbClr val="101010"/>
-                </a:solidFill>
-              </a:rPr>
-              <a:t>•  Pipeline parallelism made the model fit but not faster.</a:t>
-            </a:r>
-          </a:p>
-          <a:p>
-            <a:pPr lvl="1">
-              <a:spcAft>
-                <a:spcPts val="400"/>
-              </a:spcAft>
-            </a:pPr>
-            <a:r>
-              <a:rPr sz="1800">
-                <a:solidFill>
-                  <a:srgbClr val="555555"/>
-                </a:solidFill>
-              </a:rPr>
-              <a:t>    –  Cross-node Gloo activation transfers are slower than DDP's single AllReduce.</a:t>
-            </a:r>
-          </a:p>
-          <a:p>
-            <a:pPr lvl="1">
-              <a:spcAft>
-                <a:spcPts val="400"/>
-              </a:spcAft>
-            </a:pPr>
-            <a:r>
-              <a:rPr sz="1800">
-                <a:solidFill>
-                  <a:srgbClr val="555555"/>
-                </a:solidFill>
-              </a:rPr>
-              <a:t>    –  Layer count is a poor proxy for memory cost — the vision tower and LM head dominate.</a:t>
-            </a:r>
-          </a:p>
-          <a:p>
-            <a:pPr>
-              <a:spcAft>
-                <a:spcPts val="800"/>
-              </a:spcAft>
-            </a:pPr>
-            <a:r>
-              <a:rPr sz="2100">
-                <a:solidFill>
-                  <a:srgbClr val="101010"/>
-                </a:solidFill>
-              </a:rPr>
-              <a:t>•  ZeRO-3 and FSDP fall apart over Ethernet.</a:t>
-            </a:r>
-          </a:p>
-          <a:p>
-            <a:pPr lvl="1">
-              <a:spcAft>
-                <a:spcPts val="400"/>
-              </a:spcAft>
-            </a:pPr>
-            <a:r>
-              <a:rPr sz="1800">
-                <a:solidFill>
-                  <a:srgbClr val="555555"/>
-                </a:solidFill>
-              </a:rPr>
-              <a:t>    –  Per-layer AllGather of full bf16 weights is intractable on 1 Gbps.</a:t>
-            </a:r>
-          </a:p>
-          <a:p>
-            <a:pPr lvl="1">
-              <a:spcAft>
-                <a:spcPts val="400"/>
-              </a:spcAft>
-            </a:pPr>
-            <a:r>
-              <a:rPr sz="1800">
-                <a:solidFill>
-                  <a:srgbClr val="555555"/>
-                </a:solidFill>
-              </a:rPr>
-              <a:t>    –  Implementation matters — DeepSpeed ZeRO-3 is ~1.7× faster than PyTorch FSDP because of better overlap.</a:t>
-            </a:r>
-          </a:p>
-          <a:p>
-            <a:pPr>
-              <a:spcAft>
-                <a:spcPts val="800"/>
-              </a:spcAft>
-            </a:pPr>
-            <a:r>
-              <a:rPr sz="2100">
-                <a:solidFill>
-                  <a:srgbClr val="101010"/>
-                </a:solidFill>
-              </a:rPr>
-              <a:t>•  These methods would scale on InfiniBand or NVLink. Wrong tool for this hardware.</a:t>
-            </a:r>
-          </a:p>
-          <a:p>
-            <a:pPr>
-              <a:spcAft>
-                <a:spcPts val="800"/>
-              </a:spcAft>
-            </a:pPr>
-            <a:r>
-              <a:rPr sz="2100">
-                <a:solidFill>
-                  <a:srgbClr val="101010"/>
-                </a:solidFill>
-              </a:rPr>
-              <a:t>•  A 7B model with LoRA fits comfortably on a single 32 GiB card. Pick a data-parallel variant.</a:t>
+              <a:t>    –  Implementation matters: DeepSpeed ZeRO-3 is ~1.7× faster than PyTorch FSDP, thanks to better overlap.</a:t>
+            </a:r>
+          </a:p>
+          <a:p>
+            <a:pPr>
+              <a:spcAft>
+                <a:spcPts val="800"/>
+              </a:spcAft>
+            </a:pPr>
+            <a:r>
+              <a:rPr sz="2200">
+                <a:solidFill>
+                  <a:srgbClr val="101010"/>
+                </a:solidFill>
+              </a:rPr>
+              <a:t>•  Tensor Parallel is the only model-parallel method actually usable here — 3× slower than DDP, but ships ~7× less data than ZeRO-3.</a:t>
+            </a:r>
+          </a:p>
+          <a:p>
+            <a:pPr>
+              <a:spcAft>
+                <a:spcPts val="800"/>
+              </a:spcAft>
+            </a:pPr>
+            <a:r>
+              <a:rPr sz="2200">
+                <a:solidFill>
+                  <a:srgbClr val="101010"/>
+                </a:solidFill>
+              </a:rPr>
+              <a:t>•  The heavy methods (ZeRO-3, FSDP, TP) all need NVLink or InfiniBand. Wrong tool for Ethernet.</a:t>
+            </a:r>
+          </a:p>
+          <a:p>
+            <a:pPr>
+              <a:spcAft>
+                <a:spcPts val="800"/>
+              </a:spcAft>
+            </a:pPr>
+            <a:r>
+              <a:rPr sz="2200">
+                <a:solidFill>
+                  <a:srgbClr val="101010"/>
+                </a:solidFill>
+              </a:rPr>
+              <a:t>•  A 7B model with LoRA fits comfortably on one 32 GiB card — pick a data-parallel variant.</a:t>
             </a:r>
           </a:p>
         </p:txBody>
@@ -7013,7 +6901,7 @@
                   <a:srgbClr val="555555"/>
                 </a:solidFill>
               </a:rPr>
-              <a:t>    –  DDP and ZeRO-2: 32 (per_device=16, world=2)</a:t>
+              <a:t>    –  DDP, ZeRO-1, ZeRO-2: 32 (per_device=16, world=2)</a:t>
             </a:r>
           </a:p>
           <a:p>
@@ -7043,7 +6931,22 @@
                   <a:srgbClr val="555555"/>
                 </a:solidFill>
               </a:rPr>
-              <a:t>    –  ZeRO-3 and FSDP: 8 (per_device=1, accum=4, world=2)</a:t>
+              <a:t>    –  ZeRO-3, FSDP, TP: 8 (per_device=1, accum=4, world=2)</a:t>
+            </a:r>
+          </a:p>
+          <a:p>
+            <a:pPr lvl="1">
+              <a:spcAft>
+                <a:spcPts val="400"/>
+              </a:spcAft>
+            </a:pPr>
+            <a:r>
+              <a:rPr sz="1900">
+                <a:solidFill>
+                  <a:srgbClr val="555555"/>
+                </a:solidFill>
+              </a:rPr>
+              <a:t>    –  TP trains the projection only — no LoRA, since LoRA on TP-sharded base linears is fragile in PyTorch 2.1.</a:t>
             </a:r>
           </a:p>
         </p:txBody>
@@ -7163,7 +7066,7 @@
                   <a:srgbClr val="101010"/>
                 </a:solidFill>
               </a:rPr>
-              <a:t>•  Pipeline parallelism — the model is split across the two nodes. Owned by Ghallab.</a:t>
+              <a:t>•  Pipeline parallelism — the model is split across the two nodes layer-wise. Owned by Ghallab.</a:t>
             </a:r>
           </a:p>
           <a:p>
@@ -7178,7 +7081,7 @@
                   <a:srgbClr val="101010"/>
                 </a:solidFill>
               </a:rPr>
-              <a:t>•  ZeRO-2 — data parallelism with sharded optimizer states and gradients. Owned by Omar.</a:t>
+              <a:t>•  ZeRO-1 — DDP with sharded optimizer states. Owned by Omar.</a:t>
             </a:r>
           </a:p>
           <a:p>
@@ -7193,7 +7096,7 @@
                   <a:srgbClr val="101010"/>
                 </a:solidFill>
               </a:rPr>
-              <a:t>•  ZeRO-3 — same as ZeRO-2 but parameters are also sharded. Owned by Rassul.</a:t>
+              <a:t>•  ZeRO-2 — same plus sharded gradients. Owned by Omar.</a:t>
             </a:r>
           </a:p>
           <a:p>
@@ -7208,7 +7111,37 @@
                   <a:srgbClr val="101010"/>
                 </a:solidFill>
               </a:rPr>
-              <a:t>•  PyTorch FSDP — PyTorch-native equivalent of ZeRO-3, different implementation. Owned by Rassul.</a:t>
+              <a:t>•  ZeRO-3 — same plus sharded parameters. Owned by Omar.</a:t>
+            </a:r>
+          </a:p>
+          <a:p>
+            <a:pPr>
+              <a:spcAft>
+                <a:spcPts val="800"/>
+              </a:spcAft>
+            </a:pPr>
+            <a:r>
+              <a:rPr sz="2200">
+                <a:solidFill>
+                  <a:srgbClr val="101010"/>
+                </a:solidFill>
+              </a:rPr>
+              <a:t>•  PyTorch FSDP — PyTorch-native equivalent of ZeRO-3. Owned by Rassul.</a:t>
+            </a:r>
+          </a:p>
+          <a:p>
+            <a:pPr>
+              <a:spcAft>
+                <a:spcPts val="800"/>
+              </a:spcAft>
+            </a:pPr>
+            <a:r>
+              <a:rPr sz="2200">
+                <a:solidFill>
+                  <a:srgbClr val="101010"/>
+                </a:solidFill>
+              </a:rPr>
+              <a:t>•  Tensor Parallel — splits each layer's matmuls across the two nodes. Owned by Rassul.</a:t>
             </a:r>
           </a:p>
           <a:p>
@@ -7698,8 +7631,8 @@
         </p:nvSpPr>
         <p:spPr>
           <a:xfrm>
-            <a:off x="548640" y="365760"/>
-            <a:ext cx="11064240" cy="822960"/>
+            <a:off x="548640" y="2834640"/>
+            <a:ext cx="11064240" cy="1280160"/>
           </a:xfrm>
           <a:prstGeom prst="rect">
             <a:avLst/>
@@ -7712,75 +7645,18 @@
           </a:bodyPr>
           <a:lstStyle/>
           <a:p>
-            <a:pPr algn="l"/>
-            <a:r>
-              <a:rPr sz="3400" b="1">
-                <a:solidFill>
-                  <a:srgbClr val="101010"/>
-                </a:solidFill>
-              </a:rPr>
-              <a:t>DDP — GPU utilization over time</a:t>
-            </a:r>
-          </a:p>
-        </p:txBody>
-      </p:sp>
-      <p:sp>
-        <p:nvSpPr>
-          <p:cNvPr id="3" name="TextBox 2"/>
-          <p:cNvSpPr txBox="1"/>
-          <p:nvPr/>
-        </p:nvSpPr>
-        <p:spPr>
-          <a:xfrm>
-            <a:off x="548640" y="1051560"/>
-            <a:ext cx="11064240" cy="365760"/>
-          </a:xfrm>
-          <a:prstGeom prst="rect">
-            <a:avLst/>
-          </a:prstGeom>
-          <a:noFill/>
-        </p:spPr>
-        <p:txBody>
-          <a:bodyPr wrap="none">
-            <a:spAutoFit/>
-          </a:bodyPr>
-          <a:lstStyle/>
-          <a:p>
-            <a:r>
-              <a:rPr sz="1800" i="1">
-                <a:solidFill>
-                  <a:srgbClr val="555555"/>
-                </a:solidFill>
-              </a:rPr>
-              <a:t>Sharp drops on every step are AllReduce stalls — the cost of cross-node Ethernet.</a:t>
-            </a:r>
-          </a:p>
-        </p:txBody>
-      </p:sp>
-      <p:pic>
-        <p:nvPicPr>
-          <p:cNvPr id="4" name="Picture 3" descr="gpu_utilization_curve.png"/>
-          <p:cNvPicPr>
-            <a:picLocks noChangeAspect="1"/>
-          </p:cNvPicPr>
-          <p:nvPr/>
-        </p:nvPicPr>
-        <p:blipFill>
-          <a:blip r:embed="rId2"/>
-          <a:stretch>
-            <a:fillRect/>
-          </a:stretch>
-        </p:blipFill>
-        <p:spPr>
-          <a:xfrm>
-            <a:off x="1979676" y="1371600"/>
-            <a:ext cx="8229600" cy="5143500"/>
-          </a:xfrm>
-          <a:prstGeom prst="rect">
-            <a:avLst/>
-          </a:prstGeom>
-        </p:spPr>
-      </p:pic>
+            <a:pPr algn="ctr"/>
+            <a:r>
+              <a:rPr sz="5400" b="0">
+                <a:solidFill>
+                  <a:srgbClr val="101010"/>
+                </a:solidFill>
+              </a:rPr>
+              <a:t>Pipeline Parallelism</a:t>
+            </a:r>
+          </a:p>
+        </p:txBody>
+      </p:sp>
     </p:spTree>
   </p:cSld>
   <p:clrMapOvr>
@@ -7807,8 +7683,8 @@
         </p:nvSpPr>
         <p:spPr>
           <a:xfrm>
-            <a:off x="548640" y="2834640"/>
-            <a:ext cx="11064240" cy="1280160"/>
+            <a:off x="548640" y="365760"/>
+            <a:ext cx="11064240" cy="822960"/>
           </a:xfrm>
           <a:prstGeom prst="rect">
             <a:avLst/>
@@ -7821,14 +7697,157 @@
           </a:bodyPr>
           <a:lstStyle/>
           <a:p>
-            <a:pPr algn="ctr"/>
-            <a:r>
-              <a:rPr sz="5400" b="0">
-                <a:solidFill>
-                  <a:srgbClr val="101010"/>
-                </a:solidFill>
-              </a:rPr>
-              <a:t>Pipeline Parallelism</a:t>
+            <a:pPr algn="l"/>
+            <a:r>
+              <a:rPr sz="3400" b="1">
+                <a:solidFill>
+                  <a:srgbClr val="101010"/>
+                </a:solidFill>
+              </a:rPr>
+              <a:t>How we built it (Ghallab)</a:t>
+            </a:r>
+          </a:p>
+        </p:txBody>
+      </p:sp>
+      <p:sp>
+        <p:nvSpPr>
+          <p:cNvPr id="3" name="TextBox 2"/>
+          <p:cNvSpPr txBox="1"/>
+          <p:nvPr/>
+        </p:nvSpPr>
+        <p:spPr>
+          <a:xfrm>
+            <a:off x="548640" y="1371600"/>
+            <a:ext cx="11064240" cy="5120640"/>
+          </a:xfrm>
+          <a:prstGeom prst="rect">
+            <a:avLst/>
+          </a:prstGeom>
+          <a:noFill/>
+        </p:spPr>
+        <p:txBody>
+          <a:bodyPr wrap="square" anchor="ctr">
+            <a:spAutoFit/>
+          </a:bodyPr>
+          <a:lstStyle/>
+          <a:p>
+            <a:pPr>
+              <a:spcAft>
+                <a:spcPts val="800"/>
+              </a:spcAft>
+            </a:pPr>
+            <a:r>
+              <a:rPr sz="2200">
+                <a:solidFill>
+                  <a:srgbClr val="101010"/>
+                </a:solidFill>
+              </a:rPr>
+              <a:t>•  Manual two-stage pipeline. We didn't use torchgpipe or DeepSpeed-Pipeline.</a:t>
+            </a:r>
+          </a:p>
+          <a:p>
+            <a:pPr lvl="1">
+              <a:spcAft>
+                <a:spcPts val="400"/>
+              </a:spcAft>
+            </a:pPr>
+            <a:r>
+              <a:rPr sz="1900">
+                <a:solidFill>
+                  <a:srgbClr val="555555"/>
+                </a:solidFill>
+              </a:rPr>
+              <a:t>    –  Custom training loop: LLaVA/llava/train/train_pipe_dist.py (~520 lines).</a:t>
+            </a:r>
+          </a:p>
+          <a:p>
+            <a:pPr lvl="1">
+              <a:spcAft>
+                <a:spcPts val="400"/>
+              </a:spcAft>
+            </a:pPr>
+            <a:r>
+              <a:rPr sz="1900">
+                <a:solidFill>
+                  <a:srgbClr val="555555"/>
+                </a:solidFill>
+              </a:rPr>
+              <a:t>    –  Gloo backend for cross-node send/recv. NCCL had ordering issues with our mixed-dtype activations.</a:t>
+            </a:r>
+          </a:p>
+          <a:p>
+            <a:pPr>
+              <a:spcAft>
+                <a:spcPts val="800"/>
+              </a:spcAft>
+            </a:pPr>
+            <a:r>
+              <a:rPr sz="2200">
+                <a:solidFill>
+                  <a:srgbClr val="101010"/>
+                </a:solidFill>
+              </a:rPr>
+              <a:t>•  The model is cut at decoder layer k. There are 32 decoder layers in Vicuna-7B.</a:t>
+            </a:r>
+          </a:p>
+          <a:p>
+            <a:pPr lvl="1">
+              <a:spcAft>
+                <a:spcPts val="400"/>
+              </a:spcAft>
+            </a:pPr>
+            <a:r>
+              <a:rPr sz="1900">
+                <a:solidFill>
+                  <a:srgbClr val="555555"/>
+                </a:solidFill>
+              </a:rPr>
+              <a:t>    –  Rank 0 holds the vision tower (frozen), the MLP projection, and decoder layers 0..k-1.</a:t>
+            </a:r>
+          </a:p>
+          <a:p>
+            <a:pPr lvl="1">
+              <a:spcAft>
+                <a:spcPts val="400"/>
+              </a:spcAft>
+            </a:pPr>
+            <a:r>
+              <a:rPr sz="1900">
+                <a:solidFill>
+                  <a:srgbClr val="555555"/>
+                </a:solidFill>
+              </a:rPr>
+              <a:t>    –  Rank 1 holds layers k..31, the final norm, the LM head, and computes loss.</a:t>
+            </a:r>
+          </a:p>
+          <a:p>
+            <a:pPr lvl="1">
+              <a:spcAft>
+                <a:spcPts val="400"/>
+              </a:spcAft>
+            </a:pPr>
+            <a:r>
+              <a:rPr sz="1900">
+                <a:solidFill>
+                  <a:srgbClr val="555555"/>
+                </a:solidFill>
+              </a:rPr>
+              <a:t>    –  Activations flow forward, gradients flow back, by hand.</a:t>
+            </a:r>
+          </a:p>
+          <a:p>
+            <a:pPr>
+              <a:spcAft>
+                <a:spcPts val="800"/>
+              </a:spcAft>
+            </a:pPr>
+            <a:r>
+              <a:rPr sz="2200">
+                <a:solidFill>
+                  <a:srgbClr val="101010"/>
+                </a:solidFill>
+              </a:rPr>
+              <a:t>•  Gradient accumulation 16, microbatch 1 → effective batch 16. LoRA is added on each rank's local layers.</a:t>
             </a:r>
           </a:p>
         </p:txBody>
